--- a/presentation_rxneurones_lenet5.pptx
+++ b/presentation_rxneurones_lenet5.pptx
@@ -6,16 +6,13 @@
   </p:sldMasterIdLst>
   <p:sldIdLst>
     <p:sldId id="256" r:id="rId7"/>
-    <p:sldId id="257" r:id="rId8"/>
-    <p:sldId id="258" r:id="rId9"/>
-    <p:sldId id="259" r:id="rId10"/>
-    <p:sldId id="260" r:id="rId11"/>
-    <p:sldId id="261" r:id="rId12"/>
-    <p:sldId id="262" r:id="rId13"/>
-    <p:sldId id="263" r:id="rId14"/>
-    <p:sldId id="264" r:id="rId15"/>
-    <p:sldId id="265" r:id="rId16"/>
-    <p:sldId id="266" r:id="rId17"/>
+    <p:sldId id="257" r:id="rId9"/>
+    <p:sldId id="258" r:id="rId10"/>
+    <p:sldId id="259" r:id="rId11"/>
+    <p:sldId id="260" r:id="rId12"/>
+    <p:sldId id="261" r:id="rId13"/>
+    <p:sldId id="262" r:id="rId14"/>
+    <p:sldId id="263" r:id="rId15"/>
   </p:sldIdLst>
   <p:sldSz cx="12191695" cy="6858000" type="screen4x3"/>
   <p:notesSz cx="6858000" cy="9144000"/>
@@ -115,6 +112,916 @@
     </a:lvl9pPr>
   </p:defaultTextStyle>
 </p:presentation>
+</file>
+
+<file path=ppt/notesMasters/notesMaster1.xml><?xml version="1.0" encoding="utf-8"?>
+<p:notesMaster xmlns:a="http://schemas.openxmlformats.org/drawingml/2006/main" xmlns:p="http://schemas.openxmlformats.org/presentationml/2006/main" xmlns:r="http://schemas.openxmlformats.org/officeDocument/2006/relationships">
+  <p:cSld>
+    <p:bg>
+      <p:bgRef idx="1001">
+        <a:schemeClr val="bg1"/>
+      </p:bgRef>
+    </p:bg>
+    <p:spTree>
+      <p:nvGrpSpPr>
+        <p:cNvPr id="1" name=""/>
+        <p:cNvGrpSpPr/>
+        <p:nvPr/>
+      </p:nvGrpSpPr>
+      <p:grpSpPr>
+        <a:xfrm>
+          <a:off x="0" y="0"/>
+          <a:ext cx="0" cy="0"/>
+          <a:chOff x="0" y="0"/>
+          <a:chExt cx="0" cy="0"/>
+        </a:xfrm>
+      </p:grpSpPr>
+      <p:sp>
+        <p:nvSpPr>
+          <p:cNvPr id="2" name="Header Placeholder 1"/>
+          <p:cNvSpPr>
+            <a:spLocks noGrp="1"/>
+          </p:cNvSpPr>
+          <p:nvPr>
+            <p:ph type="hdr" sz="quarter"/>
+          </p:nvPr>
+        </p:nvSpPr>
+        <p:spPr>
+          <a:xfrm>
+            <a:off x="0" y="0"/>
+            <a:ext cx="2971800" cy="457200"/>
+          </a:xfrm>
+          <a:prstGeom prst="rect">
+            <a:avLst/>
+          </a:prstGeom>
+        </p:spPr>
+        <p:txBody>
+          <a:bodyPr vert="horz" lIns="91440" tIns="45720" rIns="91440" bIns="45720" rtlCol="0"/>
+          <a:lstStyle>
+            <a:lvl1pPr algn="l">
+              <a:defRPr sz="1200"/>
+            </a:lvl1pPr>
+          </a:lstStyle>
+          <a:p>
+            <a:endParaRPr lang="en-US"/>
+          </a:p>
+        </p:txBody>
+      </p:sp>
+      <p:sp>
+        <p:nvSpPr>
+          <p:cNvPr id="3" name="Date Placeholder 2"/>
+          <p:cNvSpPr>
+            <a:spLocks noGrp="1"/>
+          </p:cNvSpPr>
+          <p:nvPr>
+            <p:ph type="dt" idx="1"/>
+          </p:nvPr>
+        </p:nvSpPr>
+        <p:spPr>
+          <a:xfrm>
+            <a:off x="3884613" y="0"/>
+            <a:ext cx="2971800" cy="457200"/>
+          </a:xfrm>
+          <a:prstGeom prst="rect">
+            <a:avLst/>
+          </a:prstGeom>
+        </p:spPr>
+        <p:txBody>
+          <a:bodyPr vert="horz" lIns="91440" tIns="45720" rIns="91440" bIns="45720" rtlCol="0"/>
+          <a:lstStyle>
+            <a:lvl1pPr algn="r">
+              <a:defRPr sz="1200"/>
+            </a:lvl1pPr>
+          </a:lstStyle>
+          <a:p>
+            <a:fld id="{0F89C1C7-3DCD-1040-A9CF-14679D8B5DDD}" type="datetimeFigureOut">
+              <a:rPr lang="en-US" smtClean="0"/>
+              <a:t>10/17/16</a:t>
+            </a:fld>
+            <a:endParaRPr lang="en-US"/>
+          </a:p>
+        </p:txBody>
+      </p:sp>
+      <p:sp>
+        <p:nvSpPr>
+          <p:cNvPr id="4" name="Slide Image Placeholder 3"/>
+          <p:cNvSpPr>
+            <a:spLocks noGrp="1" noRot="1" noChangeAspect="1"/>
+          </p:cNvSpPr>
+          <p:nvPr>
+            <p:ph type="sldImg" idx="2"/>
+          </p:nvPr>
+        </p:nvSpPr>
+        <p:spPr>
+          <a:xfrm>
+            <a:off x="1143000" y="685800"/>
+            <a:ext cx="4572000" cy="3429000"/>
+          </a:xfrm>
+          <a:prstGeom prst="rect">
+            <a:avLst/>
+          </a:prstGeom>
+          <a:noFill/>
+          <a:ln w="12700">
+            <a:solidFill>
+              <a:prstClr val="black"/>
+            </a:solidFill>
+          </a:ln>
+        </p:spPr>
+        <p:txBody>
+          <a:bodyPr vert="horz" lIns="91440" tIns="45720" rIns="91440" bIns="45720" rtlCol="0" anchor="ctr"/>
+          <a:lstStyle/>
+          <a:p>
+            <a:endParaRPr lang="en-US"/>
+          </a:p>
+        </p:txBody>
+      </p:sp>
+      <p:sp>
+        <p:nvSpPr>
+          <p:cNvPr id="5" name="Notes Placeholder 4"/>
+          <p:cNvSpPr>
+            <a:spLocks noGrp="1"/>
+          </p:cNvSpPr>
+          <p:nvPr>
+            <p:ph type="body" sz="quarter" idx="3"/>
+          </p:nvPr>
+        </p:nvSpPr>
+        <p:spPr>
+          <a:xfrm>
+            <a:off x="685800" y="4343400"/>
+            <a:ext cx="5486400" cy="4114800"/>
+          </a:xfrm>
+          <a:prstGeom prst="rect">
+            <a:avLst/>
+          </a:prstGeom>
+        </p:spPr>
+        <p:txBody>
+          <a:bodyPr vert="horz" lIns="91440" tIns="45720" rIns="91440" bIns="45720" rtlCol="0"/>
+          <a:lstStyle/>
+          <a:p>
+            <a:pPr lvl="0"/>
+            <a:r>
+              <a:rPr lang="en-US" smtClean="0"/>
+              <a:t>Click to edit Master text styles</a:t>
+            </a:r>
+          </a:p>
+          <a:p>
+            <a:pPr lvl="1"/>
+            <a:r>
+              <a:rPr lang="en-US" smtClean="0"/>
+              <a:t>Second level</a:t>
+            </a:r>
+          </a:p>
+          <a:p>
+            <a:pPr lvl="2"/>
+            <a:r>
+              <a:rPr lang="en-US" smtClean="0"/>
+              <a:t>Third level</a:t>
+            </a:r>
+          </a:p>
+          <a:p>
+            <a:pPr lvl="3"/>
+            <a:r>
+              <a:rPr lang="en-US" smtClean="0"/>
+              <a:t>Fourth level</a:t>
+            </a:r>
+          </a:p>
+          <a:p>
+            <a:pPr lvl="4"/>
+            <a:r>
+              <a:rPr lang="en-US" smtClean="0"/>
+              <a:t>Fifth level</a:t>
+            </a:r>
+            <a:endParaRPr lang="en-US"/>
+          </a:p>
+        </p:txBody>
+      </p:sp>
+      <p:sp>
+        <p:nvSpPr>
+          <p:cNvPr id="6" name="Footer Placeholder 5"/>
+          <p:cNvSpPr>
+            <a:spLocks noGrp="1"/>
+          </p:cNvSpPr>
+          <p:nvPr>
+            <p:ph type="ftr" sz="quarter" idx="4"/>
+          </p:nvPr>
+        </p:nvSpPr>
+        <p:spPr>
+          <a:xfrm>
+            <a:off x="0" y="8685213"/>
+            <a:ext cx="2971800" cy="457200"/>
+          </a:xfrm>
+          <a:prstGeom prst="rect">
+            <a:avLst/>
+          </a:prstGeom>
+        </p:spPr>
+        <p:txBody>
+          <a:bodyPr vert="horz" lIns="91440" tIns="45720" rIns="91440" bIns="45720" rtlCol="0" anchor="b"/>
+          <a:lstStyle>
+            <a:lvl1pPr algn="l">
+              <a:defRPr sz="1200"/>
+            </a:lvl1pPr>
+          </a:lstStyle>
+          <a:p>
+            <a:endParaRPr lang="en-US"/>
+          </a:p>
+        </p:txBody>
+      </p:sp>
+      <p:sp>
+        <p:nvSpPr>
+          <p:cNvPr id="7" name="Slide Number Placeholder 6"/>
+          <p:cNvSpPr>
+            <a:spLocks noGrp="1"/>
+          </p:cNvSpPr>
+          <p:nvPr>
+            <p:ph type="sldNum" sz="quarter" idx="5"/>
+          </p:nvPr>
+        </p:nvSpPr>
+        <p:spPr>
+          <a:xfrm>
+            <a:off x="3884613" y="8685213"/>
+            <a:ext cx="2971800" cy="457200"/>
+          </a:xfrm>
+          <a:prstGeom prst="rect">
+            <a:avLst/>
+          </a:prstGeom>
+        </p:spPr>
+        <p:txBody>
+          <a:bodyPr vert="horz" lIns="91440" tIns="45720" rIns="91440" bIns="45720" rtlCol="0" anchor="b"/>
+          <a:lstStyle>
+            <a:lvl1pPr algn="r">
+              <a:defRPr sz="1200"/>
+            </a:lvl1pPr>
+          </a:lstStyle>
+          <a:p>
+            <a:fld id="{BB5E49A5-4136-284D-997B-48E1D791AD67}" type="slidenum">
+              <a:rPr lang="en-US" smtClean="0"/>
+              <a:t>‹#›</a:t>
+            </a:fld>
+            <a:endParaRPr lang="en-US"/>
+          </a:p>
+        </p:txBody>
+      </p:sp>
+    </p:spTree>
+    <p:extLst>
+      <p:ext uri="{BB962C8B-B14F-4D97-AF65-F5344CB8AC3E}">
+        <p14:creationId xmlns:p14="http://schemas.microsoft.com/office/powerpoint/2010/main" val="2623252185"/>
+      </p:ext>
+    </p:extLst>
+  </p:cSld>
+  <p:clrMap bg1="lt1" tx1="dk1" bg2="lt2" tx2="dk2" accent1="accent1" accent2="accent2" accent3="accent3" accent4="accent4" accent5="accent5" accent6="accent6" hlink="hlink" folHlink="folHlink"/>
+  <p:notesStyle>
+    <a:lvl1pPr marL="0" algn="l" defTabSz="457200" rtl="0" eaLnBrk="1" latinLnBrk="0" hangingPunct="1">
+      <a:defRPr sz="1200" kern="1200">
+        <a:solidFill>
+          <a:schemeClr val="tx1"/>
+        </a:solidFill>
+        <a:latin typeface="+mn-lt"/>
+        <a:ea typeface="+mn-ea"/>
+        <a:cs typeface="+mn-cs"/>
+      </a:defRPr>
+    </a:lvl1pPr>
+    <a:lvl2pPr marL="457200" algn="l" defTabSz="457200" rtl="0" eaLnBrk="1" latinLnBrk="0" hangingPunct="1">
+      <a:defRPr sz="1200" kern="1200">
+        <a:solidFill>
+          <a:schemeClr val="tx1"/>
+        </a:solidFill>
+        <a:latin typeface="+mn-lt"/>
+        <a:ea typeface="+mn-ea"/>
+        <a:cs typeface="+mn-cs"/>
+      </a:defRPr>
+    </a:lvl2pPr>
+    <a:lvl3pPr marL="914400" algn="l" defTabSz="457200" rtl="0" eaLnBrk="1" latinLnBrk="0" hangingPunct="1">
+      <a:defRPr sz="1200" kern="1200">
+        <a:solidFill>
+          <a:schemeClr val="tx1"/>
+        </a:solidFill>
+        <a:latin typeface="+mn-lt"/>
+        <a:ea typeface="+mn-ea"/>
+        <a:cs typeface="+mn-cs"/>
+      </a:defRPr>
+    </a:lvl3pPr>
+    <a:lvl4pPr marL="1371600" algn="l" defTabSz="457200" rtl="0" eaLnBrk="1" latinLnBrk="0" hangingPunct="1">
+      <a:defRPr sz="1200" kern="1200">
+        <a:solidFill>
+          <a:schemeClr val="tx1"/>
+        </a:solidFill>
+        <a:latin typeface="+mn-lt"/>
+        <a:ea typeface="+mn-ea"/>
+        <a:cs typeface="+mn-cs"/>
+      </a:defRPr>
+    </a:lvl4pPr>
+    <a:lvl5pPr marL="1828800" algn="l" defTabSz="457200" rtl="0" eaLnBrk="1" latinLnBrk="0" hangingPunct="1">
+      <a:defRPr sz="1200" kern="1200">
+        <a:solidFill>
+          <a:schemeClr val="tx1"/>
+        </a:solidFill>
+        <a:latin typeface="+mn-lt"/>
+        <a:ea typeface="+mn-ea"/>
+        <a:cs typeface="+mn-cs"/>
+      </a:defRPr>
+    </a:lvl5pPr>
+    <a:lvl6pPr marL="2286000" algn="l" defTabSz="457200" rtl="0" eaLnBrk="1" latinLnBrk="0" hangingPunct="1">
+      <a:defRPr sz="1200" kern="1200">
+        <a:solidFill>
+          <a:schemeClr val="tx1"/>
+        </a:solidFill>
+        <a:latin typeface="+mn-lt"/>
+        <a:ea typeface="+mn-ea"/>
+        <a:cs typeface="+mn-cs"/>
+      </a:defRPr>
+    </a:lvl6pPr>
+    <a:lvl7pPr marL="2743200" algn="l" defTabSz="457200" rtl="0" eaLnBrk="1" latinLnBrk="0" hangingPunct="1">
+      <a:defRPr sz="1200" kern="1200">
+        <a:solidFill>
+          <a:schemeClr val="tx1"/>
+        </a:solidFill>
+        <a:latin typeface="+mn-lt"/>
+        <a:ea typeface="+mn-ea"/>
+        <a:cs typeface="+mn-cs"/>
+      </a:defRPr>
+    </a:lvl7pPr>
+    <a:lvl8pPr marL="3200400" algn="l" defTabSz="457200" rtl="0" eaLnBrk="1" latinLnBrk="0" hangingPunct="1">
+      <a:defRPr sz="1200" kern="1200">
+        <a:solidFill>
+          <a:schemeClr val="tx1"/>
+        </a:solidFill>
+        <a:latin typeface="+mn-lt"/>
+        <a:ea typeface="+mn-ea"/>
+        <a:cs typeface="+mn-cs"/>
+      </a:defRPr>
+    </a:lvl8pPr>
+    <a:lvl9pPr marL="3657600" algn="l" defTabSz="457200" rtl="0" eaLnBrk="1" latinLnBrk="0" hangingPunct="1">
+      <a:defRPr sz="1200" kern="1200">
+        <a:solidFill>
+          <a:schemeClr val="tx1"/>
+        </a:solidFill>
+        <a:latin typeface="+mn-lt"/>
+        <a:ea typeface="+mn-ea"/>
+        <a:cs typeface="+mn-cs"/>
+      </a:defRPr>
+    </a:lvl9pPr>
+  </p:notesStyle>
+</p:notesMaster>
+</file>
+
+<file path=ppt/notesSlides/notesSlide1.xml><?xml version="1.0" encoding="utf-8"?>
+<p:notes xmlns:a="http://schemas.openxmlformats.org/drawingml/2006/main" xmlns:p="http://schemas.openxmlformats.org/presentationml/2006/main" xmlns:r="http://schemas.openxmlformats.org/officeDocument/2006/relationships">
+  <p:cSld>
+    <p:spTree>
+      <p:nvGrpSpPr>
+        <p:cNvPr id="1" name=""/>
+        <p:cNvGrpSpPr/>
+        <p:nvPr/>
+      </p:nvGrpSpPr>
+      <p:grpSpPr>
+        <a:xfrm>
+          <a:off x="0" y="0"/>
+          <a:ext cx="0" cy="0"/>
+          <a:chOff x="0" y="0"/>
+          <a:chExt cx="0" cy="0"/>
+        </a:xfrm>
+      </p:grpSpPr>
+      <p:sp>
+        <p:nvSpPr>
+          <p:cNvPr id="2" name="Slide Image Placeholder 1"/>
+          <p:cNvSpPr>
+            <a:spLocks noGrp="1"/>
+          </p:cNvSpPr>
+          <p:nvPr>
+            <p:ph type="sldImg" idx="2"/>
+          </p:nvPr>
+        </p:nvSpPr>
+        <p:spPr/>
+      </p:sp>
+      <p:sp>
+        <p:nvSpPr>
+          <p:cNvPr id="3" name="Notes Placeholder 2"/>
+          <p:cNvSpPr>
+            <a:spLocks noGrp="1"/>
+          </p:cNvSpPr>
+          <p:nvPr>
+            <p:ph type="body" idx="3" sz="quarter"/>
+          </p:nvPr>
+        </p:nvSpPr>
+        <p:spPr/>
+        <p:txBody>
+          <a:bodyPr/>
+          <a:lstStyle/>
+          <a:p>
+            <a:r>
+              <a:t>Bonjour à tous. Je vous présente aujourd'hui LeNet-5, conçue en 1998 par Yann LeCun et son équipe. C'est une architecture strictement CONVOLUTIVE (CNN), pionnière du deep learning.</a:t>
+            </a:r>
+          </a:p>
+        </p:txBody>
+      </p:sp>
+      <p:sp>
+        <p:nvSpPr>
+          <p:cNvPr id="4" name="Slide Number Placeholder 3"/>
+          <p:cNvSpPr>
+            <a:spLocks noGrp="1"/>
+          </p:cNvSpPr>
+          <p:nvPr>
+            <p:ph type="sldNum" idx="5" sz="quarter"/>
+          </p:nvPr>
+        </p:nvSpPr>
+        <p:spPr/>
+      </p:sp>
+    </p:spTree>
+  </p:cSld>
+  <p:clrMapOvr>
+    <a:masterClrMapping/>
+  </p:clrMapOvr>
+</p:notes>
+</file>
+
+<file path=ppt/notesSlides/notesSlide2.xml><?xml version="1.0" encoding="utf-8"?>
+<p:notes xmlns:a="http://schemas.openxmlformats.org/drawingml/2006/main" xmlns:p="http://schemas.openxmlformats.org/presentationml/2006/main" xmlns:r="http://schemas.openxmlformats.org/officeDocument/2006/relationships">
+  <p:cSld>
+    <p:spTree>
+      <p:nvGrpSpPr>
+        <p:cNvPr id="1" name=""/>
+        <p:cNvGrpSpPr/>
+        <p:nvPr/>
+      </p:nvGrpSpPr>
+      <p:grpSpPr>
+        <a:xfrm>
+          <a:off x="0" y="0"/>
+          <a:ext cx="0" cy="0"/>
+          <a:chOff x="0" y="0"/>
+          <a:chExt cx="0" cy="0"/>
+        </a:xfrm>
+      </p:grpSpPr>
+      <p:sp>
+        <p:nvSpPr>
+          <p:cNvPr id="2" name="Slide Image Placeholder 1"/>
+          <p:cNvSpPr>
+            <a:spLocks noGrp="1"/>
+          </p:cNvSpPr>
+          <p:nvPr>
+            <p:ph type="sldImg" idx="2"/>
+          </p:nvPr>
+        </p:nvSpPr>
+        <p:spPr/>
+      </p:sp>
+      <p:sp>
+        <p:nvSpPr>
+          <p:cNvPr id="3" name="Notes Placeholder 2"/>
+          <p:cNvSpPr>
+            <a:spLocks noGrp="1"/>
+          </p:cNvSpPr>
+          <p:nvPr>
+            <p:ph type="body" idx="3" sz="quarter"/>
+          </p:nvPr>
+        </p:nvSpPr>
+        <p:spPr/>
+        <p:txBody>
+          <a:bodyPr/>
+          <a:lstStyle/>
+          <a:p>
+            <a:r>
+              <a:t>Avant LeNet-5, les réseaux fully-connected détruisaient la 2D et explosaient en nombre de poids. LeNet-5 résout ce problème fondamental par la convolution locale.</a:t>
+            </a:r>
+          </a:p>
+        </p:txBody>
+      </p:sp>
+      <p:sp>
+        <p:nvSpPr>
+          <p:cNvPr id="4" name="Slide Number Placeholder 3"/>
+          <p:cNvSpPr>
+            <a:spLocks noGrp="1"/>
+          </p:cNvSpPr>
+          <p:nvPr>
+            <p:ph type="sldNum" idx="5" sz="quarter"/>
+          </p:nvPr>
+        </p:nvSpPr>
+        <p:spPr/>
+      </p:sp>
+    </p:spTree>
+  </p:cSld>
+  <p:clrMapOvr>
+    <a:masterClrMapping/>
+  </p:clrMapOvr>
+</p:notes>
+</file>
+
+<file path=ppt/notesSlides/notesSlide3.xml><?xml version="1.0" encoding="utf-8"?>
+<p:notes xmlns:a="http://schemas.openxmlformats.org/drawingml/2006/main" xmlns:p="http://schemas.openxmlformats.org/presentationml/2006/main" xmlns:r="http://schemas.openxmlformats.org/officeDocument/2006/relationships">
+  <p:cSld>
+    <p:spTree>
+      <p:nvGrpSpPr>
+        <p:cNvPr id="1" name=""/>
+        <p:cNvGrpSpPr/>
+        <p:nvPr/>
+      </p:nvGrpSpPr>
+      <p:grpSpPr>
+        <a:xfrm>
+          <a:off x="0" y="0"/>
+          <a:ext cx="0" cy="0"/>
+          <a:chOff x="0" y="0"/>
+          <a:chExt cx="0" cy="0"/>
+        </a:xfrm>
+      </p:grpSpPr>
+      <p:sp>
+        <p:nvSpPr>
+          <p:cNvPr id="2" name="Slide Image Placeholder 1"/>
+          <p:cNvSpPr>
+            <a:spLocks noGrp="1"/>
+          </p:cNvSpPr>
+          <p:nvPr>
+            <p:ph type="sldImg" idx="2"/>
+          </p:nvPr>
+        </p:nvSpPr>
+        <p:spPr/>
+      </p:sp>
+      <p:sp>
+        <p:nvSpPr>
+          <p:cNvPr id="3" name="Notes Placeholder 2"/>
+          <p:cNvSpPr>
+            <a:spLocks noGrp="1"/>
+          </p:cNvSpPr>
+          <p:nvPr>
+            <p:ph type="body" idx="3" sz="quarter"/>
+          </p:nvPr>
+        </p:nvSpPr>
+        <p:spPr/>
+        <p:txBody>
+          <a:bodyPr/>
+          <a:lstStyle/>
+          <a:p>
+            <a:r>
+              <a:t>Voici le pipeline historique en 7 couches : 2 blocs Convolution-Subsampling (C1-S2 puis C3-S4) qui réduisent la taille tout en enrichissant les filtres, suivis de couches denses de classification (C5, F6, Sortie).</a:t>
+            </a:r>
+          </a:p>
+        </p:txBody>
+      </p:sp>
+      <p:sp>
+        <p:nvSpPr>
+          <p:cNvPr id="4" name="Slide Number Placeholder 3"/>
+          <p:cNvSpPr>
+            <a:spLocks noGrp="1"/>
+          </p:cNvSpPr>
+          <p:nvPr>
+            <p:ph type="sldNum" idx="5" sz="quarter"/>
+          </p:nvPr>
+        </p:nvSpPr>
+        <p:spPr/>
+      </p:sp>
+    </p:spTree>
+  </p:cSld>
+  <p:clrMapOvr>
+    <a:masterClrMapping/>
+  </p:clrMapOvr>
+</p:notes>
+</file>
+
+<file path=ppt/notesSlides/notesSlide4.xml><?xml version="1.0" encoding="utf-8"?>
+<p:notes xmlns:a="http://schemas.openxmlformats.org/drawingml/2006/main" xmlns:p="http://schemas.openxmlformats.org/presentationml/2006/main" xmlns:r="http://schemas.openxmlformats.org/officeDocument/2006/relationships">
+  <p:cSld>
+    <p:spTree>
+      <p:nvGrpSpPr>
+        <p:cNvPr id="1" name=""/>
+        <p:cNvGrpSpPr/>
+        <p:nvPr/>
+      </p:nvGrpSpPr>
+      <p:grpSpPr>
+        <a:xfrm>
+          <a:off x="0" y="0"/>
+          <a:ext cx="0" cy="0"/>
+          <a:chOff x="0" y="0"/>
+          <a:chExt cx="0" cy="0"/>
+        </a:xfrm>
+      </p:grpSpPr>
+      <p:sp>
+        <p:nvSpPr>
+          <p:cNvPr id="2" name="Slide Image Placeholder 1"/>
+          <p:cNvSpPr>
+            <a:spLocks noGrp="1"/>
+          </p:cNvSpPr>
+          <p:nvPr>
+            <p:ph type="sldImg" idx="2"/>
+          </p:nvPr>
+        </p:nvSpPr>
+        <p:spPr/>
+      </p:sp>
+      <p:sp>
+        <p:nvSpPr>
+          <p:cNvPr id="3" name="Notes Placeholder 2"/>
+          <p:cNvSpPr>
+            <a:spLocks noGrp="1"/>
+          </p:cNvSpPr>
+          <p:nvPr>
+            <p:ph type="body" idx="3" sz="quarter"/>
+          </p:nvPr>
+        </p:nvSpPr>
+        <p:spPr/>
+        <p:txBody>
+          <a:bodyPr/>
+          <a:lstStyle/>
+          <a:p>
+            <a:r>
+              <a:t>Dans l'article de 1998, LeCun rapporte un taux d'erreur de 0,8% sur MNIST avec 60 000 paramètres, surpassant tous les SVM et arbres de l'époque.</a:t>
+            </a:r>
+          </a:p>
+        </p:txBody>
+      </p:sp>
+      <p:sp>
+        <p:nvSpPr>
+          <p:cNvPr id="4" name="Slide Number Placeholder 3"/>
+          <p:cNvSpPr>
+            <a:spLocks noGrp="1"/>
+          </p:cNvSpPr>
+          <p:nvPr>
+            <p:ph type="sldNum" idx="5" sz="quarter"/>
+          </p:nvPr>
+        </p:nvSpPr>
+        <p:spPr/>
+      </p:sp>
+    </p:spTree>
+  </p:cSld>
+  <p:clrMapOvr>
+    <a:masterClrMapping/>
+  </p:clrMapOvr>
+</p:notes>
+</file>
+
+<file path=ppt/notesSlides/notesSlide5.xml><?xml version="1.0" encoding="utf-8"?>
+<p:notes xmlns:a="http://schemas.openxmlformats.org/drawingml/2006/main" xmlns:p="http://schemas.openxmlformats.org/presentationml/2006/main" xmlns:r="http://schemas.openxmlformats.org/officeDocument/2006/relationships">
+  <p:cSld>
+    <p:spTree>
+      <p:nvGrpSpPr>
+        <p:cNvPr id="1" name=""/>
+        <p:cNvGrpSpPr/>
+        <p:nvPr/>
+      </p:nvGrpSpPr>
+      <p:grpSpPr>
+        <a:xfrm>
+          <a:off x="0" y="0"/>
+          <a:ext cx="0" cy="0"/>
+          <a:chOff x="0" y="0"/>
+          <a:chExt cx="0" cy="0"/>
+        </a:xfrm>
+      </p:grpSpPr>
+      <p:sp>
+        <p:nvSpPr>
+          <p:cNvPr id="2" name="Slide Image Placeholder 1"/>
+          <p:cNvSpPr>
+            <a:spLocks noGrp="1"/>
+          </p:cNvSpPr>
+          <p:nvPr>
+            <p:ph type="sldImg" idx="2"/>
+          </p:nvPr>
+        </p:nvSpPr>
+        <p:spPr/>
+      </p:sp>
+      <p:sp>
+        <p:nvSpPr>
+          <p:cNvPr id="3" name="Notes Placeholder 2"/>
+          <p:cNvSpPr>
+            <a:spLocks noGrp="1"/>
+          </p:cNvSpPr>
+          <p:nvPr>
+            <p:ph type="body" idx="3" sz="quarter"/>
+          </p:nvPr>
+        </p:nvSpPr>
+        <p:spPr/>
+        <p:txBody>
+          <a:bodyPr/>
+          <a:lstStyle/>
+          <a:p>
+            <a:r>
+              <a:t>Ce n'était pas un modèle purement académique : NCR l'a déployé pour traiter des millions de chèques par mois, soit près de 10% du volume bancaire américain.</a:t>
+            </a:r>
+          </a:p>
+        </p:txBody>
+      </p:sp>
+      <p:sp>
+        <p:nvSpPr>
+          <p:cNvPr id="4" name="Slide Number Placeholder 3"/>
+          <p:cNvSpPr>
+            <a:spLocks noGrp="1"/>
+          </p:cNvSpPr>
+          <p:nvPr>
+            <p:ph type="sldNum" idx="5" sz="quarter"/>
+          </p:nvPr>
+        </p:nvSpPr>
+        <p:spPr/>
+      </p:sp>
+    </p:spTree>
+  </p:cSld>
+  <p:clrMapOvr>
+    <a:masterClrMapping/>
+  </p:clrMapOvr>
+</p:notes>
+</file>
+
+<file path=ppt/notesSlides/notesSlide6.xml><?xml version="1.0" encoding="utf-8"?>
+<p:notes xmlns:a="http://schemas.openxmlformats.org/drawingml/2006/main" xmlns:p="http://schemas.openxmlformats.org/presentationml/2006/main" xmlns:r="http://schemas.openxmlformats.org/officeDocument/2006/relationships">
+  <p:cSld>
+    <p:spTree>
+      <p:nvGrpSpPr>
+        <p:cNvPr id="1" name=""/>
+        <p:cNvGrpSpPr/>
+        <p:nvPr/>
+      </p:nvGrpSpPr>
+      <p:grpSpPr>
+        <a:xfrm>
+          <a:off x="0" y="0"/>
+          <a:ext cx="0" cy="0"/>
+          <a:chOff x="0" y="0"/>
+          <a:chExt cx="0" cy="0"/>
+        </a:xfrm>
+      </p:grpSpPr>
+      <p:sp>
+        <p:nvSpPr>
+          <p:cNvPr id="2" name="Slide Image Placeholder 1"/>
+          <p:cNvSpPr>
+            <a:spLocks noGrp="1"/>
+          </p:cNvSpPr>
+          <p:nvPr>
+            <p:ph type="sldImg" idx="2"/>
+          </p:nvPr>
+        </p:nvSpPr>
+        <p:spPr/>
+      </p:sp>
+      <p:sp>
+        <p:nvSpPr>
+          <p:cNvPr id="3" name="Notes Placeholder 2"/>
+          <p:cNvSpPr>
+            <a:spLocks noGrp="1"/>
+          </p:cNvSpPr>
+          <p:nvPr>
+            <p:ph type="body" idx="3" sz="quarter"/>
+          </p:nvPr>
+        </p:nvSpPr>
+        <p:spPr/>
+        <p:txBody>
+          <a:bodyPr/>
+          <a:lstStyle/>
+          <a:p>
+            <a:r>
+              <a:t>En résumé des forces et faiblesses : une robustesse et compacité exceptionnelles, mais limité aux petites images 32x32 et freiné par les sigmoïdes et la puissance de calcul de 1998.</a:t>
+            </a:r>
+          </a:p>
+        </p:txBody>
+      </p:sp>
+      <p:sp>
+        <p:nvSpPr>
+          <p:cNvPr id="4" name="Slide Number Placeholder 3"/>
+          <p:cNvSpPr>
+            <a:spLocks noGrp="1"/>
+          </p:cNvSpPr>
+          <p:nvPr>
+            <p:ph type="sldNum" idx="5" sz="quarter"/>
+          </p:nvPr>
+        </p:nvSpPr>
+        <p:spPr/>
+      </p:sp>
+    </p:spTree>
+  </p:cSld>
+  <p:clrMapOvr>
+    <a:masterClrMapping/>
+  </p:clrMapOvr>
+</p:notes>
+</file>
+
+<file path=ppt/notesSlides/notesSlide7.xml><?xml version="1.0" encoding="utf-8"?>
+<p:notes xmlns:a="http://schemas.openxmlformats.org/drawingml/2006/main" xmlns:p="http://schemas.openxmlformats.org/presentationml/2006/main" xmlns:r="http://schemas.openxmlformats.org/officeDocument/2006/relationships">
+  <p:cSld>
+    <p:spTree>
+      <p:nvGrpSpPr>
+        <p:cNvPr id="1" name=""/>
+        <p:cNvGrpSpPr/>
+        <p:nvPr/>
+      </p:nvGrpSpPr>
+      <p:grpSpPr>
+        <a:xfrm>
+          <a:off x="0" y="0"/>
+          <a:ext cx="0" cy="0"/>
+          <a:chOff x="0" y="0"/>
+          <a:chExt cx="0" cy="0"/>
+        </a:xfrm>
+      </p:grpSpPr>
+      <p:sp>
+        <p:nvSpPr>
+          <p:cNvPr id="2" name="Slide Image Placeholder 1"/>
+          <p:cNvSpPr>
+            <a:spLocks noGrp="1"/>
+          </p:cNvSpPr>
+          <p:nvPr>
+            <p:ph type="sldImg" idx="2"/>
+          </p:nvPr>
+        </p:nvSpPr>
+        <p:spPr/>
+      </p:sp>
+      <p:sp>
+        <p:nvSpPr>
+          <p:cNvPr id="3" name="Notes Placeholder 2"/>
+          <p:cNvSpPr>
+            <a:spLocks noGrp="1"/>
+          </p:cNvSpPr>
+          <p:nvPr>
+            <p:ph type="body" idx="3" sz="quarter"/>
+          </p:nvPr>
+        </p:nvSpPr>
+        <p:spPr/>
+        <p:txBody>
+          <a:bodyPr/>
+          <a:lstStyle/>
+          <a:p>
+            <a:r>
+              <a:t>LeNet-5 est l'ancêtre direct d'AlexNet et de tous les modèles de vision modernes. Sans lui, la vision par ordinateur n'aurait pas connu cette explosion.</a:t>
+            </a:r>
+          </a:p>
+        </p:txBody>
+      </p:sp>
+      <p:sp>
+        <p:nvSpPr>
+          <p:cNvPr id="4" name="Slide Number Placeholder 3"/>
+          <p:cNvSpPr>
+            <a:spLocks noGrp="1"/>
+          </p:cNvSpPr>
+          <p:nvPr>
+            <p:ph type="sldNum" idx="5" sz="quarter"/>
+          </p:nvPr>
+        </p:nvSpPr>
+        <p:spPr/>
+      </p:sp>
+    </p:spTree>
+  </p:cSld>
+  <p:clrMapOvr>
+    <a:masterClrMapping/>
+  </p:clrMapOvr>
+</p:notes>
+</file>
+
+<file path=ppt/notesSlides/notesSlide8.xml><?xml version="1.0" encoding="utf-8"?>
+<p:notes xmlns:a="http://schemas.openxmlformats.org/drawingml/2006/main" xmlns:p="http://schemas.openxmlformats.org/presentationml/2006/main" xmlns:r="http://schemas.openxmlformats.org/officeDocument/2006/relationships">
+  <p:cSld>
+    <p:spTree>
+      <p:nvGrpSpPr>
+        <p:cNvPr id="1" name=""/>
+        <p:cNvGrpSpPr/>
+        <p:nvPr/>
+      </p:nvGrpSpPr>
+      <p:grpSpPr>
+        <a:xfrm>
+          <a:off x="0" y="0"/>
+          <a:ext cx="0" cy="0"/>
+          <a:chOff x="0" y="0"/>
+          <a:chExt cx="0" cy="0"/>
+        </a:xfrm>
+      </p:grpSpPr>
+      <p:sp>
+        <p:nvSpPr>
+          <p:cNvPr id="2" name="Slide Image Placeholder 1"/>
+          <p:cNvSpPr>
+            <a:spLocks noGrp="1"/>
+          </p:cNvSpPr>
+          <p:nvPr>
+            <p:ph type="sldImg" idx="2"/>
+          </p:nvPr>
+        </p:nvSpPr>
+        <p:spPr/>
+      </p:sp>
+      <p:sp>
+        <p:nvSpPr>
+          <p:cNvPr id="3" name="Notes Placeholder 2"/>
+          <p:cNvSpPr>
+            <a:spLocks noGrp="1"/>
+          </p:cNvSpPr>
+          <p:nvPr>
+            <p:ph type="body" idx="3" sz="quarter"/>
+          </p:nvPr>
+        </p:nvSpPr>
+        <p:spPr/>
+        <p:txBody>
+          <a:bodyPr/>
+          <a:lstStyle/>
+          <a:p>
+            <a:r>
+              <a:t>Merci pour votre attention. Je suis maintenant disponible pour répondre à vos questions.</a:t>
+            </a:r>
+          </a:p>
+        </p:txBody>
+      </p:sp>
+      <p:sp>
+        <p:nvSpPr>
+          <p:cNvPr id="4" name="Slide Number Placeholder 3"/>
+          <p:cNvSpPr>
+            <a:spLocks noGrp="1"/>
+          </p:cNvSpPr>
+          <p:nvPr>
+            <p:ph type="sldNum" idx="5" sz="quarter"/>
+          </p:nvPr>
+        </p:nvSpPr>
+        <p:spPr/>
+      </p:sp>
+    </p:spTree>
+  </p:cSld>
+  <p:clrMapOvr>
+    <a:masterClrMapping/>
+  </p:clrMapOvr>
+</p:notes>
 </file>
 
 <file path=ppt/slideLayouts/slideLayout1.xml><?xml version="1.0" encoding="utf-8"?>
@@ -3106,8 +4013,8 @@
         </p:nvSpPr>
         <p:spPr>
           <a:xfrm>
-            <a:off x="914400" y="914400"/>
-            <a:ext cx="10362895" cy="5029200"/>
+            <a:off x="914400" y="822960"/>
+            <a:ext cx="10362895" cy="5212080"/>
           </a:xfrm>
           <a:prstGeom prst="roundRect">
             <a:avLst/>
@@ -3151,8 +4058,8 @@
         </p:nvSpPr>
         <p:spPr>
           <a:xfrm>
-            <a:off x="1371600" y="1371600"/>
-            <a:ext cx="3291840" cy="411480"/>
+            <a:off x="1371600" y="1234440"/>
+            <a:ext cx="4389120" cy="384048"/>
           </a:xfrm>
           <a:prstGeom prst="roundRect">
             <a:avLst/>
@@ -3192,7 +4099,7 @@
               </a:defRPr>
             </a:pPr>
             <a:r>
-              <a:t>PROJET E26/A60 — INTELLIGENCE ARTIFICIELLE</a:t>
+              <a:t>ARCHITECTURE ASSIGNÉE : RÉSEAU CONVOLUTIF (CNN)</a:t>
             </a:r>
           </a:p>
         </p:txBody>
@@ -3205,8 +4112,8 @@
         </p:nvSpPr>
         <p:spPr>
           <a:xfrm>
-            <a:off x="1371600" y="2011680"/>
-            <a:ext cx="9418320" cy="1371600"/>
+            <a:off x="1371600" y="1737360"/>
+            <a:ext cx="9418320" cy="2011680"/>
           </a:xfrm>
           <a:prstGeom prst="rect">
             <a:avLst/>
@@ -3220,45 +4127,25 @@
           <a:lstStyle/>
           <a:p>
             <a:pPr>
-              <a:defRPr sz="3200" b="1">
+              <a:defRPr sz="3000" b="1">
                 <a:solidFill>
                   <a:srgbClr val="0F172A"/>
                 </a:solidFill>
               </a:defRPr>
             </a:pPr>
             <a:r>
-              <a:t>Comprendre les Réseaux de Neurones</a:t>
+              <a:t>Architecture LeNet-5 (1998)</a:t>
             </a:r>
             <a:br/>
             <a:r>
-              <a:t>&amp; l'Architecture Historique LeNet-5</a:t>
-            </a:r>
-          </a:p>
-        </p:txBody>
-      </p:sp>
-      <p:sp>
-        <p:nvSpPr>
-          <p:cNvPr id="5" name="TextBox 4"/>
-          <p:cNvSpPr txBox="1"/>
-          <p:nvPr/>
-        </p:nvSpPr>
-        <p:spPr>
-          <a:xfrm>
-            <a:off x="1371600" y="3566160"/>
-            <a:ext cx="9418320" cy="914400"/>
-          </a:xfrm>
-          <a:prstGeom prst="rect">
-            <a:avLst/>
-          </a:prstGeom>
-          <a:noFill/>
-        </p:spPr>
-        <p:txBody>
-          <a:bodyPr wrap="none">
-            <a:spAutoFit/>
-          </a:bodyPr>
-          <a:lstStyle/>
+              <a:t>La Naissance de la Vision par Ordinateur Moderne</a:t>
+            </a:r>
+          </a:p>
           <a:p>
             <a:pPr>
+              <a:spcBef>
+                <a:spcPts val="1000"/>
+              </a:spcBef>
               <a:defRPr sz="1500">
                 <a:solidFill>
                   <a:srgbClr val="475569"/>
@@ -3266,162 +4153,31 @@
               </a:defRPr>
             </a:pPr>
             <a:r>
-              <a:t>De la détection d'un chiffre manuscrit (« 7 ») à la révolution de la vision par ordinateur moderne.</a:t>
-            </a:r>
-            <a:br/>
-            <a:r>
-              <a:t>Une approche progressive, visuelle et concrète.</a:t>
-            </a:r>
-          </a:p>
-        </p:txBody>
-      </p:sp>
-      <p:sp>
-        <p:nvSpPr>
-          <p:cNvPr id="6" name="TextBox 5"/>
-          <p:cNvSpPr txBox="1"/>
-          <p:nvPr/>
-        </p:nvSpPr>
-        <p:spPr>
-          <a:xfrm>
-            <a:off x="1371600" y="4754880"/>
-            <a:ext cx="9418320" cy="731520"/>
-          </a:xfrm>
-          <a:prstGeom prst="rect">
-            <a:avLst/>
-          </a:prstGeom>
-          <a:noFill/>
-        </p:spPr>
-        <p:txBody>
-          <a:bodyPr wrap="none">
-            <a:spAutoFit/>
-          </a:bodyPr>
-          <a:lstStyle/>
-          <a:p>
-            <a:pPr>
-              <a:defRPr sz="1200" b="1">
-                <a:solidFill>
-                  <a:srgbClr val="0969DA"/>
-                </a:solidFill>
-              </a:defRPr>
-            </a:pPr>
-            <a:r>
-              <a:t>👤 Auteure de référence : Neila Mezghani (2024)   |   📄 Article fondateur : Yann LeCun et al. (1998)</a:t>
-            </a:r>
-            <a:br/>
-            <a:r>
-              <a:t>🎯 Format : Accessible, rigoureusement sourcé et structuré</a:t>
-            </a:r>
-          </a:p>
-        </p:txBody>
-      </p:sp>
-    </p:spTree>
-  </p:cSld>
-  <p:clrMapOvr>
-    <a:masterClrMapping/>
-  </p:clrMapOvr>
-</p:sld>
-</file>
-
-<file path=ppt/slides/slide10.xml><?xml version="1.0" encoding="utf-8"?>
-<p:sld xmlns:a="http://schemas.openxmlformats.org/drawingml/2006/main" xmlns:p="http://schemas.openxmlformats.org/presentationml/2006/main" xmlns:r="http://schemas.openxmlformats.org/officeDocument/2006/relationships">
-  <p:cSld>
-    <p:spTree>
-      <p:nvGrpSpPr>
-        <p:cNvPr id="1" name=""/>
-        <p:cNvGrpSpPr/>
-        <p:nvPr/>
-      </p:nvGrpSpPr>
-      <p:grpSpPr/>
-      <p:sp>
-        <p:nvSpPr>
-          <p:cNvPr id="2" name="TextBox 1"/>
-          <p:cNvSpPr txBox="1"/>
-          <p:nvPr/>
-        </p:nvSpPr>
-        <p:spPr>
-          <a:xfrm>
-            <a:off x="731520" y="365760"/>
-            <a:ext cx="10698480" cy="320040"/>
-          </a:xfrm>
-          <a:prstGeom prst="rect">
-            <a:avLst/>
-          </a:prstGeom>
-          <a:noFill/>
-        </p:spPr>
-        <p:txBody>
-          <a:bodyPr wrap="none">
-            <a:spAutoFit/>
-          </a:bodyPr>
-          <a:lstStyle/>
-          <a:p>
-            <a:pPr>
-              <a:defRPr sz="1100" b="1">
-                <a:solidFill>
-                  <a:srgbClr val="0969DA"/>
-                </a:solidFill>
-              </a:defRPr>
-            </a:pPr>
-            <a:r>
-              <a:t>PROJET E26/A60 — DOSSIER PÉDAGOGIQUE</a:t>
-            </a:r>
-          </a:p>
-        </p:txBody>
-      </p:sp>
-      <p:sp>
-        <p:nvSpPr>
-          <p:cNvPr id="3" name="TextBox 2"/>
-          <p:cNvSpPr txBox="1"/>
-          <p:nvPr/>
-        </p:nvSpPr>
-        <p:spPr>
-          <a:xfrm>
-            <a:off x="731520" y="685800"/>
-            <a:ext cx="10698480" cy="731520"/>
-          </a:xfrm>
-          <a:prstGeom prst="rect">
-            <a:avLst/>
-          </a:prstGeom>
-          <a:noFill/>
-        </p:spPr>
-        <p:txBody>
-          <a:bodyPr wrap="none">
-            <a:spAutoFit/>
-          </a:bodyPr>
-          <a:lstStyle/>
-          <a:p>
-            <a:pPr>
-              <a:defRPr sz="2400" b="1">
-                <a:solidFill>
-                  <a:srgbClr val="0F172A"/>
-                </a:solidFill>
-              </a:defRPr>
-            </a:pPr>
-            <a:r>
-              <a:t>9. L'Héritage : 4 Applications Majeures Aujourd'hui</a:t>
-            </a:r>
-          </a:p>
-        </p:txBody>
-      </p:sp>
-      <p:sp>
-        <p:nvSpPr>
-          <p:cNvPr id="4" name="Rectangle 3"/>
+              <a:t>Analyse complète, fonctionnement interne, déploiement industriel et impact historique.</a:t>
+            </a:r>
+          </a:p>
+        </p:txBody>
+      </p:sp>
+      <p:sp>
+        <p:nvSpPr>
+          <p:cNvPr id="5" name="Rounded Rectangle 4"/>
           <p:cNvSpPr/>
           <p:nvPr/>
         </p:nvSpPr>
         <p:spPr>
           <a:xfrm>
-            <a:off x="731520" y="1417320"/>
-            <a:ext cx="10725912" cy="36576"/>
-          </a:xfrm>
-          <a:prstGeom prst="rect">
+            <a:off x="1371600" y="4114800"/>
+            <a:ext cx="9418320" cy="1463040"/>
+          </a:xfrm>
+          <a:prstGeom prst="roundRect">
             <a:avLst/>
           </a:prstGeom>
           <a:solidFill>
-            <a:srgbClr val="0969DA"/>
+            <a:srgbClr val="F8FAFC"/>
           </a:solidFill>
           <a:ln>
             <a:solidFill>
-              <a:srgbClr val="0969DA"/>
+              <a:srgbClr val="E2E8F0"/>
             </a:solidFill>
           </a:ln>
         </p:spPr>
@@ -3440,598 +4196,48 @@
           </a:fontRef>
         </p:style>
         <p:txBody>
-          <a:bodyPr rtlCol="0" anchor="ctr"/>
-          <a:lstStyle/>
-          <a:p>
-            <a:pPr algn="ctr"/>
-          </a:p>
-        </p:txBody>
-      </p:sp>
-      <p:sp>
-        <p:nvSpPr>
-          <p:cNvPr id="5" name="TextBox 4"/>
-          <p:cNvSpPr txBox="1"/>
-          <p:nvPr/>
-        </p:nvSpPr>
-        <p:spPr>
-          <a:xfrm>
-            <a:off x="731520" y="6309360"/>
-            <a:ext cx="10698480" cy="365760"/>
-          </a:xfrm>
-          <a:prstGeom prst="rect">
-            <a:avLst/>
-          </a:prstGeom>
-          <a:noFill/>
-        </p:spPr>
-        <p:txBody>
-          <a:bodyPr wrap="none">
-            <a:spAutoFit/>
-          </a:bodyPr>
-          <a:lstStyle/>
+          <a:bodyPr rtlCol="0" anchor="ctr" wrap="square"/>
+          <a:lstStyle/>
+          <a:p>
+            <a:pPr algn="ctr">
+              <a:defRPr sz="1300" b="1">
+                <a:solidFill>
+                  <a:srgbClr val="0F172A"/>
+                </a:solidFill>
+              </a:defRPr>
+            </a:pPr>
+            <a:r>
+              <a:t>👨‍🎓 Étudiant : Bernard Feugang Noussi     |     📚 Cours : 420-A60-BB (Apprentissage Profond - Été 2026)</a:t>
+            </a:r>
+          </a:p>
           <a:p>
             <a:pPr>
-              <a:defRPr sz="900">
+              <a:spcBef>
+                <a:spcPts val="400"/>
+              </a:spcBef>
+              <a:defRPr sz="1100">
+                <a:solidFill>
+                  <a:srgbClr val="0969DA"/>
+                </a:solidFill>
+              </a:defRPr>
+            </a:pPr>
+            <a:r>
+              <a:t>📄 Article source : Yann LeCun, Léon Bottou, Yoshua Bengio, Patrick Haffner (IEEE 1998)</a:t>
+            </a:r>
+          </a:p>
+          <a:p>
+            <a:pPr>
+              <a:spcBef>
+                <a:spcPts val="400"/>
+              </a:spcBef>
+              <a:defRPr sz="1100">
                 <a:solidFill>
                   <a:srgbClr val="475569"/>
                 </a:solidFill>
               </a:defRPr>
             </a:pPr>
             <a:r>
-              <a:t>Réseaux de Neurones &amp; LeNet-5 | Slide 10/11 | Sources : LeCun et al. (1998), Mezghani (2024)</a:t>
-            </a:r>
-          </a:p>
-        </p:txBody>
-      </p:sp>
-      <p:sp>
-        <p:nvSpPr>
-          <p:cNvPr id="6" name="Rounded Rectangle 5"/>
-          <p:cNvSpPr/>
-          <p:nvPr/>
-        </p:nvSpPr>
-        <p:spPr>
-          <a:xfrm>
-            <a:off x="731520" y="1645920"/>
-            <a:ext cx="5257800" cy="2011680"/>
-          </a:xfrm>
-          <a:prstGeom prst="roundRect">
-            <a:avLst/>
-          </a:prstGeom>
-          <a:solidFill>
-            <a:srgbClr val="FFFFFF"/>
-          </a:solidFill>
-          <a:ln w="19050">
-            <a:solidFill>
-              <a:srgbClr val="E2E8F0"/>
-            </a:solidFill>
-          </a:ln>
-        </p:spPr>
-        <p:style>
-          <a:lnRef idx="1">
-            <a:schemeClr val="accent1"/>
-          </a:lnRef>
-          <a:fillRef idx="3">
-            <a:schemeClr val="accent1"/>
-          </a:fillRef>
-          <a:effectRef idx="2">
-            <a:schemeClr val="accent1"/>
-          </a:effectRef>
-          <a:fontRef idx="minor">
-            <a:schemeClr val="lt1"/>
-          </a:fontRef>
-        </p:style>
-        <p:txBody>
-          <a:bodyPr rtlCol="0" anchor="ctr" wrap="square"/>
-          <a:lstStyle/>
-          <a:p>
-            <a:pPr algn="ctr">
-              <a:spcAft>
-                <a:spcPts val="800"/>
-              </a:spcAft>
-              <a:defRPr sz="1500" b="1">
-                <a:solidFill>
-                  <a:srgbClr val="0969DA"/>
-                </a:solidFill>
-              </a:defRPr>
-            </a:pPr>
-            <a:r>
-              <a:t>📱 1. Déverrouillage Facial (Face ID)</a:t>
-            </a:r>
-          </a:p>
-          <a:p>
-            <a:pPr>
-              <a:defRPr sz="1200">
-                <a:solidFill>
-                  <a:srgbClr val="475569"/>
-                </a:solidFill>
-              </a:defRPr>
-            </a:pPr>
-            <a:r>
-              <a:t>Des CNN analysent la géométrie 3D infrarouge du visage pour sécuriser l'accès au smartphone en quelques millisecondes.</a:t>
-            </a:r>
-          </a:p>
-        </p:txBody>
-      </p:sp>
-      <p:sp>
-        <p:nvSpPr>
-          <p:cNvPr id="7" name="Rounded Rectangle 6"/>
-          <p:cNvSpPr/>
-          <p:nvPr/>
-        </p:nvSpPr>
-        <p:spPr>
-          <a:xfrm>
-            <a:off x="6172200" y="1645920"/>
-            <a:ext cx="5257800" cy="2011680"/>
-          </a:xfrm>
-          <a:prstGeom prst="roundRect">
-            <a:avLst/>
-          </a:prstGeom>
-          <a:solidFill>
-            <a:srgbClr val="FFFFFF"/>
-          </a:solidFill>
-          <a:ln w="19050">
-            <a:solidFill>
-              <a:srgbClr val="E2E8F0"/>
-            </a:solidFill>
-          </a:ln>
-        </p:spPr>
-        <p:style>
-          <a:lnRef idx="1">
-            <a:schemeClr val="accent1"/>
-          </a:lnRef>
-          <a:fillRef idx="3">
-            <a:schemeClr val="accent1"/>
-          </a:fillRef>
-          <a:effectRef idx="2">
-            <a:schemeClr val="accent1"/>
-          </a:effectRef>
-          <a:fontRef idx="minor">
-            <a:schemeClr val="lt1"/>
-          </a:fontRef>
-        </p:style>
-        <p:txBody>
-          <a:bodyPr rtlCol="0" anchor="ctr" wrap="square"/>
-          <a:lstStyle/>
-          <a:p>
-            <a:pPr algn="ctr">
-              <a:spcAft>
-                <a:spcPts val="800"/>
-              </a:spcAft>
-              <a:defRPr sz="1500" b="1">
-                <a:solidFill>
-                  <a:srgbClr val="0969DA"/>
-                </a:solidFill>
-              </a:defRPr>
-            </a:pPr>
-            <a:r>
-              <a:t>🏥 2. Imagerie Médicale &amp; Radiologie</a:t>
-            </a:r>
-          </a:p>
-          <a:p>
-            <a:pPr>
-              <a:defRPr sz="1200">
-                <a:solidFill>
-                  <a:srgbClr val="475569"/>
-                </a:solidFill>
-              </a:defRPr>
-            </a:pPr>
-            <a:r>
-              <a:t>Détection automatique de micro-lésions, fractures et anomalies sur scanners, radiographies et IRM avec une grande sensibilité.</a:t>
-            </a:r>
-          </a:p>
-        </p:txBody>
-      </p:sp>
-      <p:sp>
-        <p:nvSpPr>
-          <p:cNvPr id="8" name="Rounded Rectangle 7"/>
-          <p:cNvSpPr/>
-          <p:nvPr/>
-        </p:nvSpPr>
-        <p:spPr>
-          <a:xfrm>
-            <a:off x="731520" y="3886200"/>
-            <a:ext cx="5257800" cy="2011680"/>
-          </a:xfrm>
-          <a:prstGeom prst="roundRect">
-            <a:avLst/>
-          </a:prstGeom>
-          <a:solidFill>
-            <a:srgbClr val="FFFFFF"/>
-          </a:solidFill>
-          <a:ln w="19050">
-            <a:solidFill>
-              <a:srgbClr val="E2E8F0"/>
-            </a:solidFill>
-          </a:ln>
-        </p:spPr>
-        <p:style>
-          <a:lnRef idx="1">
-            <a:schemeClr val="accent1"/>
-          </a:lnRef>
-          <a:fillRef idx="3">
-            <a:schemeClr val="accent1"/>
-          </a:fillRef>
-          <a:effectRef idx="2">
-            <a:schemeClr val="accent1"/>
-          </a:effectRef>
-          <a:fontRef idx="minor">
-            <a:schemeClr val="lt1"/>
-          </a:fontRef>
-        </p:style>
-        <p:txBody>
-          <a:bodyPr rtlCol="0" anchor="ctr" wrap="square"/>
-          <a:lstStyle/>
-          <a:p>
-            <a:pPr algn="ctr">
-              <a:spcAft>
-                <a:spcPts val="800"/>
-              </a:spcAft>
-              <a:defRPr sz="1500" b="1">
-                <a:solidFill>
-                  <a:srgbClr val="0969DA"/>
-                </a:solidFill>
-              </a:defRPr>
-            </a:pPr>
-            <a:r>
-              <a:t>🚗 3. Véhicules Autonomes &amp; ADAS</a:t>
-            </a:r>
-          </a:p>
-          <a:p>
-            <a:pPr>
-              <a:defRPr sz="1200">
-                <a:solidFill>
-                  <a:srgbClr val="475569"/>
-                </a:solidFill>
-              </a:defRPr>
-            </a:pPr>
-            <a:r>
-              <a:t>Reconnaissance en temps réel des panneaux de signalisation, des voies de circulation, des piétons et obstacles routiers.</a:t>
-            </a:r>
-          </a:p>
-        </p:txBody>
-      </p:sp>
-      <p:sp>
-        <p:nvSpPr>
-          <p:cNvPr id="9" name="Rounded Rectangle 8"/>
-          <p:cNvSpPr/>
-          <p:nvPr/>
-        </p:nvSpPr>
-        <p:spPr>
-          <a:xfrm>
-            <a:off x="6172200" y="3886200"/>
-            <a:ext cx="5257800" cy="2011680"/>
-          </a:xfrm>
-          <a:prstGeom prst="roundRect">
-            <a:avLst/>
-          </a:prstGeom>
-          <a:solidFill>
-            <a:srgbClr val="FFFFFF"/>
-          </a:solidFill>
-          <a:ln w="19050">
-            <a:solidFill>
-              <a:srgbClr val="E2E8F0"/>
-            </a:solidFill>
-          </a:ln>
-        </p:spPr>
-        <p:style>
-          <a:lnRef idx="1">
-            <a:schemeClr val="accent1"/>
-          </a:lnRef>
-          <a:fillRef idx="3">
-            <a:schemeClr val="accent1"/>
-          </a:fillRef>
-          <a:effectRef idx="2">
-            <a:schemeClr val="accent1"/>
-          </a:effectRef>
-          <a:fontRef idx="minor">
-            <a:schemeClr val="lt1"/>
-          </a:fontRef>
-        </p:style>
-        <p:txBody>
-          <a:bodyPr rtlCol="0" anchor="ctr" wrap="square"/>
-          <a:lstStyle/>
-          <a:p>
-            <a:pPr algn="ctr">
-              <a:spcAft>
-                <a:spcPts val="800"/>
-              </a:spcAft>
-              <a:defRPr sz="1500" b="1">
-                <a:solidFill>
-                  <a:srgbClr val="0969DA"/>
-                </a:solidFill>
-              </a:defRPr>
-            </a:pPr>
-            <a:r>
-              <a:t>🖼️ 4. Indexation &amp; Tri d'Albums Photos</a:t>
-            </a:r>
-          </a:p>
-          <a:p>
-            <a:pPr>
-              <a:defRPr sz="1200">
-                <a:solidFill>
-                  <a:srgbClr val="475569"/>
-                </a:solidFill>
-              </a:defRPr>
-            </a:pPr>
-            <a:r>
-              <a:t>Recherche sémantique et regroupement automatique d'images (animaux, paysages, visages) dans Google Photos / Apple Photos.</a:t>
-            </a:r>
-          </a:p>
-        </p:txBody>
-      </p:sp>
-    </p:spTree>
-  </p:cSld>
-  <p:clrMapOvr>
-    <a:masterClrMapping/>
-  </p:clrMapOvr>
-</p:sld>
-</file>
-
-<file path=ppt/slides/slide11.xml><?xml version="1.0" encoding="utf-8"?>
-<p:sld xmlns:a="http://schemas.openxmlformats.org/drawingml/2006/main" xmlns:p="http://schemas.openxmlformats.org/presentationml/2006/main" xmlns:r="http://schemas.openxmlformats.org/officeDocument/2006/relationships">
-  <p:cSld>
-    <p:spTree>
-      <p:nvGrpSpPr>
-        <p:cNvPr id="1" name=""/>
-        <p:cNvGrpSpPr/>
-        <p:nvPr/>
-      </p:nvGrpSpPr>
-      <p:grpSpPr/>
-      <p:sp>
-        <p:nvSpPr>
-          <p:cNvPr id="2" name="TextBox 1"/>
-          <p:cNvSpPr txBox="1"/>
-          <p:nvPr/>
-        </p:nvSpPr>
-        <p:spPr>
-          <a:xfrm>
-            <a:off x="731520" y="365760"/>
-            <a:ext cx="10698480" cy="320040"/>
-          </a:xfrm>
-          <a:prstGeom prst="rect">
-            <a:avLst/>
-          </a:prstGeom>
-          <a:noFill/>
-        </p:spPr>
-        <p:txBody>
-          <a:bodyPr wrap="none">
-            <a:spAutoFit/>
-          </a:bodyPr>
-          <a:lstStyle/>
-          <a:p>
-            <a:pPr>
-              <a:defRPr sz="1100" b="1">
-                <a:solidFill>
-                  <a:srgbClr val="0969DA"/>
-                </a:solidFill>
-              </a:defRPr>
-            </a:pPr>
-            <a:r>
-              <a:t>PROJET E26/A60 — DOSSIER PÉDAGOGIQUE</a:t>
-            </a:r>
-          </a:p>
-        </p:txBody>
-      </p:sp>
-      <p:sp>
-        <p:nvSpPr>
-          <p:cNvPr id="3" name="TextBox 2"/>
-          <p:cNvSpPr txBox="1"/>
-          <p:nvPr/>
-        </p:nvSpPr>
-        <p:spPr>
-          <a:xfrm>
-            <a:off x="731520" y="685800"/>
-            <a:ext cx="10698480" cy="731520"/>
-          </a:xfrm>
-          <a:prstGeom prst="rect">
-            <a:avLst/>
-          </a:prstGeom>
-          <a:noFill/>
-        </p:spPr>
-        <p:txBody>
-          <a:bodyPr wrap="none">
-            <a:spAutoFit/>
-          </a:bodyPr>
-          <a:lstStyle/>
-          <a:p>
-            <a:pPr>
-              <a:defRPr sz="2400" b="1">
-                <a:solidFill>
-                  <a:srgbClr val="0F172A"/>
-                </a:solidFill>
-              </a:defRPr>
-            </a:pPr>
-            <a:r>
-              <a:t>10. Synthèse &amp; 5 Piliers à Retenir</a:t>
-            </a:r>
-          </a:p>
-        </p:txBody>
-      </p:sp>
-      <p:sp>
-        <p:nvSpPr>
-          <p:cNvPr id="4" name="Rectangle 3"/>
-          <p:cNvSpPr/>
-          <p:nvPr/>
-        </p:nvSpPr>
-        <p:spPr>
-          <a:xfrm>
-            <a:off x="731520" y="1417320"/>
-            <a:ext cx="10725912" cy="36576"/>
-          </a:xfrm>
-          <a:prstGeom prst="rect">
-            <a:avLst/>
-          </a:prstGeom>
-          <a:solidFill>
-            <a:srgbClr val="0969DA"/>
-          </a:solidFill>
-          <a:ln>
-            <a:solidFill>
-              <a:srgbClr val="0969DA"/>
-            </a:solidFill>
-          </a:ln>
-        </p:spPr>
-        <p:style>
-          <a:lnRef idx="1">
-            <a:schemeClr val="accent1"/>
-          </a:lnRef>
-          <a:fillRef idx="3">
-            <a:schemeClr val="accent1"/>
-          </a:fillRef>
-          <a:effectRef idx="2">
-            <a:schemeClr val="accent1"/>
-          </a:effectRef>
-          <a:fontRef idx="minor">
-            <a:schemeClr val="lt1"/>
-          </a:fontRef>
-        </p:style>
-        <p:txBody>
-          <a:bodyPr rtlCol="0" anchor="ctr"/>
-          <a:lstStyle/>
-          <a:p>
-            <a:pPr algn="ctr"/>
-          </a:p>
-        </p:txBody>
-      </p:sp>
-      <p:sp>
-        <p:nvSpPr>
-          <p:cNvPr id="5" name="TextBox 4"/>
-          <p:cNvSpPr txBox="1"/>
-          <p:nvPr/>
-        </p:nvSpPr>
-        <p:spPr>
-          <a:xfrm>
-            <a:off x="731520" y="6309360"/>
-            <a:ext cx="10698480" cy="365760"/>
-          </a:xfrm>
-          <a:prstGeom prst="rect">
-            <a:avLst/>
-          </a:prstGeom>
-          <a:noFill/>
-        </p:spPr>
-        <p:txBody>
-          <a:bodyPr wrap="none">
-            <a:spAutoFit/>
-          </a:bodyPr>
-          <a:lstStyle/>
-          <a:p>
-            <a:pPr>
-              <a:defRPr sz="900">
-                <a:solidFill>
-                  <a:srgbClr val="475569"/>
-                </a:solidFill>
-              </a:defRPr>
-            </a:pPr>
-            <a:r>
-              <a:t>Réseaux de Neurones &amp; LeNet-5 | Slide 11/11 | Sources : LeCun et al. (1998), Mezghani (2024)</a:t>
-            </a:r>
-          </a:p>
-        </p:txBody>
-      </p:sp>
-      <p:sp>
-        <p:nvSpPr>
-          <p:cNvPr id="6" name="TextBox 5"/>
-          <p:cNvSpPr txBox="1"/>
-          <p:nvPr/>
-        </p:nvSpPr>
-        <p:spPr>
-          <a:xfrm>
-            <a:off x="731520" y="1645920"/>
-            <a:ext cx="10725912" cy="4389120"/>
-          </a:xfrm>
-          <a:prstGeom prst="rect">
-            <a:avLst/>
-          </a:prstGeom>
-          <a:noFill/>
-        </p:spPr>
-        <p:txBody>
-          <a:bodyPr wrap="square">
-            <a:spAutoFit/>
-          </a:bodyPr>
-          <a:lstStyle/>
-          <a:p>
-            <a:pPr>
-              <a:defRPr sz="1800" b="1">
-                <a:solidFill>
-                  <a:srgbClr val="0F172A"/>
-                </a:solidFill>
-              </a:defRPr>
-            </a:pPr>
-            <a:r>
-              <a:t>Les 5 Enseignements Clés du Projet :</a:t>
-            </a:r>
-          </a:p>
-          <a:p>
-            <a:pPr>
-              <a:spcAft>
-                <a:spcPts val="1000"/>
-              </a:spcAft>
-              <a:defRPr sz="1300">
-                <a:solidFill>
-                  <a:srgbClr val="475569"/>
-                </a:solidFill>
-              </a:defRPr>
-            </a:pPr>
-            <a:r>
-              <a:t>✔ 1. L'Image comme Matrice — Pour la machine, une image est un tableau de nombres (pixels) représentant l'intensité lumineuse.</a:t>
-            </a:r>
-          </a:p>
-          <a:p>
-            <a:pPr>
-              <a:spcAft>
-                <a:spcPts val="1000"/>
-              </a:spcAft>
-              <a:defRPr sz="1300">
-                <a:solidFill>
-                  <a:srgbClr val="475569"/>
-                </a:solidFill>
-              </a:defRPr>
-            </a:pPr>
-            <a:r>
-              <a:t>✔ 2. Le Neurone comme Somme Pondérée — L'unité fondamentale multiplie les entrées par des poids et compare le total à un seuil.</a:t>
-            </a:r>
-          </a:p>
-          <a:p>
-            <a:pPr>
-              <a:spcAft>
-                <a:spcPts val="1000"/>
-              </a:spcAft>
-              <a:defRPr sz="1300">
-                <a:solidFill>
-                  <a:srgbClr val="475569"/>
-                </a:solidFill>
-              </a:defRPr>
-            </a:pPr>
-            <a:r>
-              <a:t>✔ 3. La Rétropropagation comme Moteur d'Apprentissage — L'ajustement systématique des poids par descente de gradient minimise l'erreur au fil des cycles.</a:t>
-            </a:r>
-          </a:p>
-          <a:p>
-            <a:pPr>
-              <a:spcAft>
-                <a:spcPts val="1000"/>
-              </a:spcAft>
-              <a:defRPr sz="1300">
-                <a:solidFill>
-                  <a:srgbClr val="475569"/>
-                </a:solidFill>
-              </a:defRPr>
-            </a:pPr>
-            <a:r>
-              <a:t>✔ 4. La Convolution &amp; le Pooling comme Clés de la Vision — Le balayage par fenêtres glissantes combiné à la compression spatiale assure l'invariance aux déformations.</a:t>
-            </a:r>
-          </a:p>
-          <a:p>
-            <a:pPr>
-              <a:spcAft>
-                <a:spcPts val="1000"/>
-              </a:spcAft>
-              <a:defRPr sz="1300">
-                <a:solidFill>
-                  <a:srgbClr val="475569"/>
-                </a:solidFill>
-              </a:defRPr>
-            </a:pPr>
-            <a:r>
-              <a:t>✔ 5. LeNet-5 comme Pionnier Industriel — 60 000 paramètres qui ont prouvé dès 1998 la viabilité et l'impact économique du deep learning.</a:t>
+              <a:t>⏱️ Format de présentation : 7 minutes (+ 3 minutes de questions)  |  Livrable HTML interactif inclus</a:t>
             </a:r>
           </a:p>
         </p:txBody>
@@ -4062,8 +4268,8 @@
         </p:nvSpPr>
         <p:spPr>
           <a:xfrm>
-            <a:off x="731520" y="365760"/>
-            <a:ext cx="10698480" cy="320040"/>
+            <a:off x="731520" y="320040"/>
+            <a:ext cx="10698480" cy="274320"/>
           </a:xfrm>
           <a:prstGeom prst="rect">
             <a:avLst/>
@@ -4077,14 +4283,14 @@
           <a:lstStyle/>
           <a:p>
             <a:pPr>
-              <a:defRPr sz="1100" b="1">
+              <a:defRPr sz="1000" b="1">
                 <a:solidFill>
                   <a:srgbClr val="0969DA"/>
                 </a:solidFill>
               </a:defRPr>
             </a:pPr>
             <a:r>
-              <a:t>PROJET E26/A60 — DOSSIER PÉDAGOGIQUE</a:t>
+              <a:t>ÉVALUATION 2 — PRÉSENTATION D'ARCHITECTURE (7 MIN)</a:t>
             </a:r>
           </a:p>
         </p:txBody>
@@ -4097,7 +4303,7 @@
         </p:nvSpPr>
         <p:spPr>
           <a:xfrm>
-            <a:off x="731520" y="685800"/>
+            <a:off x="731520" y="594360"/>
             <a:ext cx="10698480" cy="731520"/>
           </a:xfrm>
           <a:prstGeom prst="rect">
@@ -4112,14 +4318,14 @@
           <a:lstStyle/>
           <a:p>
             <a:pPr>
-              <a:defRPr sz="2400" b="1">
+              <a:defRPr sz="2300" b="1">
                 <a:solidFill>
                   <a:srgbClr val="0F172A"/>
                 </a:solidFill>
               </a:defRPr>
             </a:pPr>
             <a:r>
-              <a:t>1. Le Problème Concret : Comment une machine voit-elle ?</a:t>
+              <a:t>1. Le Problème : Qu'est-ce qui n'allait pas avant LeNet-5 ?</a:t>
             </a:r>
           </a:p>
         </p:txBody>
@@ -4132,8 +4338,8 @@
         </p:nvSpPr>
         <p:spPr>
           <a:xfrm>
-            <a:off x="731520" y="1417320"/>
-            <a:ext cx="10725912" cy="36576"/>
+            <a:off x="731520" y="1353312"/>
+            <a:ext cx="10725912" cy="32004"/>
           </a:xfrm>
           <a:prstGeom prst="rect">
             <a:avLst/>
@@ -4178,7 +4384,7 @@
         <p:spPr>
           <a:xfrm>
             <a:off x="731520" y="6309360"/>
-            <a:ext cx="10698480" cy="365760"/>
+            <a:ext cx="10698480" cy="320040"/>
           </a:xfrm>
           <a:prstGeom prst="rect">
             <a:avLst/>
@@ -4199,7 +4405,7 @@
               </a:defRPr>
             </a:pPr>
             <a:r>
-              <a:t>Réseaux de Neurones &amp; LeNet-5 | Slide 2/11 | Sources : LeCun et al. (1998), Mezghani (2024)</a:t>
+              <a:t>LeNet-5 (1998) | Bernard Feugang Noussi | Slide 2/8  (0:45 - 1:45) | Réf: LeCun et al. (1998)</a:t>
             </a:r>
           </a:p>
         </p:txBody>
@@ -4212,8 +4418,8 @@
         </p:nvSpPr>
         <p:spPr>
           <a:xfrm>
-            <a:off x="731520" y="1645920"/>
-            <a:ext cx="5486400" cy="4389120"/>
+            <a:off x="731520" y="1554480"/>
+            <a:ext cx="5486400" cy="4480560"/>
           </a:xfrm>
           <a:prstGeom prst="rect">
             <a:avLst/>
@@ -4227,74 +4433,74 @@
           <a:lstStyle/>
           <a:p>
             <a:pPr>
-              <a:defRPr sz="1600" b="1">
+              <a:defRPr sz="1500" b="1">
                 <a:solidFill>
                   <a:srgbClr val="0F172A"/>
                 </a:solidFill>
               </a:defRPr>
             </a:pPr>
             <a:r>
-              <a:t>Le Défi de la Vision Artificielle :</a:t>
+              <a:t>Les 3 Impasses des Réseaux Classiques (MLP) :</a:t>
             </a:r>
           </a:p>
           <a:p>
             <a:pPr>
               <a:spcAft>
-                <a:spcPts val="1000"/>
+                <a:spcPts val="800"/>
               </a:spcAft>
-              <a:defRPr sz="1300">
+              <a:defRPr sz="1200">
                 <a:solidFill>
                   <a:srgbClr val="475569"/>
                 </a:solidFill>
               </a:defRPr>
             </a:pPr>
             <a:r>
-              <a:t>• L'humain voit des formes globales : Nos yeux reconnaissent un « 7 » sans effort, même incliné, déformé ou avec une barre.</a:t>
+              <a:t>• 1. Perte de la topologie 2D : Les réseaux denses forçaient l'aplatissement de l'image en 1D, détruisant la proximité spatiale entre pixels voisins.</a:t>
             </a:r>
           </a:p>
           <a:p>
             <a:pPr>
               <a:spcAft>
-                <a:spcPts val="1000"/>
+                <a:spcPts val="800"/>
               </a:spcAft>
-              <a:defRPr sz="1300">
+              <a:defRPr sz="1200">
                 <a:solidFill>
                   <a:srgbClr val="475569"/>
                 </a:solidFill>
               </a:defRPr>
             </a:pPr>
             <a:r>
-              <a:t>• La machine ne voit que des chiffres : L'image est transformée en une matrice 2D de pixels numérotés de 0 (blanc) à 255 (noir/encre).</a:t>
+              <a:t>• 2. Explosion des paramètres : Connecter chaque pixel à chaque neurone exigeait des millions de poids, rendant l'entraînement impossible avec le matériel de 1998.</a:t>
             </a:r>
           </a:p>
           <a:p>
             <a:pPr>
               <a:spcAft>
-                <a:spcPts val="1000"/>
+                <a:spcPts val="800"/>
               </a:spcAft>
-              <a:defRPr sz="1300">
+              <a:defRPr sz="1200">
                 <a:solidFill>
                   <a:srgbClr val="475569"/>
                 </a:solidFill>
               </a:defRPr>
             </a:pPr>
             <a:r>
-              <a:t>• Le problème combinatoire : Écrire des règles à la main (ex. « si pixel A et pixel B... ») est impossible face à l'infinie variété des écritures.</a:t>
+              <a:t>• 3. Aucune invariance spatiale : Si le chiffre « 7 » était décalé de 2 pixels ou incliné, le réseau échouait totalement à le reconnaître.</a:t>
             </a:r>
           </a:p>
           <a:p>
             <a:pPr>
               <a:spcAft>
-                <a:spcPts val="1000"/>
+                <a:spcPts val="800"/>
               </a:spcAft>
-              <a:defRPr sz="1300">
+              <a:defRPr sz="1200">
                 <a:solidFill>
                   <a:srgbClr val="475569"/>
                 </a:solidFill>
               </a:defRPr>
             </a:pPr>
             <a:r>
-              <a:t>• La solution : Les réseaux de neurones : Laisser la machine apprendre automatiquement les motifs visuels à partir d'exemples annotés.</a:t>
+              <a:t>• La rupture LeNet-5 : Imposer le partage des poids et des champs récepteurs locaux (convolution) pour extraire des motifs partout sur l'image.</a:t>
             </a:r>
           </a:p>
         </p:txBody>
@@ -4315,7 +4521,7 @@
         </p:blipFill>
         <p:spPr>
           <a:xfrm>
-            <a:off x="6492240" y="1645920"/>
+            <a:off x="6492240" y="1554480"/>
             <a:ext cx="4937760" cy="4937760"/>
           </a:xfrm>
           <a:prstGeom prst="rect">
@@ -4349,8 +4555,8 @@
         </p:nvSpPr>
         <p:spPr>
           <a:xfrm>
-            <a:off x="731520" y="365760"/>
-            <a:ext cx="10698480" cy="320040"/>
+            <a:off x="731520" y="320040"/>
+            <a:ext cx="10698480" cy="274320"/>
           </a:xfrm>
           <a:prstGeom prst="rect">
             <a:avLst/>
@@ -4364,14 +4570,14 @@
           <a:lstStyle/>
           <a:p>
             <a:pPr>
-              <a:defRPr sz="1100" b="1">
+              <a:defRPr sz="1000" b="1">
                 <a:solidFill>
                   <a:srgbClr val="0969DA"/>
                 </a:solidFill>
               </a:defRPr>
             </a:pPr>
             <a:r>
-              <a:t>PROJET E26/A60 — DOSSIER PÉDAGOGIQUE</a:t>
+              <a:t>ÉVALUATION 2 — PRÉSENTATION D'ARCHITECTURE (7 MIN)</a:t>
             </a:r>
           </a:p>
         </p:txBody>
@@ -4384,7 +4590,7 @@
         </p:nvSpPr>
         <p:spPr>
           <a:xfrm>
-            <a:off x="731520" y="685800"/>
+            <a:off x="731520" y="594360"/>
             <a:ext cx="10698480" cy="731520"/>
           </a:xfrm>
           <a:prstGeom prst="rect">
@@ -4399,14 +4605,14 @@
           <a:lstStyle/>
           <a:p>
             <a:pPr>
-              <a:defRPr sz="2400" b="1">
+              <a:defRPr sz="2300" b="1">
                 <a:solidFill>
                   <a:srgbClr val="0F172A"/>
                 </a:solidFill>
               </a:defRPr>
             </a:pPr>
             <a:r>
-              <a:t>2. Le Neurone Artificiel : La Brique Élémentaire</a:t>
+              <a:t>2. Fonctionnement Interne : L'Architecture LeNet-5</a:t>
             </a:r>
           </a:p>
         </p:txBody>
@@ -4419,8 +4625,8 @@
         </p:nvSpPr>
         <p:spPr>
           <a:xfrm>
-            <a:off x="731520" y="1417320"/>
-            <a:ext cx="10725912" cy="36576"/>
+            <a:off x="731520" y="1353312"/>
+            <a:ext cx="10725912" cy="32004"/>
           </a:xfrm>
           <a:prstGeom prst="rect">
             <a:avLst/>
@@ -4465,7 +4671,7 @@
         <p:spPr>
           <a:xfrm>
             <a:off x="731520" y="6309360"/>
-            <a:ext cx="10698480" cy="365760"/>
+            <a:ext cx="10698480" cy="320040"/>
           </a:xfrm>
           <a:prstGeom prst="rect">
             <a:avLst/>
@@ -4486,109 +4692,14 @@
               </a:defRPr>
             </a:pPr>
             <a:r>
-              <a:t>Réseaux de Neurones &amp; LeNet-5 | Slide 3/11 | Sources : LeCun et al. (1998), Mezghani (2024)</a:t>
-            </a:r>
-          </a:p>
-        </p:txBody>
-      </p:sp>
-      <p:sp>
-        <p:nvSpPr>
-          <p:cNvPr id="6" name="TextBox 5"/>
-          <p:cNvSpPr txBox="1"/>
-          <p:nvPr/>
-        </p:nvSpPr>
-        <p:spPr>
-          <a:xfrm>
-            <a:off x="731520" y="1645920"/>
-            <a:ext cx="5486400" cy="4389120"/>
-          </a:xfrm>
-          <a:prstGeom prst="rect">
-            <a:avLst/>
-          </a:prstGeom>
-          <a:noFill/>
-        </p:spPr>
-        <p:txBody>
-          <a:bodyPr wrap="square">
-            <a:spAutoFit/>
-          </a:bodyPr>
-          <a:lstStyle/>
-          <a:p>
-            <a:pPr>
-              <a:defRPr sz="1600" b="1">
-                <a:solidFill>
-                  <a:srgbClr val="0F172A"/>
-                </a:solidFill>
-              </a:defRPr>
-            </a:pPr>
-            <a:r>
-              <a:t>Fonctionnement en 2 Étapes Mathématiques :</a:t>
-            </a:r>
-          </a:p>
-          <a:p>
-            <a:pPr>
-              <a:spcAft>
-                <a:spcPts val="1000"/>
-              </a:spcAft>
-              <a:defRPr sz="1300">
-                <a:solidFill>
-                  <a:srgbClr val="475569"/>
-                </a:solidFill>
-              </a:defRPr>
-            </a:pPr>
-            <a:r>
-              <a:t>• 1. Entrées &amp; Poids (x × w) : Chaque entrée (pixel x) est multipliée par un poids ajustable (w) qui règle son importance relative.</a:t>
-            </a:r>
-          </a:p>
-          <a:p>
-            <a:pPr>
-              <a:spcAft>
-                <a:spcPts val="1000"/>
-              </a:spcAft>
-              <a:defRPr sz="1300">
-                <a:solidFill>
-                  <a:srgbClr val="475569"/>
-                </a:solidFill>
-              </a:defRPr>
-            </a:pPr>
-            <a:r>
-              <a:t>• 2. La Somme Pondérée (∑) : Le neurone calcule la somme globale : z = (x₁·w₁ + x₂·w₂ + ... + xₙ·wₙ) + b (biais).</a:t>
-            </a:r>
-          </a:p>
-          <a:p>
-            <a:pPr>
-              <a:spcAft>
-                <a:spcPts val="1000"/>
-              </a:spcAft>
-              <a:defRPr sz="1300">
-                <a:solidFill>
-                  <a:srgbClr val="475569"/>
-                </a:solidFill>
-              </a:defRPr>
-            </a:pPr>
-            <a:r>
-              <a:t>• 3. Le Seuil d'Activation (f) : Une fonction non linéaire (seuil, Sigmoïde, ReLU) compare la somme au seuil fixé.</a:t>
-            </a:r>
-          </a:p>
-          <a:p>
-            <a:pPr>
-              <a:spcAft>
-                <a:spcPts val="1000"/>
-              </a:spcAft>
-              <a:defRPr sz="1300">
-                <a:solidFill>
-                  <a:srgbClr val="475569"/>
-                </a:solidFill>
-              </a:defRPr>
-            </a:pPr>
-            <a:r>
-              <a:t>• 4. Décision binaire / Signal : Si le total franchit le seuil, le neurone s'allume (1) et transmet son information.</a:t>
+              <a:t>LeNet-5 (1998) | Bernard Feugang Noussi | Slide 3/8  (1:45 - 3:00) | Réf: LeCun et al. (1998)</a:t>
             </a:r>
           </a:p>
         </p:txBody>
       </p:sp>
       <p:pic>
         <p:nvPicPr>
-          <p:cNvPr id="7" name="Picture 6" descr="fig01_neurone.svg.png"/>
+          <p:cNvPr id="6" name="Picture 5" descr="fig06_lenet5_pipeline.svg.png"/>
           <p:cNvPicPr>
             <a:picLocks noChangeAspect="1"/>
           </p:cNvPicPr>
@@ -4602,14 +4713,570 @@
         </p:blipFill>
         <p:spPr>
           <a:xfrm>
-            <a:off x="6492240" y="1645920"/>
-            <a:ext cx="4937760" cy="4937760"/>
+            <a:off x="914400" y="1463040"/>
+            <a:ext cx="10362895" cy="10362895"/>
           </a:xfrm>
           <a:prstGeom prst="rect">
             <a:avLst/>
           </a:prstGeom>
         </p:spPr>
       </p:pic>
+      <p:sp>
+        <p:nvSpPr>
+          <p:cNvPr id="7" name="Rounded Rectangle 6"/>
+          <p:cNvSpPr/>
+          <p:nvPr/>
+        </p:nvSpPr>
+        <p:spPr>
+          <a:xfrm>
+            <a:off x="731520" y="4297680"/>
+            <a:ext cx="1261872" cy="1645920"/>
+          </a:xfrm>
+          <a:prstGeom prst="roundRect">
+            <a:avLst/>
+          </a:prstGeom>
+          <a:solidFill>
+            <a:srgbClr val="FFFFFF"/>
+          </a:solidFill>
+          <a:ln>
+            <a:solidFill>
+              <a:srgbClr val="E2E8F0"/>
+            </a:solidFill>
+          </a:ln>
+        </p:spPr>
+        <p:style>
+          <a:lnRef idx="1">
+            <a:schemeClr val="accent1"/>
+          </a:lnRef>
+          <a:fillRef idx="3">
+            <a:schemeClr val="accent1"/>
+          </a:fillRef>
+          <a:effectRef idx="2">
+            <a:schemeClr val="accent1"/>
+          </a:effectRef>
+          <a:fontRef idx="minor">
+            <a:schemeClr val="lt1"/>
+          </a:fontRef>
+        </p:style>
+        <p:txBody>
+          <a:bodyPr rtlCol="0" anchor="ctr" wrap="square"/>
+          <a:lstStyle/>
+          <a:p>
+            <a:pPr algn="ctr">
+              <a:defRPr sz="1000" b="1">
+                <a:solidFill>
+                  <a:srgbClr val="0F172A"/>
+                </a:solidFill>
+              </a:defRPr>
+            </a:pPr>
+            <a:r>
+              <a:t>Entrée 32×32</a:t>
+            </a:r>
+          </a:p>
+          <a:p>
+            <a:pPr>
+              <a:defRPr sz="900">
+                <a:solidFill>
+                  <a:srgbClr val="475569"/>
+                </a:solidFill>
+              </a:defRPr>
+            </a:pPr>
+            <a:r>
+              <a:t>Image centrée</a:t>
+            </a:r>
+          </a:p>
+        </p:txBody>
+      </p:sp>
+      <p:sp>
+        <p:nvSpPr>
+          <p:cNvPr id="8" name="Rounded Rectangle 7"/>
+          <p:cNvSpPr/>
+          <p:nvPr/>
+        </p:nvSpPr>
+        <p:spPr>
+          <a:xfrm>
+            <a:off x="2084832" y="4297680"/>
+            <a:ext cx="1261872" cy="1645920"/>
+          </a:xfrm>
+          <a:prstGeom prst="roundRect">
+            <a:avLst/>
+          </a:prstGeom>
+          <a:solidFill>
+            <a:srgbClr val="EFF6FF"/>
+          </a:solidFill>
+          <a:ln>
+            <a:solidFill>
+              <a:srgbClr val="0969DA"/>
+            </a:solidFill>
+          </a:ln>
+        </p:spPr>
+        <p:style>
+          <a:lnRef idx="1">
+            <a:schemeClr val="accent1"/>
+          </a:lnRef>
+          <a:fillRef idx="3">
+            <a:schemeClr val="accent1"/>
+          </a:fillRef>
+          <a:effectRef idx="2">
+            <a:schemeClr val="accent1"/>
+          </a:effectRef>
+          <a:fontRef idx="minor">
+            <a:schemeClr val="lt1"/>
+          </a:fontRef>
+        </p:style>
+        <p:txBody>
+          <a:bodyPr rtlCol="0" anchor="ctr" wrap="square"/>
+          <a:lstStyle/>
+          <a:p>
+            <a:pPr algn="ctr">
+              <a:defRPr sz="1000" b="1">
+                <a:solidFill>
+                  <a:srgbClr val="0F172A"/>
+                </a:solidFill>
+              </a:defRPr>
+            </a:pPr>
+            <a:r>
+              <a:t>C1 (28×28)</a:t>
+            </a:r>
+          </a:p>
+          <a:p>
+            <a:pPr>
+              <a:defRPr sz="900">
+                <a:solidFill>
+                  <a:srgbClr val="475569"/>
+                </a:solidFill>
+              </a:defRPr>
+            </a:pPr>
+            <a:r>
+              <a:t>6 filtres 5×5</a:t>
+            </a:r>
+            <a:br/>
+            <a:r>
+              <a:t>156 poids</a:t>
+            </a:r>
+          </a:p>
+        </p:txBody>
+      </p:sp>
+      <p:sp>
+        <p:nvSpPr>
+          <p:cNvPr id="9" name="Rounded Rectangle 8"/>
+          <p:cNvSpPr/>
+          <p:nvPr/>
+        </p:nvSpPr>
+        <p:spPr>
+          <a:xfrm>
+            <a:off x="3438144" y="4297680"/>
+            <a:ext cx="1261872" cy="1645920"/>
+          </a:xfrm>
+          <a:prstGeom prst="roundRect">
+            <a:avLst/>
+          </a:prstGeom>
+          <a:solidFill>
+            <a:srgbClr val="FFFFFF"/>
+          </a:solidFill>
+          <a:ln>
+            <a:solidFill>
+              <a:srgbClr val="E2E8F0"/>
+            </a:solidFill>
+          </a:ln>
+        </p:spPr>
+        <p:style>
+          <a:lnRef idx="1">
+            <a:schemeClr val="accent1"/>
+          </a:lnRef>
+          <a:fillRef idx="3">
+            <a:schemeClr val="accent1"/>
+          </a:fillRef>
+          <a:effectRef idx="2">
+            <a:schemeClr val="accent1"/>
+          </a:effectRef>
+          <a:fontRef idx="minor">
+            <a:schemeClr val="lt1"/>
+          </a:fontRef>
+        </p:style>
+        <p:txBody>
+          <a:bodyPr rtlCol="0" anchor="ctr" wrap="square"/>
+          <a:lstStyle/>
+          <a:p>
+            <a:pPr algn="ctr">
+              <a:defRPr sz="1000" b="1">
+                <a:solidFill>
+                  <a:srgbClr val="0F172A"/>
+                </a:solidFill>
+              </a:defRPr>
+            </a:pPr>
+            <a:r>
+              <a:t>S2 (14×14)</a:t>
+            </a:r>
+          </a:p>
+          <a:p>
+            <a:pPr>
+              <a:defRPr sz="900">
+                <a:solidFill>
+                  <a:srgbClr val="475569"/>
+                </a:solidFill>
+              </a:defRPr>
+            </a:pPr>
+            <a:r>
+              <a:t>Subsampling 2×2</a:t>
+            </a:r>
+            <a:br/>
+            <a:r>
+              <a:t>12 poids</a:t>
+            </a:r>
+          </a:p>
+        </p:txBody>
+      </p:sp>
+      <p:sp>
+        <p:nvSpPr>
+          <p:cNvPr id="10" name="Rounded Rectangle 9"/>
+          <p:cNvSpPr/>
+          <p:nvPr/>
+        </p:nvSpPr>
+        <p:spPr>
+          <a:xfrm>
+            <a:off x="4791455" y="4297680"/>
+            <a:ext cx="1261872" cy="1645920"/>
+          </a:xfrm>
+          <a:prstGeom prst="roundRect">
+            <a:avLst/>
+          </a:prstGeom>
+          <a:solidFill>
+            <a:srgbClr val="EFF6FF"/>
+          </a:solidFill>
+          <a:ln>
+            <a:solidFill>
+              <a:srgbClr val="0969DA"/>
+            </a:solidFill>
+          </a:ln>
+        </p:spPr>
+        <p:style>
+          <a:lnRef idx="1">
+            <a:schemeClr val="accent1"/>
+          </a:lnRef>
+          <a:fillRef idx="3">
+            <a:schemeClr val="accent1"/>
+          </a:fillRef>
+          <a:effectRef idx="2">
+            <a:schemeClr val="accent1"/>
+          </a:effectRef>
+          <a:fontRef idx="minor">
+            <a:schemeClr val="lt1"/>
+          </a:fontRef>
+        </p:style>
+        <p:txBody>
+          <a:bodyPr rtlCol="0" anchor="ctr" wrap="square"/>
+          <a:lstStyle/>
+          <a:p>
+            <a:pPr algn="ctr">
+              <a:defRPr sz="1000" b="1">
+                <a:solidFill>
+                  <a:srgbClr val="0F172A"/>
+                </a:solidFill>
+              </a:defRPr>
+            </a:pPr>
+            <a:r>
+              <a:t>C3 (10×10)</a:t>
+            </a:r>
+          </a:p>
+          <a:p>
+            <a:pPr>
+              <a:defRPr sz="900">
+                <a:solidFill>
+                  <a:srgbClr val="475569"/>
+                </a:solidFill>
+              </a:defRPr>
+            </a:pPr>
+            <a:r>
+              <a:t>16 filtres 5×5</a:t>
+            </a:r>
+            <a:br/>
+            <a:r>
+              <a:t>1 516 poids</a:t>
+            </a:r>
+          </a:p>
+        </p:txBody>
+      </p:sp>
+      <p:sp>
+        <p:nvSpPr>
+          <p:cNvPr id="11" name="Rounded Rectangle 10"/>
+          <p:cNvSpPr/>
+          <p:nvPr/>
+        </p:nvSpPr>
+        <p:spPr>
+          <a:xfrm>
+            <a:off x="6144768" y="4297680"/>
+            <a:ext cx="1261872" cy="1645920"/>
+          </a:xfrm>
+          <a:prstGeom prst="roundRect">
+            <a:avLst/>
+          </a:prstGeom>
+          <a:solidFill>
+            <a:srgbClr val="FFFFFF"/>
+          </a:solidFill>
+          <a:ln>
+            <a:solidFill>
+              <a:srgbClr val="E2E8F0"/>
+            </a:solidFill>
+          </a:ln>
+        </p:spPr>
+        <p:style>
+          <a:lnRef idx="1">
+            <a:schemeClr val="accent1"/>
+          </a:lnRef>
+          <a:fillRef idx="3">
+            <a:schemeClr val="accent1"/>
+          </a:fillRef>
+          <a:effectRef idx="2">
+            <a:schemeClr val="accent1"/>
+          </a:effectRef>
+          <a:fontRef idx="minor">
+            <a:schemeClr val="lt1"/>
+          </a:fontRef>
+        </p:style>
+        <p:txBody>
+          <a:bodyPr rtlCol="0" anchor="ctr" wrap="square"/>
+          <a:lstStyle/>
+          <a:p>
+            <a:pPr algn="ctr">
+              <a:defRPr sz="1000" b="1">
+                <a:solidFill>
+                  <a:srgbClr val="0F172A"/>
+                </a:solidFill>
+              </a:defRPr>
+            </a:pPr>
+            <a:r>
+              <a:t>S4 (5×5)</a:t>
+            </a:r>
+          </a:p>
+          <a:p>
+            <a:pPr>
+              <a:defRPr sz="900">
+                <a:solidFill>
+                  <a:srgbClr val="475569"/>
+                </a:solidFill>
+              </a:defRPr>
+            </a:pPr>
+            <a:r>
+              <a:t>Subsampling 2×2</a:t>
+            </a:r>
+            <a:br/>
+            <a:r>
+              <a:t>32 poids</a:t>
+            </a:r>
+          </a:p>
+        </p:txBody>
+      </p:sp>
+      <p:sp>
+        <p:nvSpPr>
+          <p:cNvPr id="12" name="Rounded Rectangle 11"/>
+          <p:cNvSpPr/>
+          <p:nvPr/>
+        </p:nvSpPr>
+        <p:spPr>
+          <a:xfrm>
+            <a:off x="7498080" y="4297680"/>
+            <a:ext cx="1261872" cy="1645920"/>
+          </a:xfrm>
+          <a:prstGeom prst="roundRect">
+            <a:avLst/>
+          </a:prstGeom>
+          <a:solidFill>
+            <a:srgbClr val="EFF6FF"/>
+          </a:solidFill>
+          <a:ln>
+            <a:solidFill>
+              <a:srgbClr val="0969DA"/>
+            </a:solidFill>
+          </a:ln>
+        </p:spPr>
+        <p:style>
+          <a:lnRef idx="1">
+            <a:schemeClr val="accent1"/>
+          </a:lnRef>
+          <a:fillRef idx="3">
+            <a:schemeClr val="accent1"/>
+          </a:fillRef>
+          <a:effectRef idx="2">
+            <a:schemeClr val="accent1"/>
+          </a:effectRef>
+          <a:fontRef idx="minor">
+            <a:schemeClr val="lt1"/>
+          </a:fontRef>
+        </p:style>
+        <p:txBody>
+          <a:bodyPr rtlCol="0" anchor="ctr" wrap="square"/>
+          <a:lstStyle/>
+          <a:p>
+            <a:pPr algn="ctr">
+              <a:defRPr sz="1000" b="1">
+                <a:solidFill>
+                  <a:srgbClr val="0F172A"/>
+                </a:solidFill>
+              </a:defRPr>
+            </a:pPr>
+            <a:r>
+              <a:t>C5 (120 u.)</a:t>
+            </a:r>
+          </a:p>
+          <a:p>
+            <a:pPr>
+              <a:defRPr sz="900">
+                <a:solidFill>
+                  <a:srgbClr val="475569"/>
+                </a:solidFill>
+              </a:defRPr>
+            </a:pPr>
+            <a:r>
+              <a:t>Dense / Conv</a:t>
+            </a:r>
+            <a:br/>
+            <a:r>
+              <a:t>48 120 poids</a:t>
+            </a:r>
+          </a:p>
+        </p:txBody>
+      </p:sp>
+      <p:sp>
+        <p:nvSpPr>
+          <p:cNvPr id="13" name="Rounded Rectangle 12"/>
+          <p:cNvSpPr/>
+          <p:nvPr/>
+        </p:nvSpPr>
+        <p:spPr>
+          <a:xfrm>
+            <a:off x="8851392" y="4297680"/>
+            <a:ext cx="1261872" cy="1645920"/>
+          </a:xfrm>
+          <a:prstGeom prst="roundRect">
+            <a:avLst/>
+          </a:prstGeom>
+          <a:solidFill>
+            <a:srgbClr val="FFFFFF"/>
+          </a:solidFill>
+          <a:ln>
+            <a:solidFill>
+              <a:srgbClr val="E2E8F0"/>
+            </a:solidFill>
+          </a:ln>
+        </p:spPr>
+        <p:style>
+          <a:lnRef idx="1">
+            <a:schemeClr val="accent1"/>
+          </a:lnRef>
+          <a:fillRef idx="3">
+            <a:schemeClr val="accent1"/>
+          </a:fillRef>
+          <a:effectRef idx="2">
+            <a:schemeClr val="accent1"/>
+          </a:effectRef>
+          <a:fontRef idx="minor">
+            <a:schemeClr val="lt1"/>
+          </a:fontRef>
+        </p:style>
+        <p:txBody>
+          <a:bodyPr rtlCol="0" anchor="ctr" wrap="square"/>
+          <a:lstStyle/>
+          <a:p>
+            <a:pPr algn="ctr">
+              <a:defRPr sz="1000" b="1">
+                <a:solidFill>
+                  <a:srgbClr val="0F172A"/>
+                </a:solidFill>
+              </a:defRPr>
+            </a:pPr>
+            <a:r>
+              <a:t>F6 (84 u.)</a:t>
+            </a:r>
+          </a:p>
+          <a:p>
+            <a:pPr>
+              <a:defRPr sz="900">
+                <a:solidFill>
+                  <a:srgbClr val="475569"/>
+                </a:solidFill>
+              </a:defRPr>
+            </a:pPr>
+            <a:r>
+              <a:t>Dense</a:t>
+            </a:r>
+            <a:br/>
+            <a:r>
+              <a:t>10 164 poids</a:t>
+            </a:r>
+          </a:p>
+        </p:txBody>
+      </p:sp>
+      <p:sp>
+        <p:nvSpPr>
+          <p:cNvPr id="14" name="Rounded Rectangle 13"/>
+          <p:cNvSpPr/>
+          <p:nvPr/>
+        </p:nvSpPr>
+        <p:spPr>
+          <a:xfrm>
+            <a:off x="10204704" y="4297680"/>
+            <a:ext cx="1261872" cy="1645920"/>
+          </a:xfrm>
+          <a:prstGeom prst="roundRect">
+            <a:avLst/>
+          </a:prstGeom>
+          <a:solidFill>
+            <a:srgbClr val="FFFFFF"/>
+          </a:solidFill>
+          <a:ln>
+            <a:solidFill>
+              <a:srgbClr val="E2E8F0"/>
+            </a:solidFill>
+          </a:ln>
+        </p:spPr>
+        <p:style>
+          <a:lnRef idx="1">
+            <a:schemeClr val="accent1"/>
+          </a:lnRef>
+          <a:fillRef idx="3">
+            <a:schemeClr val="accent1"/>
+          </a:fillRef>
+          <a:effectRef idx="2">
+            <a:schemeClr val="accent1"/>
+          </a:effectRef>
+          <a:fontRef idx="minor">
+            <a:schemeClr val="lt1"/>
+          </a:fontRef>
+        </p:style>
+        <p:txBody>
+          <a:bodyPr rtlCol="0" anchor="ctr" wrap="square"/>
+          <a:lstStyle/>
+          <a:p>
+            <a:pPr algn="ctr">
+              <a:defRPr sz="1000" b="1">
+                <a:solidFill>
+                  <a:srgbClr val="0F172A"/>
+                </a:solidFill>
+              </a:defRPr>
+            </a:pPr>
+            <a:r>
+              <a:t>Sortie (10)</a:t>
+            </a:r>
+          </a:p>
+          <a:p>
+            <a:pPr>
+              <a:defRPr sz="900">
+                <a:solidFill>
+                  <a:srgbClr val="475569"/>
+                </a:solidFill>
+              </a:defRPr>
+            </a:pPr>
+            <a:r>
+              <a:t>RBF / Classes</a:t>
+            </a:r>
+            <a:br/>
+            <a:r>
+              <a:t>0 à 9</a:t>
+            </a:r>
+          </a:p>
+        </p:txBody>
+      </p:sp>
     </p:spTree>
   </p:cSld>
   <p:clrMapOvr>
@@ -4636,8 +5303,8 @@
         </p:nvSpPr>
         <p:spPr>
           <a:xfrm>
-            <a:off x="731520" y="365760"/>
-            <a:ext cx="10698480" cy="320040"/>
+            <a:off x="731520" y="320040"/>
+            <a:ext cx="10698480" cy="274320"/>
           </a:xfrm>
           <a:prstGeom prst="rect">
             <a:avLst/>
@@ -4651,14 +5318,14 @@
           <a:lstStyle/>
           <a:p>
             <a:pPr>
-              <a:defRPr sz="1100" b="1">
+              <a:defRPr sz="1000" b="1">
                 <a:solidFill>
                   <a:srgbClr val="0969DA"/>
                 </a:solidFill>
               </a:defRPr>
             </a:pPr>
             <a:r>
-              <a:t>PROJET E26/A60 — DOSSIER PÉDAGOGIQUE</a:t>
+              <a:t>ÉVALUATION 2 — PRÉSENTATION D'ARCHITECTURE (7 MIN)</a:t>
             </a:r>
           </a:p>
         </p:txBody>
@@ -4671,7 +5338,7 @@
         </p:nvSpPr>
         <p:spPr>
           <a:xfrm>
-            <a:off x="731520" y="685800"/>
+            <a:off x="731520" y="594360"/>
             <a:ext cx="10698480" cy="731520"/>
           </a:xfrm>
           <a:prstGeom prst="rect">
@@ -4686,14 +5353,14 @@
           <a:lstStyle/>
           <a:p>
             <a:pPr>
-              <a:defRPr sz="2400" b="1">
+              <a:defRPr sz="2300" b="1">
                 <a:solidFill>
                   <a:srgbClr val="0F172A"/>
                 </a:solidFill>
               </a:defRPr>
             </a:pPr>
             <a:r>
-              <a:t>3. Le Réseau : Des Couches qui Travaillent en Équipe</a:t>
+              <a:t>3. Données Chiffrées de l'Article d'Origine (LeCun 1998)</a:t>
             </a:r>
           </a:p>
         </p:txBody>
@@ -4706,8 +5373,8 @@
         </p:nvSpPr>
         <p:spPr>
           <a:xfrm>
-            <a:off x="731520" y="1417320"/>
-            <a:ext cx="10725912" cy="36576"/>
+            <a:off x="731520" y="1353312"/>
+            <a:ext cx="10725912" cy="32004"/>
           </a:xfrm>
           <a:prstGeom prst="rect">
             <a:avLst/>
@@ -4752,7 +5419,7 @@
         <p:spPr>
           <a:xfrm>
             <a:off x="731520" y="6309360"/>
-            <a:ext cx="10698480" cy="365760"/>
+            <a:ext cx="10698480" cy="320040"/>
           </a:xfrm>
           <a:prstGeom prst="rect">
             <a:avLst/>
@@ -4773,7 +5440,7 @@
               </a:defRPr>
             </a:pPr>
             <a:r>
-              <a:t>Réseaux de Neurones &amp; LeNet-5 | Slide 4/11 | Sources : LeCun et al. (1998), Mezghani (2024)</a:t>
+              <a:t>LeNet-5 (1998) | Bernard Feugang Noussi | Slide 4/8  (3:00 - 4:00) | Réf: LeCun et al. (1998)</a:t>
             </a:r>
           </a:p>
         </p:txBody>
@@ -4786,8 +5453,8 @@
         </p:nvSpPr>
         <p:spPr>
           <a:xfrm>
-            <a:off x="731520" y="1645920"/>
-            <a:ext cx="5486400" cy="4389120"/>
+            <a:off x="731520" y="1554480"/>
+            <a:ext cx="5486400" cy="4480560"/>
           </a:xfrm>
           <a:prstGeom prst="rect">
             <a:avLst/>
@@ -4801,81 +5468,81 @@
           <a:lstStyle/>
           <a:p>
             <a:pPr>
-              <a:defRPr sz="1600" b="1">
+              <a:defRPr sz="1500" b="1">
                 <a:solidFill>
                   <a:srgbClr val="0F172A"/>
                 </a:solidFill>
               </a:defRPr>
             </a:pPr>
             <a:r>
-              <a:t>Hiérarchie de Décision en Couches :</a:t>
+              <a:t>Résultats Mesurés sur la Base MNIST :</a:t>
             </a:r>
           </a:p>
           <a:p>
             <a:pPr>
               <a:spcAft>
-                <a:spcPts val="1000"/>
+                <a:spcPts val="800"/>
               </a:spcAft>
-              <a:defRPr sz="1300">
+              <a:defRPr sz="1200">
                 <a:solidFill>
                   <a:srgbClr val="475569"/>
                 </a:solidFill>
               </a:defRPr>
             </a:pPr>
             <a:r>
-              <a:t>• Couche d'Entrée : Reçoit les données brutes (les pixels numérisés de l'image).</a:t>
+              <a:t>• Jeu de Données MNIST : Base de référence de 70 000 chiffres manuscrits (60 000 entraînement, 10 000 test) [Section VII].</a:t>
             </a:r>
           </a:p>
           <a:p>
             <a:pPr>
               <a:spcAft>
-                <a:spcPts val="1000"/>
+                <a:spcPts val="800"/>
               </a:spcAft>
-              <a:defRPr sz="1300">
+              <a:defRPr sz="1200">
                 <a:solidFill>
                   <a:srgbClr val="475569"/>
                 </a:solidFill>
               </a:defRPr>
             </a:pPr>
             <a:r>
-              <a:t>• Couches Cachées (Hidden Layers) : Extraient des motifs de plus en plus abstraits (d'abord des lignes et angles, puis des boucles et formes complètes).</a:t>
+              <a:t>• Taux d'erreur record (0,8 %) : Erreur test stabilisée à 0,95 % sans distorsions, et 0,8 % avec distorsions d'entraînement [Table 2].</a:t>
             </a:r>
           </a:p>
           <a:p>
             <a:pPr>
               <a:spcAft>
-                <a:spcPts val="1000"/>
+                <a:spcPts val="800"/>
               </a:spcAft>
-              <a:defRPr sz="1300">
+              <a:defRPr sz="1200">
                 <a:solidFill>
                   <a:srgbClr val="475569"/>
                 </a:solidFill>
               </a:defRPr>
             </a:pPr>
             <a:r>
-              <a:t>• Couche de Sortie : Produit la décision finale parmi les classes possibles (ici, 10 probabilités de 0 à 9).</a:t>
+              <a:t>• Nombre de paramètres : ~60 000 : Exactement 60 000 paramètres libres entraînables et 340 915 connexions [Section II-B, Table 1].</a:t>
             </a:r>
           </a:p>
           <a:p>
             <a:pPr>
               <a:spcAft>
-                <a:spcPts val="1000"/>
+                <a:spcPts val="800"/>
               </a:spcAft>
-              <a:defRPr sz="1300">
+              <a:defRPr sz="1200">
                 <a:solidFill>
                   <a:srgbClr val="475569"/>
                 </a:solidFill>
               </a:defRPr>
             </a:pPr>
             <a:r>
-              <a:t>• Puissance de la profondeur : En combinant des milliers de neurones simples, le réseau apprend des fonctions hautement complexes.</a:t>
+              <a:t>• Temps de calcul &amp; Puces DSP : Moins de 10 ms par chiffre sur microprocesseur DSP dédié, permettant le traitement en temps réel.</a:t>
             </a:r>
           </a:p>
         </p:txBody>
       </p:sp>
       <p:pic>
         <p:nvPicPr>
-          <p:cNvPr id="7" name="Picture 6" descr="fig02_reseau.svg.png"/>
+          <p:cNvPr id="7" name="Picture 6" descr="fig07_apprentissage.svg.png"/>
           <p:cNvPicPr>
             <a:picLocks noChangeAspect="1"/>
           </p:cNvPicPr>
@@ -4889,7 +5556,7 @@
         </p:blipFill>
         <p:spPr>
           <a:xfrm>
-            <a:off x="6492240" y="1645920"/>
+            <a:off x="6492240" y="1554480"/>
             <a:ext cx="4937760" cy="4937760"/>
           </a:xfrm>
           <a:prstGeom prst="rect">
@@ -4923,8 +5590,8 @@
         </p:nvSpPr>
         <p:spPr>
           <a:xfrm>
-            <a:off x="731520" y="365760"/>
-            <a:ext cx="10698480" cy="320040"/>
+            <a:off x="731520" y="320040"/>
+            <a:ext cx="10698480" cy="274320"/>
           </a:xfrm>
           <a:prstGeom prst="rect">
             <a:avLst/>
@@ -4938,14 +5605,14 @@
           <a:lstStyle/>
           <a:p>
             <a:pPr>
-              <a:defRPr sz="1100" b="1">
+              <a:defRPr sz="1000" b="1">
                 <a:solidFill>
                   <a:srgbClr val="0969DA"/>
                 </a:solidFill>
               </a:defRPr>
             </a:pPr>
             <a:r>
-              <a:t>PROJET E26/A60 — DOSSIER PÉDAGOGIQUE</a:t>
+              <a:t>ÉVALUATION 2 — PRÉSENTATION D'ARCHITECTURE (7 MIN)</a:t>
             </a:r>
           </a:p>
         </p:txBody>
@@ -4958,7 +5625,7 @@
         </p:nvSpPr>
         <p:spPr>
           <a:xfrm>
-            <a:off x="731520" y="685800"/>
+            <a:off x="731520" y="594360"/>
             <a:ext cx="10698480" cy="731520"/>
           </a:xfrm>
           <a:prstGeom prst="rect">
@@ -4973,14 +5640,14 @@
           <a:lstStyle/>
           <a:p>
             <a:pPr>
-              <a:defRPr sz="2400" b="1">
+              <a:defRPr sz="2300" b="1">
                 <a:solidFill>
                   <a:srgbClr val="0F172A"/>
                 </a:solidFill>
               </a:defRPr>
             </a:pPr>
             <a:r>
-              <a:t>4. L'Apprentissage : Réduire l'Erreur pas à pas</a:t>
+              <a:t>4. Déploiement Industriel &amp; Applications Réelles</a:t>
             </a:r>
           </a:p>
         </p:txBody>
@@ -4993,8 +5660,8 @@
         </p:nvSpPr>
         <p:spPr>
           <a:xfrm>
-            <a:off x="731520" y="1417320"/>
-            <a:ext cx="10725912" cy="36576"/>
+            <a:off x="731520" y="1353312"/>
+            <a:ext cx="10725912" cy="32004"/>
           </a:xfrm>
           <a:prstGeom prst="rect">
             <a:avLst/>
@@ -5039,7 +5706,7 @@
         <p:spPr>
           <a:xfrm>
             <a:off x="731520" y="6309360"/>
-            <a:ext cx="10698480" cy="365760"/>
+            <a:ext cx="10698480" cy="320040"/>
           </a:xfrm>
           <a:prstGeom prst="rect">
             <a:avLst/>
@@ -5060,7 +5727,7 @@
               </a:defRPr>
             </a:pPr>
             <a:r>
-              <a:t>Réseaux de Neurones &amp; LeNet-5 | Slide 5/11 | Sources : LeCun et al. (1998), Mezghani (2024)</a:t>
+              <a:t>LeNet-5 (1998) | Bernard Feugang Noussi | Slide 5/8  (4:00 - 4:50) | Réf: LeCun et al. (1998)</a:t>
             </a:r>
           </a:p>
         </p:txBody>
@@ -5073,8 +5740,8 @@
         </p:nvSpPr>
         <p:spPr>
           <a:xfrm>
-            <a:off x="731520" y="1645920"/>
-            <a:ext cx="5486400" cy="4389120"/>
+            <a:off x="731520" y="1554480"/>
+            <a:ext cx="5486400" cy="4480560"/>
           </a:xfrm>
           <a:prstGeom prst="rect">
             <a:avLst/>
@@ -5088,81 +5755,81 @@
           <a:lstStyle/>
           <a:p>
             <a:pPr>
-              <a:defRPr sz="1600" b="1">
+              <a:defRPr sz="1500" b="1">
                 <a:solidFill>
                   <a:srgbClr val="0F172A"/>
                 </a:solidFill>
               </a:defRPr>
             </a:pPr>
             <a:r>
-              <a:t>Le Cycle Essai - Erreur - Correction :</a:t>
+              <a:t>Un Succès Commercial Massif dès 1998 :</a:t>
             </a:r>
           </a:p>
           <a:p>
             <a:pPr>
               <a:spcAft>
-                <a:spcPts val="1000"/>
+                <a:spcPts val="800"/>
               </a:spcAft>
-              <a:defRPr sz="1300">
+              <a:defRPr sz="1200">
                 <a:solidFill>
                   <a:srgbClr val="475569"/>
                 </a:solidFill>
               </a:defRPr>
             </a:pPr>
             <a:r>
-              <a:t>• 1. Passe Avant (Forward Pass) : L'image traverse le réseau vers l'avant. Au départ (poids aléatoires), l'erreur est proche de 90%.</a:t>
+              <a:t>• Déploiement Bancaire NCR : Intégré dans les machines de tri automatique de chèques bancaires par le constructeur NCR [Section I].</a:t>
             </a:r>
           </a:p>
           <a:p>
             <a:pPr>
               <a:spcAft>
-                <a:spcPts val="1000"/>
+                <a:spcPts val="800"/>
               </a:spcAft>
-              <a:defRPr sz="1300">
+              <a:defRPr sz="1200">
                 <a:solidFill>
                   <a:srgbClr val="475569"/>
                 </a:solidFill>
               </a:defRPr>
             </a:pPr>
             <a:r>
-              <a:t>• 2. Calcul du Coût (Loss Function) : On mesure l'écart numérique entre la prédiction et la vérité terrain (étiquette « 7 »).</a:t>
+              <a:t>• Des Millions de Chèques par Mois : LeNet-5 lisait en production plusieurs millions de chèques/mois aux USA [Section I].</a:t>
             </a:r>
           </a:p>
           <a:p>
             <a:pPr>
               <a:spcAft>
-                <a:spcPts val="1000"/>
+                <a:spcPts val="800"/>
               </a:spcAft>
-              <a:defRPr sz="1300">
+              <a:defRPr sz="1200">
                 <a:solidFill>
                   <a:srgbClr val="475569"/>
                 </a:solidFill>
               </a:defRPr>
             </a:pPr>
             <a:r>
-              <a:t>• 3. Rétropropagation (Backpropagation) : L'erreur remonte en sens inverse à travers le réseau en calculant les gradients.</a:t>
+              <a:t>• ~10 % du Volume Américain : Estimé à 10% de tous les chèques en circulation aux USA à la fin des années 1990 [Wikipédia, LeNet].</a:t>
             </a:r>
           </a:p>
           <a:p>
             <a:pPr>
               <a:spcAft>
-                <a:spcPts val="1000"/>
+                <a:spcPts val="800"/>
               </a:spcAft>
-              <a:defRPr sz="1300">
+              <a:defRPr sz="1200">
                 <a:solidFill>
                   <a:srgbClr val="475569"/>
                 </a:solidFill>
               </a:defRPr>
             </a:pPr>
             <a:r>
-              <a:t>• 4. Descente de Gradient : Chaque poids est légèrement corrigé pour réduire l'erreur lors du passage suivant.</a:t>
+              <a:t>• Lecture des Codes Postaux (USPS) : Utilisé également pour le tri postal automatique des enveloppes manuscrites.</a:t>
             </a:r>
           </a:p>
         </p:txBody>
       </p:sp>
       <p:pic>
         <p:nvPicPr>
-          <p:cNvPr id="7" name="Picture 6" descr="fig07_apprentissage.svg.png"/>
+          <p:cNvPr id="7" name="Picture 6" descr="fig08_cheque.svg.png"/>
           <p:cNvPicPr>
             <a:picLocks noChangeAspect="1"/>
           </p:cNvPicPr>
@@ -5176,7 +5843,7 @@
         </p:blipFill>
         <p:spPr>
           <a:xfrm>
-            <a:off x="6492240" y="1645920"/>
+            <a:off x="6492240" y="1554480"/>
             <a:ext cx="4937760" cy="4937760"/>
           </a:xfrm>
           <a:prstGeom prst="rect">
@@ -5210,8 +5877,8 @@
         </p:nvSpPr>
         <p:spPr>
           <a:xfrm>
-            <a:off x="731520" y="365760"/>
-            <a:ext cx="10698480" cy="320040"/>
+            <a:off x="731520" y="320040"/>
+            <a:ext cx="10698480" cy="274320"/>
           </a:xfrm>
           <a:prstGeom prst="rect">
             <a:avLst/>
@@ -5225,14 +5892,14 @@
           <a:lstStyle/>
           <a:p>
             <a:pPr>
-              <a:defRPr sz="1100" b="1">
+              <a:defRPr sz="1000" b="1">
                 <a:solidFill>
                   <a:srgbClr val="0969DA"/>
                 </a:solidFill>
               </a:defRPr>
             </a:pPr>
             <a:r>
-              <a:t>PROJET E26/A60 — DOSSIER PÉDAGOGIQUE</a:t>
+              <a:t>ÉVALUATION 2 — PRÉSENTATION D'ARCHITECTURE (7 MIN)</a:t>
             </a:r>
           </a:p>
         </p:txBody>
@@ -5245,7 +5912,7 @@
         </p:nvSpPr>
         <p:spPr>
           <a:xfrm>
-            <a:off x="731520" y="685800"/>
+            <a:off x="731520" y="594360"/>
             <a:ext cx="10698480" cy="731520"/>
           </a:xfrm>
           <a:prstGeom prst="rect">
@@ -5260,14 +5927,14 @@
           <a:lstStyle/>
           <a:p>
             <a:pPr>
-              <a:defRPr sz="2400" b="1">
+              <a:defRPr sz="2300" b="1">
                 <a:solidFill>
                   <a:srgbClr val="0F172A"/>
                 </a:solidFill>
               </a:defRPr>
             </a:pPr>
             <a:r>
-              <a:t>5. La Convolution : La Fenêtre Glissante</a:t>
+              <a:t>5. Analyse Critique : Avantages et Inconvénients</a:t>
             </a:r>
           </a:p>
         </p:txBody>
@@ -5280,8 +5947,8 @@
         </p:nvSpPr>
         <p:spPr>
           <a:xfrm>
-            <a:off x="731520" y="1417320"/>
-            <a:ext cx="10725912" cy="36576"/>
+            <a:off x="731520" y="1353312"/>
+            <a:ext cx="10725912" cy="32004"/>
           </a:xfrm>
           <a:prstGeom prst="rect">
             <a:avLst/>
@@ -5326,7 +5993,7 @@
         <p:spPr>
           <a:xfrm>
             <a:off x="731520" y="6309360"/>
-            <a:ext cx="10698480" cy="365760"/>
+            <a:ext cx="10698480" cy="320040"/>
           </a:xfrm>
           <a:prstGeom prst="rect">
             <a:avLst/>
@@ -5347,130 +6014,239 @@
               </a:defRPr>
             </a:pPr>
             <a:r>
-              <a:t>Réseaux de Neurones &amp; LeNet-5 | Slide 6/11 | Sources : LeCun et al. (1998), Mezghani (2024)</a:t>
-            </a:r>
-          </a:p>
-        </p:txBody>
-      </p:sp>
-      <p:sp>
-        <p:nvSpPr>
-          <p:cNvPr id="6" name="TextBox 5"/>
-          <p:cNvSpPr txBox="1"/>
+              <a:t>LeNet-5 (1998) | Bernard Feugang Noussi | Slide 6/8  (4:50 - 5:40) | Réf: LeCun et al. (1998)</a:t>
+            </a:r>
+          </a:p>
+        </p:txBody>
+      </p:sp>
+      <p:sp>
+        <p:nvSpPr>
+          <p:cNvPr id="6" name="Rounded Rectangle 5"/>
+          <p:cNvSpPr/>
           <p:nvPr/>
         </p:nvSpPr>
         <p:spPr>
           <a:xfrm>
-            <a:off x="731520" y="1645920"/>
-            <a:ext cx="5486400" cy="4389120"/>
-          </a:xfrm>
-          <a:prstGeom prst="rect">
+            <a:off x="731520" y="1554480"/>
+            <a:ext cx="5212080" cy="4480560"/>
+          </a:xfrm>
+          <a:prstGeom prst="roundRect">
             <a:avLst/>
           </a:prstGeom>
-          <a:noFill/>
-        </p:spPr>
-        <p:txBody>
-          <a:bodyPr wrap="square">
-            <a:spAutoFit/>
-          </a:bodyPr>
-          <a:lstStyle/>
+          <a:solidFill>
+            <a:srgbClr val="FFFFFF"/>
+          </a:solidFill>
+          <a:ln w="25400">
+            <a:solidFill>
+              <a:srgbClr val="16A34A"/>
+            </a:solidFill>
+          </a:ln>
+        </p:spPr>
+        <p:style>
+          <a:lnRef idx="1">
+            <a:schemeClr val="accent1"/>
+          </a:lnRef>
+          <a:fillRef idx="3">
+            <a:schemeClr val="accent1"/>
+          </a:fillRef>
+          <a:effectRef idx="2">
+            <a:schemeClr val="accent1"/>
+          </a:effectRef>
+          <a:fontRef idx="minor">
+            <a:schemeClr val="lt1"/>
+          </a:fontRef>
+        </p:style>
+        <p:txBody>
+          <a:bodyPr rtlCol="0" anchor="ctr" wrap="square"/>
+          <a:lstStyle/>
+          <a:p>
+            <a:pPr algn="ctr">
+              <a:defRPr sz="1600" b="1">
+                <a:solidFill>
+                  <a:srgbClr val="16A34A"/>
+                </a:solidFill>
+              </a:defRPr>
+            </a:pPr>
+            <a:r>
+              <a:t>✅ AVANTAGES MAJEURS</a:t>
+            </a:r>
+          </a:p>
           <a:p>
             <a:pPr>
-              <a:defRPr sz="1600" b="1">
-                <a:solidFill>
-                  <a:srgbClr val="0F172A"/>
-                </a:solidFill>
-              </a:defRPr>
-            </a:pPr>
-            <a:r>
-              <a:t>Le Principe Fondateur des CNN :</a:t>
+              <a:spcBef>
+                <a:spcPts val="600"/>
+              </a:spcBef>
+              <a:defRPr sz="1150">
+                <a:solidFill>
+                  <a:srgbClr val="475569"/>
+                </a:solidFill>
+              </a:defRPr>
+            </a:pPr>
+            <a:r>
+              <a:t>✔ Invariance spatiale : Reconnaît les motifs même déformés ou translatés grâce à l'association Convolution + Pooling.</a:t>
             </a:r>
           </a:p>
           <a:p>
             <a:pPr>
-              <a:spcAft>
-                <a:spcPts val="1000"/>
-              </a:spcAft>
-              <a:defRPr sz="1300">
+              <a:spcBef>
+                <a:spcPts val="600"/>
+              </a:spcBef>
+              <a:defRPr sz="1150">
                 <a:solidFill>
                   <a:srgbClr val="475569"/>
                 </a:solidFill>
               </a:defRPr>
             </a:pPr>
             <a:r>
-              <a:t>• Filtre / Noyau Glissant (Kernel) : Une petite matrice (ex. 5×5) balaye toute la surface de l'image pixel par pixel.</a:t>
+              <a:t>✔ Forte compacité : Seulement 60 000 poids grâce au partage des filtres (contre des millions pour un réseau dense).</a:t>
             </a:r>
           </a:p>
           <a:p>
             <a:pPr>
-              <a:spcAft>
-                <a:spcPts val="1000"/>
-              </a:spcAft>
-              <a:defRPr sz="1300">
+              <a:spcBef>
+                <a:spcPts val="600"/>
+              </a:spcBef>
+              <a:defRPr sz="1150">
                 <a:solidFill>
                   <a:srgbClr val="475569"/>
                 </a:solidFill>
               </a:defRPr>
             </a:pPr>
             <a:r>
-              <a:t>• Détection Locale de Traits : Le filtre s'active fortement lorsqu'il rencontre la forme géométrique qu'il recherche (ex. barre horizontale du 7).</a:t>
+              <a:t>✔ Apprentissage de bout en bout : Extraction de caractéristiques et classification entraînées conjointement par rétropropagation.</a:t>
             </a:r>
           </a:p>
           <a:p>
             <a:pPr>
-              <a:spcAft>
-                <a:spcPts val="1000"/>
-              </a:spcAft>
-              <a:defRPr sz="1300">
+              <a:spcBef>
+                <a:spcPts val="600"/>
+              </a:spcBef>
+              <a:defRPr sz="1150">
                 <a:solidFill>
                   <a:srgbClr val="475569"/>
                 </a:solidFill>
               </a:defRPr>
             </a:pPr>
             <a:r>
-              <a:t>• Carte de Caractéristiques (Feature Map) : Chaque filtre produit une nouvelle carte indiquant où le trait a été détecté.</a:t>
-            </a:r>
-          </a:p>
-          <a:p>
-            <a:pPr>
-              <a:spcAft>
-                <a:spcPts val="1000"/>
-              </a:spcAft>
-              <a:defRPr sz="1300">
-                <a:solidFill>
-                  <a:srgbClr val="475569"/>
-                </a:solidFill>
-              </a:defRPr>
-            </a:pPr>
-            <a:r>
-              <a:t>• Partage des Poids : Le même filtre est réutilisé sur toute l'image, réduisant drastiquement le nombre de paramètres à entraîner.</a:t>
-            </a:r>
-          </a:p>
-        </p:txBody>
-      </p:sp>
-      <p:pic>
-        <p:nvPicPr>
-          <p:cNvPr id="7" name="Picture 6" descr="fig04_convolution.svg.png"/>
-          <p:cNvPicPr>
-            <a:picLocks noChangeAspect="1"/>
-          </p:cNvPicPr>
+              <a:t>✔ Haute fiabilité opérationnelle : Taux d'erreur &lt; 1 % en conditions industrielles réelles.</a:t>
+            </a:r>
+          </a:p>
+        </p:txBody>
+      </p:sp>
+      <p:sp>
+        <p:nvSpPr>
+          <p:cNvPr id="7" name="Rounded Rectangle 6"/>
+          <p:cNvSpPr/>
           <p:nvPr/>
-        </p:nvPicPr>
-        <p:blipFill>
-          <a:blip r:embed="rId2"/>
-          <a:stretch>
-            <a:fillRect/>
-          </a:stretch>
-        </p:blipFill>
-        <p:spPr>
-          <a:xfrm>
-            <a:off x="6492240" y="1645920"/>
-            <a:ext cx="4937760" cy="4937760"/>
-          </a:xfrm>
-          <a:prstGeom prst="rect">
+        </p:nvSpPr>
+        <p:spPr>
+          <a:xfrm>
+            <a:off x="6217920" y="1554480"/>
+            <a:ext cx="5212080" cy="4480560"/>
+          </a:xfrm>
+          <a:prstGeom prst="roundRect">
             <a:avLst/>
           </a:prstGeom>
-        </p:spPr>
-      </p:pic>
+          <a:solidFill>
+            <a:srgbClr val="FFFFFF"/>
+          </a:solidFill>
+          <a:ln w="25400">
+            <a:solidFill>
+              <a:srgbClr val="DC2626"/>
+            </a:solidFill>
+          </a:ln>
+        </p:spPr>
+        <p:style>
+          <a:lnRef idx="1">
+            <a:schemeClr val="accent1"/>
+          </a:lnRef>
+          <a:fillRef idx="3">
+            <a:schemeClr val="accent1"/>
+          </a:fillRef>
+          <a:effectRef idx="2">
+            <a:schemeClr val="accent1"/>
+          </a:effectRef>
+          <a:fontRef idx="minor">
+            <a:schemeClr val="lt1"/>
+          </a:fontRef>
+        </p:style>
+        <p:txBody>
+          <a:bodyPr rtlCol="0" anchor="ctr" wrap="square"/>
+          <a:lstStyle/>
+          <a:p>
+            <a:pPr algn="ctr">
+              <a:defRPr sz="1600" b="1">
+                <a:solidFill>
+                  <a:srgbClr val="DC2626"/>
+                </a:solidFill>
+              </a:defRPr>
+            </a:pPr>
+            <a:r>
+              <a:t>❌ LIMITES &amp; INCONVÉNIENTS</a:t>
+            </a:r>
+          </a:p>
+          <a:p>
+            <a:pPr>
+              <a:spcBef>
+                <a:spcPts val="600"/>
+              </a:spcBef>
+              <a:defRPr sz="1150">
+                <a:solidFill>
+                  <a:srgbClr val="475569"/>
+                </a:solidFill>
+              </a:defRPr>
+            </a:pPr>
+            <a:r>
+              <a:t>✖ Limité aux petites images : Conçu pour des images monochromes de 32×32 pixels (insuffisant pour la photo couleur haute résolution).</a:t>
+            </a:r>
+          </a:p>
+          <a:p>
+            <a:pPr>
+              <a:spcBef>
+                <a:spcPts val="600"/>
+              </a:spcBef>
+              <a:defRPr sz="1150">
+                <a:solidFill>
+                  <a:srgbClr val="475569"/>
+                </a:solidFill>
+              </a:defRPr>
+            </a:pPr>
+            <a:r>
+              <a:t>✖ Fonctions d'activation saturantes : Utilisation de sigmoïdes / tanh provoquant l'évanouissement du gradient sur des réseaux plus profonds.</a:t>
+            </a:r>
+          </a:p>
+          <a:p>
+            <a:pPr>
+              <a:spcBef>
+                <a:spcPts val="600"/>
+              </a:spcBef>
+              <a:defRPr sz="1150">
+                <a:solidFill>
+                  <a:srgbClr val="475569"/>
+                </a:solidFill>
+              </a:defRPr>
+            </a:pPr>
+            <a:r>
+              <a:t>✖ Coût computationnel pour 1998 : Exigeait des processeurs DSP spécialisés (les GPU modernes n'existaient pas encore pour l'IA).</a:t>
+            </a:r>
+          </a:p>
+          <a:p>
+            <a:pPr>
+              <a:spcBef>
+                <a:spcPts val="600"/>
+              </a:spcBef>
+              <a:defRPr sz="1150">
+                <a:solidFill>
+                  <a:srgbClr val="475569"/>
+                </a:solidFill>
+              </a:defRPr>
+            </a:pPr>
+            <a:r>
+              <a:t>✖ Sous-échantillonnage moyenné : Le pooling moyenné (S2, S4) est moins efficace que le Max-Pooling moderne.</a:t>
+            </a:r>
+          </a:p>
+        </p:txBody>
+      </p:sp>
     </p:spTree>
   </p:cSld>
   <p:clrMapOvr>
@@ -5497,8 +6273,8 @@
         </p:nvSpPr>
         <p:spPr>
           <a:xfrm>
-            <a:off x="731520" y="365760"/>
-            <a:ext cx="10698480" cy="320040"/>
+            <a:off x="731520" y="320040"/>
+            <a:ext cx="10698480" cy="274320"/>
           </a:xfrm>
           <a:prstGeom prst="rect">
             <a:avLst/>
@@ -5512,14 +6288,14 @@
           <a:lstStyle/>
           <a:p>
             <a:pPr>
-              <a:defRPr sz="1100" b="1">
+              <a:defRPr sz="1000" b="1">
                 <a:solidFill>
                   <a:srgbClr val="0969DA"/>
                 </a:solidFill>
               </a:defRPr>
             </a:pPr>
             <a:r>
-              <a:t>PROJET E26/A60 — DOSSIER PÉDAGOGIQUE</a:t>
+              <a:t>ÉVALUATION 2 — PRÉSENTATION D'ARCHITECTURE (7 MIN)</a:t>
             </a:r>
           </a:p>
         </p:txBody>
@@ -5532,7 +6308,7 @@
         </p:nvSpPr>
         <p:spPr>
           <a:xfrm>
-            <a:off x="731520" y="685800"/>
+            <a:off x="731520" y="594360"/>
             <a:ext cx="10698480" cy="731520"/>
           </a:xfrm>
           <a:prstGeom prst="rect">
@@ -5547,14 +6323,14 @@
           <a:lstStyle/>
           <a:p>
             <a:pPr>
-              <a:defRPr sz="2400" b="1">
+              <a:defRPr sz="2300" b="1">
                 <a:solidFill>
                   <a:srgbClr val="0F172A"/>
                 </a:solidFill>
               </a:defRPr>
             </a:pPr>
             <a:r>
-              <a:t>6. Le Pooling : Compresser et Garder l'Essentiel</a:t>
+              <a:t>6. Contribution à l'Évolution des Réseaux de Neurones</a:t>
             </a:r>
           </a:p>
         </p:txBody>
@@ -5567,8 +6343,8 @@
         </p:nvSpPr>
         <p:spPr>
           <a:xfrm>
-            <a:off x="731520" y="1417320"/>
-            <a:ext cx="10725912" cy="36576"/>
+            <a:off x="731520" y="1353312"/>
+            <a:ext cx="10725912" cy="32004"/>
           </a:xfrm>
           <a:prstGeom prst="rect">
             <a:avLst/>
@@ -5613,7 +6389,7 @@
         <p:spPr>
           <a:xfrm>
             <a:off x="731520" y="6309360"/>
-            <a:ext cx="10698480" cy="365760"/>
+            <a:ext cx="10698480" cy="320040"/>
           </a:xfrm>
           <a:prstGeom prst="rect">
             <a:avLst/>
@@ -5634,7 +6410,7 @@
               </a:defRPr>
             </a:pPr>
             <a:r>
-              <a:t>Réseaux de Neurones &amp; LeNet-5 | Slide 7/11 | Sources : LeCun et al. (1998), Mezghani (2024)</a:t>
+              <a:t>LeNet-5 (1998) | Bernard Feugang Noussi | Slide 7/8  (5:40 - 6:25) | Réf: LeCun et al. (1998)</a:t>
             </a:r>
           </a:p>
         </p:txBody>
@@ -5647,8 +6423,8 @@
         </p:nvSpPr>
         <p:spPr>
           <a:xfrm>
-            <a:off x="731520" y="1645920"/>
-            <a:ext cx="5486400" cy="4389120"/>
+            <a:off x="731520" y="1554480"/>
+            <a:ext cx="10725912" cy="4480560"/>
           </a:xfrm>
           <a:prstGeom prst="rect">
             <a:avLst/>
@@ -5669,7 +6445,7 @@
               </a:defRPr>
             </a:pPr>
             <a:r>
-              <a:t>Invariance et Compression Spatiale :</a:t>
+              <a:t>L'Arbre Généalogique de la Vision par Ordinateur :</a:t>
             </a:r>
           </a:p>
           <a:p>
@@ -5677,14 +6453,14 @@
               <a:spcAft>
                 <a:spcPts val="1000"/>
               </a:spcAft>
-              <a:defRPr sz="1300">
+              <a:defRPr sz="1250">
                 <a:solidFill>
                   <a:srgbClr val="475569"/>
                 </a:solidFill>
               </a:defRPr>
             </a:pPr>
             <a:r>
-              <a:t>• Principe du Max-Pooling (2×2) : On découpe la carte de traits en zones 2×2 et on ne garde que la valeur la plus forte.</a:t>
+              <a:t>🚀 Fondation du paradigme CNN : LeNet-5 a formalisé le triplet fondamental moderne : Convolution ➔ Non-linéarité ➔ Sous-échantillonnage (Pooling).</a:t>
             </a:r>
           </a:p>
           <a:p>
@@ -5692,14 +6468,14 @@
               <a:spcAft>
                 <a:spcPts val="1000"/>
               </a:spcAft>
-              <a:defRPr sz="1300">
+              <a:defRPr sz="1250">
                 <a:solidFill>
                   <a:srgbClr val="475569"/>
                 </a:solidFill>
               </a:defRPr>
             </a:pPr>
             <a:r>
-              <a:t>• Réduction Dimensionnelle : La largeur et la hauteur sont divisées par 2 (l'aire par 4), allégeant les calculs suivants.</a:t>
+              <a:t>🚀 Fil conducteur direct vers AlexNet (2012) : AlexNet (vainqueur d'ImageNet 2012) est une extension directe de LeNet-5, transposée sur GPU avec ReLU et Dropout.</a:t>
             </a:r>
           </a:p>
           <a:p>
@@ -5707,14 +6483,14 @@
               <a:spcAft>
                 <a:spcPts val="1000"/>
               </a:spcAft>
-              <a:defRPr sz="1300">
+              <a:defRPr sz="1250">
                 <a:solidFill>
                   <a:srgbClr val="475569"/>
                 </a:solidFill>
               </a:defRPr>
             </a:pPr>
             <a:r>
-              <a:t>• Invariance aux Translations : Le réseau continue de reconnaître le chiffre même s'il est légèrement décalé ou déformé.</a:t>
+              <a:t>🚀 L'ère des architectures profondes : A ouvert la voie à VGG (2014), ResNet (2015) et aux modèles de vision actuels (Vision Transformers, YOLO).</a:t>
             </a:r>
           </a:p>
           <a:p>
@@ -5722,42 +6498,84 @@
               <a:spcAft>
                 <a:spcPts val="1000"/>
               </a:spcAft>
-              <a:defRPr sz="1300">
+              <a:defRPr sz="1250">
                 <a:solidFill>
                   <a:srgbClr val="475569"/>
                 </a:solidFill>
               </a:defRPr>
             </a:pPr>
             <a:r>
-              <a:t>• Alternance Stratégique : Dans LeNet-5, chaque couche de Convolution est immédiatement suivie d'une couche de Pooling.</a:t>
-            </a:r>
-          </a:p>
-        </p:txBody>
-      </p:sp>
-      <p:pic>
-        <p:nvPicPr>
-          <p:cNvPr id="7" name="Picture 6" descr="fig05_pooling.svg.png"/>
-          <p:cNvPicPr>
-            <a:picLocks noChangeAspect="1"/>
-          </p:cNvPicPr>
+              <a:t>🚀 Applications contemporaines omniprésentes : Du déverrouillage Face ID à l'imagerie médicale et aux véhicules autonomes, les principes de LeNet-5 restent au cœur de la vision IA.</a:t>
+            </a:r>
+          </a:p>
+        </p:txBody>
+      </p:sp>
+      <p:sp>
+        <p:nvSpPr>
+          <p:cNvPr id="7" name="Rounded Rectangle 6"/>
+          <p:cNvSpPr/>
           <p:nvPr/>
-        </p:nvPicPr>
-        <p:blipFill>
-          <a:blip r:embed="rId2"/>
-          <a:stretch>
-            <a:fillRect/>
-          </a:stretch>
-        </p:blipFill>
-        <p:spPr>
-          <a:xfrm>
-            <a:off x="6492240" y="1645920"/>
-            <a:ext cx="4937760" cy="4937760"/>
-          </a:xfrm>
-          <a:prstGeom prst="rect">
+        </p:nvSpPr>
+        <p:spPr>
+          <a:xfrm>
+            <a:off x="731520" y="4846320"/>
+            <a:ext cx="10725912" cy="1188720"/>
+          </a:xfrm>
+          <a:prstGeom prst="roundRect">
             <a:avLst/>
           </a:prstGeom>
-        </p:spPr>
-      </p:pic>
+          <a:solidFill>
+            <a:srgbClr val="EFF6FF"/>
+          </a:solidFill>
+          <a:ln>
+            <a:solidFill>
+              <a:srgbClr val="0969DA"/>
+            </a:solidFill>
+          </a:ln>
+        </p:spPr>
+        <p:style>
+          <a:lnRef idx="1">
+            <a:schemeClr val="accent1"/>
+          </a:lnRef>
+          <a:fillRef idx="3">
+            <a:schemeClr val="accent1"/>
+          </a:fillRef>
+          <a:effectRef idx="2">
+            <a:schemeClr val="accent1"/>
+          </a:effectRef>
+          <a:fontRef idx="minor">
+            <a:schemeClr val="lt1"/>
+          </a:fontRef>
+        </p:style>
+        <p:txBody>
+          <a:bodyPr rtlCol="0" anchor="ctr"/>
+          <a:lstStyle/>
+          <a:p>
+            <a:pPr algn="ctr">
+              <a:defRPr sz="1100" b="1">
+                <a:solidFill>
+                  <a:srgbClr val="0969DA"/>
+                </a:solidFill>
+              </a:defRPr>
+            </a:pPr>
+            <a:r>
+              <a:t>🌐 BONUS INTERACTIF FOURNI : Dossier Web HTML autonome (dossier_rxneurones_lenet5.html)</a:t>
+            </a:r>
+          </a:p>
+          <a:p>
+            <a:pPr>
+              <a:defRPr sz="1050">
+                <a:solidFill>
+                  <a:srgbClr val="0F172A"/>
+                </a:solidFill>
+              </a:defRPr>
+            </a:pPr>
+            <a:r>
+              <a:t>Comprend 3 animations interactives pas à pas (Convolution, Neurone, Descente d'erreur) et un quiz de 10 questions d'auto-évaluation.</a:t>
+            </a:r>
+          </a:p>
+        </p:txBody>
+      </p:sp>
     </p:spTree>
   </p:cSld>
   <p:clrMapOvr>
@@ -5784,8 +6602,8 @@
         </p:nvSpPr>
         <p:spPr>
           <a:xfrm>
-            <a:off x="731520" y="365760"/>
-            <a:ext cx="10698480" cy="320040"/>
+            <a:off x="731520" y="320040"/>
+            <a:ext cx="10698480" cy="274320"/>
           </a:xfrm>
           <a:prstGeom prst="rect">
             <a:avLst/>
@@ -5799,14 +6617,14 @@
           <a:lstStyle/>
           <a:p>
             <a:pPr>
-              <a:defRPr sz="1100" b="1">
+              <a:defRPr sz="1000" b="1">
                 <a:solidFill>
                   <a:srgbClr val="0969DA"/>
                 </a:solidFill>
               </a:defRPr>
             </a:pPr>
             <a:r>
-              <a:t>PROJET E26/A60 — DOSSIER PÉDAGOGIQUE</a:t>
+              <a:t>ÉVALUATION 2 — PRÉSENTATION D'ARCHITECTURE (7 MIN)</a:t>
             </a:r>
           </a:p>
         </p:txBody>
@@ -5819,7 +6637,7 @@
         </p:nvSpPr>
         <p:spPr>
           <a:xfrm>
-            <a:off x="731520" y="685800"/>
+            <a:off x="731520" y="594360"/>
             <a:ext cx="10698480" cy="731520"/>
           </a:xfrm>
           <a:prstGeom prst="rect">
@@ -5834,14 +6652,14 @@
           <a:lstStyle/>
           <a:p>
             <a:pPr>
-              <a:defRPr sz="2400" b="1">
+              <a:defRPr sz="2300" b="1">
                 <a:solidFill>
                   <a:srgbClr val="0F172A"/>
                 </a:solidFill>
               </a:defRPr>
             </a:pPr>
             <a:r>
-              <a:t>7. LeNet-5 Couche par Couche (Yann LeCun et al., 1998)</a:t>
+              <a:t>7. Conclusion &amp; Questions (3 min)</a:t>
             </a:r>
           </a:p>
         </p:txBody>
@@ -5854,8 +6672,8 @@
         </p:nvSpPr>
         <p:spPr>
           <a:xfrm>
-            <a:off x="731520" y="1417320"/>
-            <a:ext cx="10725912" cy="36576"/>
+            <a:off x="731520" y="1353312"/>
+            <a:ext cx="10725912" cy="32004"/>
           </a:xfrm>
           <a:prstGeom prst="rect">
             <a:avLst/>
@@ -5900,7 +6718,7 @@
         <p:spPr>
           <a:xfrm>
             <a:off x="731520" y="6309360"/>
-            <a:ext cx="10698480" cy="365760"/>
+            <a:ext cx="10698480" cy="320040"/>
           </a:xfrm>
           <a:prstGeom prst="rect">
             <a:avLst/>
@@ -5921,601 +6739,21 @@
               </a:defRPr>
             </a:pPr>
             <a:r>
-              <a:t>Réseaux de Neurones &amp; LeNet-5 | Slide 8/11 | Sources : LeCun et al. (1998), Mezghani (2024)</a:t>
-            </a:r>
-          </a:p>
-        </p:txBody>
-      </p:sp>
-      <p:pic>
-        <p:nvPicPr>
-          <p:cNvPr id="6" name="Picture 5" descr="fig06_lenet5_pipeline.svg.png"/>
-          <p:cNvPicPr>
-            <a:picLocks noChangeAspect="1"/>
-          </p:cNvPicPr>
-          <p:nvPr/>
-        </p:nvPicPr>
-        <p:blipFill>
-          <a:blip r:embed="rId2"/>
-          <a:stretch>
-            <a:fillRect/>
-          </a:stretch>
-        </p:blipFill>
-        <p:spPr>
-          <a:xfrm>
-            <a:off x="1097280" y="1554480"/>
-            <a:ext cx="9966960" cy="9966960"/>
-          </a:xfrm>
-          <a:prstGeom prst="rect">
-            <a:avLst/>
-          </a:prstGeom>
-        </p:spPr>
-      </p:pic>
-      <p:sp>
-        <p:nvSpPr>
-          <p:cNvPr id="7" name="Rounded Rectangle 6"/>
-          <p:cNvSpPr/>
-          <p:nvPr/>
-        </p:nvSpPr>
-        <p:spPr>
-          <a:xfrm>
-            <a:off x="731520" y="4389120"/>
-            <a:ext cx="1261872" cy="1645920"/>
-          </a:xfrm>
-          <a:prstGeom prst="roundRect">
-            <a:avLst/>
-          </a:prstGeom>
-          <a:solidFill>
-            <a:srgbClr val="FFFFFF"/>
-          </a:solidFill>
-          <a:ln w="12700">
-            <a:solidFill>
-              <a:srgbClr val="E2E8F0"/>
-            </a:solidFill>
-          </a:ln>
-        </p:spPr>
-        <p:style>
-          <a:lnRef idx="1">
-            <a:schemeClr val="accent1"/>
-          </a:lnRef>
-          <a:fillRef idx="3">
-            <a:schemeClr val="accent1"/>
-          </a:fillRef>
-          <a:effectRef idx="2">
-            <a:schemeClr val="accent1"/>
-          </a:effectRef>
-          <a:fontRef idx="minor">
-            <a:schemeClr val="lt1"/>
-          </a:fontRef>
-        </p:style>
-        <p:txBody>
-          <a:bodyPr rtlCol="0" anchor="ctr" wrap="square"/>
-          <a:lstStyle/>
-          <a:p>
-            <a:pPr algn="ctr">
-              <a:defRPr sz="1000" b="1">
-                <a:solidFill>
-                  <a:srgbClr val="0F172A"/>
-                </a:solidFill>
-              </a:defRPr>
-            </a:pPr>
-            <a:r>
-              <a:t>Entrée (32×32)</a:t>
-            </a:r>
-          </a:p>
-          <a:p>
-            <a:pPr>
-              <a:defRPr sz="900">
-                <a:solidFill>
-                  <a:srgbClr val="475569"/>
-                </a:solidFill>
-              </a:defRPr>
-            </a:pPr>
-            <a:r>
-              <a:t>Image centrée</a:t>
-            </a:r>
-          </a:p>
-        </p:txBody>
-      </p:sp>
-      <p:sp>
-        <p:nvSpPr>
-          <p:cNvPr id="8" name="Rounded Rectangle 7"/>
-          <p:cNvSpPr/>
-          <p:nvPr/>
-        </p:nvSpPr>
-        <p:spPr>
-          <a:xfrm>
-            <a:off x="2084832" y="4389120"/>
-            <a:ext cx="1261872" cy="1645920"/>
-          </a:xfrm>
-          <a:prstGeom prst="roundRect">
-            <a:avLst/>
-          </a:prstGeom>
-          <a:solidFill>
-            <a:srgbClr val="EFF6FF"/>
-          </a:solidFill>
-          <a:ln w="12700">
-            <a:solidFill>
-              <a:srgbClr val="0969DA"/>
-            </a:solidFill>
-          </a:ln>
-        </p:spPr>
-        <p:style>
-          <a:lnRef idx="1">
-            <a:schemeClr val="accent1"/>
-          </a:lnRef>
-          <a:fillRef idx="3">
-            <a:schemeClr val="accent1"/>
-          </a:fillRef>
-          <a:effectRef idx="2">
-            <a:schemeClr val="accent1"/>
-          </a:effectRef>
-          <a:fontRef idx="minor">
-            <a:schemeClr val="lt1"/>
-          </a:fontRef>
-        </p:style>
-        <p:txBody>
-          <a:bodyPr rtlCol="0" anchor="ctr" wrap="square"/>
-          <a:lstStyle/>
-          <a:p>
-            <a:pPr algn="ctr">
-              <a:defRPr sz="1000" b="1">
-                <a:solidFill>
-                  <a:srgbClr val="0F172A"/>
-                </a:solidFill>
-              </a:defRPr>
-            </a:pPr>
-            <a:r>
-              <a:t>C1 (28×28)</a:t>
-            </a:r>
-          </a:p>
-          <a:p>
-            <a:pPr>
-              <a:defRPr sz="900">
-                <a:solidFill>
-                  <a:srgbClr val="475569"/>
-                </a:solidFill>
-              </a:defRPr>
-            </a:pPr>
-            <a:r>
-              <a:t>6 filtres 5×5</a:t>
-            </a:r>
-            <a:br/>
-            <a:r>
-              <a:t>156 poids</a:t>
-            </a:r>
-          </a:p>
-        </p:txBody>
-      </p:sp>
-      <p:sp>
-        <p:nvSpPr>
-          <p:cNvPr id="9" name="Rounded Rectangle 8"/>
-          <p:cNvSpPr/>
-          <p:nvPr/>
-        </p:nvSpPr>
-        <p:spPr>
-          <a:xfrm>
-            <a:off x="3438144" y="4389120"/>
-            <a:ext cx="1261872" cy="1645920"/>
-          </a:xfrm>
-          <a:prstGeom prst="roundRect">
-            <a:avLst/>
-          </a:prstGeom>
-          <a:solidFill>
-            <a:srgbClr val="FFFFFF"/>
-          </a:solidFill>
-          <a:ln w="12700">
-            <a:solidFill>
-              <a:srgbClr val="E2E8F0"/>
-            </a:solidFill>
-          </a:ln>
-        </p:spPr>
-        <p:style>
-          <a:lnRef idx="1">
-            <a:schemeClr val="accent1"/>
-          </a:lnRef>
-          <a:fillRef idx="3">
-            <a:schemeClr val="accent1"/>
-          </a:fillRef>
-          <a:effectRef idx="2">
-            <a:schemeClr val="accent1"/>
-          </a:effectRef>
-          <a:fontRef idx="minor">
-            <a:schemeClr val="lt1"/>
-          </a:fontRef>
-        </p:style>
-        <p:txBody>
-          <a:bodyPr rtlCol="0" anchor="ctr" wrap="square"/>
-          <a:lstStyle/>
-          <a:p>
-            <a:pPr algn="ctr">
-              <a:defRPr sz="1000" b="1">
-                <a:solidFill>
-                  <a:srgbClr val="0F172A"/>
-                </a:solidFill>
-              </a:defRPr>
-            </a:pPr>
-            <a:r>
-              <a:t>S2 (14×14)</a:t>
-            </a:r>
-          </a:p>
-          <a:p>
-            <a:pPr>
-              <a:defRPr sz="900">
-                <a:solidFill>
-                  <a:srgbClr val="475569"/>
-                </a:solidFill>
-              </a:defRPr>
-            </a:pPr>
-            <a:r>
-              <a:t>Subsampling 2×2</a:t>
-            </a:r>
-            <a:br/>
-            <a:r>
-              <a:t>12 poids</a:t>
-            </a:r>
-          </a:p>
-        </p:txBody>
-      </p:sp>
-      <p:sp>
-        <p:nvSpPr>
-          <p:cNvPr id="10" name="Rounded Rectangle 9"/>
-          <p:cNvSpPr/>
-          <p:nvPr/>
-        </p:nvSpPr>
-        <p:spPr>
-          <a:xfrm>
-            <a:off x="4791455" y="4389120"/>
-            <a:ext cx="1261872" cy="1645920"/>
-          </a:xfrm>
-          <a:prstGeom prst="roundRect">
-            <a:avLst/>
-          </a:prstGeom>
-          <a:solidFill>
-            <a:srgbClr val="EFF6FF"/>
-          </a:solidFill>
-          <a:ln w="12700">
-            <a:solidFill>
-              <a:srgbClr val="0969DA"/>
-            </a:solidFill>
-          </a:ln>
-        </p:spPr>
-        <p:style>
-          <a:lnRef idx="1">
-            <a:schemeClr val="accent1"/>
-          </a:lnRef>
-          <a:fillRef idx="3">
-            <a:schemeClr val="accent1"/>
-          </a:fillRef>
-          <a:effectRef idx="2">
-            <a:schemeClr val="accent1"/>
-          </a:effectRef>
-          <a:fontRef idx="minor">
-            <a:schemeClr val="lt1"/>
-          </a:fontRef>
-        </p:style>
-        <p:txBody>
-          <a:bodyPr rtlCol="0" anchor="ctr" wrap="square"/>
-          <a:lstStyle/>
-          <a:p>
-            <a:pPr algn="ctr">
-              <a:defRPr sz="1000" b="1">
-                <a:solidFill>
-                  <a:srgbClr val="0F172A"/>
-                </a:solidFill>
-              </a:defRPr>
-            </a:pPr>
-            <a:r>
-              <a:t>C3 (10×10)</a:t>
-            </a:r>
-          </a:p>
-          <a:p>
-            <a:pPr>
-              <a:defRPr sz="900">
-                <a:solidFill>
-                  <a:srgbClr val="475569"/>
-                </a:solidFill>
-              </a:defRPr>
-            </a:pPr>
-            <a:r>
-              <a:t>16 filtres 5×5</a:t>
-            </a:r>
-            <a:br/>
-            <a:r>
-              <a:t>1 516 poids</a:t>
-            </a:r>
-          </a:p>
-        </p:txBody>
-      </p:sp>
-      <p:sp>
-        <p:nvSpPr>
-          <p:cNvPr id="11" name="Rounded Rectangle 10"/>
-          <p:cNvSpPr/>
-          <p:nvPr/>
-        </p:nvSpPr>
-        <p:spPr>
-          <a:xfrm>
-            <a:off x="6144768" y="4389120"/>
-            <a:ext cx="1261872" cy="1645920"/>
-          </a:xfrm>
-          <a:prstGeom prst="roundRect">
-            <a:avLst/>
-          </a:prstGeom>
-          <a:solidFill>
-            <a:srgbClr val="FFFFFF"/>
-          </a:solidFill>
-          <a:ln w="12700">
-            <a:solidFill>
-              <a:srgbClr val="E2E8F0"/>
-            </a:solidFill>
-          </a:ln>
-        </p:spPr>
-        <p:style>
-          <a:lnRef idx="1">
-            <a:schemeClr val="accent1"/>
-          </a:lnRef>
-          <a:fillRef idx="3">
-            <a:schemeClr val="accent1"/>
-          </a:fillRef>
-          <a:effectRef idx="2">
-            <a:schemeClr val="accent1"/>
-          </a:effectRef>
-          <a:fontRef idx="minor">
-            <a:schemeClr val="lt1"/>
-          </a:fontRef>
-        </p:style>
-        <p:txBody>
-          <a:bodyPr rtlCol="0" anchor="ctr" wrap="square"/>
-          <a:lstStyle/>
-          <a:p>
-            <a:pPr algn="ctr">
-              <a:defRPr sz="1000" b="1">
-                <a:solidFill>
-                  <a:srgbClr val="0F172A"/>
-                </a:solidFill>
-              </a:defRPr>
-            </a:pPr>
-            <a:r>
-              <a:t>S4 (5×5)</a:t>
-            </a:r>
-          </a:p>
-          <a:p>
-            <a:pPr>
-              <a:defRPr sz="900">
-                <a:solidFill>
-                  <a:srgbClr val="475569"/>
-                </a:solidFill>
-              </a:defRPr>
-            </a:pPr>
-            <a:r>
-              <a:t>Subsampling 2×2</a:t>
-            </a:r>
-            <a:br/>
-            <a:r>
-              <a:t>32 poids</a:t>
-            </a:r>
-          </a:p>
-        </p:txBody>
-      </p:sp>
-      <p:sp>
-        <p:nvSpPr>
-          <p:cNvPr id="12" name="Rounded Rectangle 11"/>
-          <p:cNvSpPr/>
-          <p:nvPr/>
-        </p:nvSpPr>
-        <p:spPr>
-          <a:xfrm>
-            <a:off x="7498080" y="4389120"/>
-            <a:ext cx="1261872" cy="1645920"/>
-          </a:xfrm>
-          <a:prstGeom prst="roundRect">
-            <a:avLst/>
-          </a:prstGeom>
-          <a:solidFill>
-            <a:srgbClr val="EFF6FF"/>
-          </a:solidFill>
-          <a:ln w="12700">
-            <a:solidFill>
-              <a:srgbClr val="0969DA"/>
-            </a:solidFill>
-          </a:ln>
-        </p:spPr>
-        <p:style>
-          <a:lnRef idx="1">
-            <a:schemeClr val="accent1"/>
-          </a:lnRef>
-          <a:fillRef idx="3">
-            <a:schemeClr val="accent1"/>
-          </a:fillRef>
-          <a:effectRef idx="2">
-            <a:schemeClr val="accent1"/>
-          </a:effectRef>
-          <a:fontRef idx="minor">
-            <a:schemeClr val="lt1"/>
-          </a:fontRef>
-        </p:style>
-        <p:txBody>
-          <a:bodyPr rtlCol="0" anchor="ctr" wrap="square"/>
-          <a:lstStyle/>
-          <a:p>
-            <a:pPr algn="ctr">
-              <a:defRPr sz="1000" b="1">
-                <a:solidFill>
-                  <a:srgbClr val="0F172A"/>
-                </a:solidFill>
-              </a:defRPr>
-            </a:pPr>
-            <a:r>
-              <a:t>C5 (120 u.)</a:t>
-            </a:r>
-          </a:p>
-          <a:p>
-            <a:pPr>
-              <a:defRPr sz="900">
-                <a:solidFill>
-                  <a:srgbClr val="475569"/>
-                </a:solidFill>
-              </a:defRPr>
-            </a:pPr>
-            <a:r>
-              <a:t>Dense / Conv</a:t>
-            </a:r>
-            <a:br/>
-            <a:r>
-              <a:t>48 120 poids</a:t>
-            </a:r>
-          </a:p>
-        </p:txBody>
-      </p:sp>
-      <p:sp>
-        <p:nvSpPr>
-          <p:cNvPr id="13" name="Rounded Rectangle 12"/>
-          <p:cNvSpPr/>
-          <p:nvPr/>
-        </p:nvSpPr>
-        <p:spPr>
-          <a:xfrm>
-            <a:off x="8851392" y="4389120"/>
-            <a:ext cx="1261872" cy="1645920"/>
-          </a:xfrm>
-          <a:prstGeom prst="roundRect">
-            <a:avLst/>
-          </a:prstGeom>
-          <a:solidFill>
-            <a:srgbClr val="FFFFFF"/>
-          </a:solidFill>
-          <a:ln w="12700">
-            <a:solidFill>
-              <a:srgbClr val="E2E8F0"/>
-            </a:solidFill>
-          </a:ln>
-        </p:spPr>
-        <p:style>
-          <a:lnRef idx="1">
-            <a:schemeClr val="accent1"/>
-          </a:lnRef>
-          <a:fillRef idx="3">
-            <a:schemeClr val="accent1"/>
-          </a:fillRef>
-          <a:effectRef idx="2">
-            <a:schemeClr val="accent1"/>
-          </a:effectRef>
-          <a:fontRef idx="minor">
-            <a:schemeClr val="lt1"/>
-          </a:fontRef>
-        </p:style>
-        <p:txBody>
-          <a:bodyPr rtlCol="0" anchor="ctr" wrap="square"/>
-          <a:lstStyle/>
-          <a:p>
-            <a:pPr algn="ctr">
-              <a:defRPr sz="1000" b="1">
-                <a:solidFill>
-                  <a:srgbClr val="0F172A"/>
-                </a:solidFill>
-              </a:defRPr>
-            </a:pPr>
-            <a:r>
-              <a:t>F6 (84 u.)</a:t>
-            </a:r>
-          </a:p>
-          <a:p>
-            <a:pPr>
-              <a:defRPr sz="900">
-                <a:solidFill>
-                  <a:srgbClr val="475569"/>
-                </a:solidFill>
-              </a:defRPr>
-            </a:pPr>
-            <a:r>
-              <a:t>Dense</a:t>
-            </a:r>
-            <a:br/>
-            <a:r>
-              <a:t>10 164 poids</a:t>
-            </a:r>
-          </a:p>
-        </p:txBody>
-      </p:sp>
-      <p:sp>
-        <p:nvSpPr>
-          <p:cNvPr id="14" name="Rounded Rectangle 13"/>
-          <p:cNvSpPr/>
-          <p:nvPr/>
-        </p:nvSpPr>
-        <p:spPr>
-          <a:xfrm>
-            <a:off x="10204704" y="4389120"/>
-            <a:ext cx="1261872" cy="1645920"/>
-          </a:xfrm>
-          <a:prstGeom prst="roundRect">
-            <a:avLst/>
-          </a:prstGeom>
-          <a:solidFill>
-            <a:srgbClr val="FFFFFF"/>
-          </a:solidFill>
-          <a:ln w="12700">
-            <a:solidFill>
-              <a:srgbClr val="E2E8F0"/>
-            </a:solidFill>
-          </a:ln>
-        </p:spPr>
-        <p:style>
-          <a:lnRef idx="1">
-            <a:schemeClr val="accent1"/>
-          </a:lnRef>
-          <a:fillRef idx="3">
-            <a:schemeClr val="accent1"/>
-          </a:fillRef>
-          <a:effectRef idx="2">
-            <a:schemeClr val="accent1"/>
-          </a:effectRef>
-          <a:fontRef idx="minor">
-            <a:schemeClr val="lt1"/>
-          </a:fontRef>
-        </p:style>
-        <p:txBody>
-          <a:bodyPr rtlCol="0" anchor="ctr" wrap="square"/>
-          <a:lstStyle/>
-          <a:p>
-            <a:pPr algn="ctr">
-              <a:defRPr sz="1000" b="1">
-                <a:solidFill>
-                  <a:srgbClr val="0F172A"/>
-                </a:solidFill>
-              </a:defRPr>
-            </a:pPr>
-            <a:r>
-              <a:t>Sortie (10)</a:t>
-            </a:r>
-          </a:p>
-          <a:p>
-            <a:pPr>
-              <a:defRPr sz="900">
-                <a:solidFill>
-                  <a:srgbClr val="475569"/>
-                </a:solidFill>
-              </a:defRPr>
-            </a:pPr>
-            <a:r>
-              <a:t>Probabilités 0-9</a:t>
-            </a:r>
-            <a:br/>
-            <a:r>
-              <a:t>Pic sur « 7 »</a:t>
-            </a:r>
-          </a:p>
-        </p:txBody>
-      </p:sp>
-      <p:sp>
-        <p:nvSpPr>
-          <p:cNvPr id="15" name="TextBox 14"/>
+              <a:t>LeNet-5 (1998) | Bernard Feugang Noussi | Slide 8/8  (6:25 - 7:00) | Réf: LeCun et al. (1998)</a:t>
+            </a:r>
+          </a:p>
+        </p:txBody>
+      </p:sp>
+      <p:sp>
+        <p:nvSpPr>
+          <p:cNvPr id="6" name="TextBox 5"/>
           <p:cNvSpPr txBox="1"/>
           <p:nvPr/>
         </p:nvSpPr>
         <p:spPr>
           <a:xfrm>
-            <a:off x="731520" y="5943600"/>
-            <a:ext cx="10698480" cy="365760"/>
+            <a:off x="731520" y="1554480"/>
+            <a:ext cx="10725912" cy="4389120"/>
           </a:xfrm>
           <a:prstGeom prst="rect">
             <a:avLst/>
@@ -6523,311 +6761,84 @@
           <a:noFill/>
         </p:spPr>
         <p:txBody>
-          <a:bodyPr wrap="none">
-            <a:spAutoFit/>
-          </a:bodyPr>
-          <a:lstStyle/>
-          <a:p>
-            <a:pPr>
-              <a:defRPr sz="1100" b="1">
-                <a:solidFill>
-                  <a:srgbClr val="16A34A"/>
-                </a:solidFill>
-              </a:defRPr>
-            </a:pPr>
-            <a:r>
-              <a:t>🎯 TOTAL PARAMÈTRES ENTRAÎNABLES : ~60 000 (Source primaire : LeCun et al., 1998, Section II-B, Table 1)</a:t>
-            </a:r>
-          </a:p>
-        </p:txBody>
-      </p:sp>
-    </p:spTree>
-  </p:cSld>
-  <p:clrMapOvr>
-    <a:masterClrMapping/>
-  </p:clrMapOvr>
-</p:sld>
-</file>
-
-<file path=ppt/slides/slide9.xml><?xml version="1.0" encoding="utf-8"?>
-<p:sld xmlns:a="http://schemas.openxmlformats.org/drawingml/2006/main" xmlns:p="http://schemas.openxmlformats.org/presentationml/2006/main" xmlns:r="http://schemas.openxmlformats.org/officeDocument/2006/relationships">
-  <p:cSld>
-    <p:spTree>
-      <p:nvGrpSpPr>
-        <p:cNvPr id="1" name=""/>
-        <p:cNvGrpSpPr/>
-        <p:nvPr/>
-      </p:nvGrpSpPr>
-      <p:grpSpPr/>
-      <p:sp>
-        <p:nvSpPr>
-          <p:cNvPr id="2" name="TextBox 1"/>
-          <p:cNvSpPr txBox="1"/>
-          <p:nvPr/>
-        </p:nvSpPr>
-        <p:spPr>
-          <a:xfrm>
-            <a:off x="731520" y="365760"/>
-            <a:ext cx="10698480" cy="320040"/>
-          </a:xfrm>
-          <a:prstGeom prst="rect">
-            <a:avLst/>
-          </a:prstGeom>
-          <a:noFill/>
-        </p:spPr>
-        <p:txBody>
-          <a:bodyPr wrap="none">
-            <a:spAutoFit/>
-          </a:bodyPr>
-          <a:lstStyle/>
-          <a:p>
-            <a:pPr>
-              <a:defRPr sz="1100" b="1">
-                <a:solidFill>
-                  <a:srgbClr val="0969DA"/>
-                </a:solidFill>
-              </a:defRPr>
-            </a:pPr>
-            <a:r>
-              <a:t>PROJET E26/A60 — DOSSIER PÉDAGOGIQUE</a:t>
-            </a:r>
-          </a:p>
-        </p:txBody>
-      </p:sp>
-      <p:sp>
-        <p:nvSpPr>
-          <p:cNvPr id="3" name="TextBox 2"/>
-          <p:cNvSpPr txBox="1"/>
-          <p:nvPr/>
-        </p:nvSpPr>
-        <p:spPr>
-          <a:xfrm>
-            <a:off x="731520" y="685800"/>
-            <a:ext cx="10698480" cy="731520"/>
-          </a:xfrm>
-          <a:prstGeom prst="rect">
-            <a:avLst/>
-          </a:prstGeom>
-          <a:noFill/>
-        </p:spPr>
-        <p:txBody>
-          <a:bodyPr wrap="none">
-            <a:spAutoFit/>
-          </a:bodyPr>
-          <a:lstStyle/>
-          <a:p>
-            <a:pPr>
-              <a:defRPr sz="2400" b="1">
-                <a:solidFill>
-                  <a:srgbClr val="0F172A"/>
-                </a:solidFill>
-              </a:defRPr>
-            </a:pPr>
-            <a:r>
-              <a:t>8. Résultats Concrets &amp; Déploiement Industriel (NCR)</a:t>
-            </a:r>
-          </a:p>
-        </p:txBody>
-      </p:sp>
-      <p:sp>
-        <p:nvSpPr>
-          <p:cNvPr id="4" name="Rectangle 3"/>
-          <p:cNvSpPr/>
-          <p:nvPr/>
-        </p:nvSpPr>
-        <p:spPr>
-          <a:xfrm>
-            <a:off x="731520" y="1417320"/>
-            <a:ext cx="10725912" cy="36576"/>
-          </a:xfrm>
-          <a:prstGeom prst="rect">
-            <a:avLst/>
-          </a:prstGeom>
-          <a:solidFill>
-            <a:srgbClr val="0969DA"/>
-          </a:solidFill>
-          <a:ln>
-            <a:solidFill>
-              <a:srgbClr val="0969DA"/>
-            </a:solidFill>
-          </a:ln>
-        </p:spPr>
-        <p:style>
-          <a:lnRef idx="1">
-            <a:schemeClr val="accent1"/>
-          </a:lnRef>
-          <a:fillRef idx="3">
-            <a:schemeClr val="accent1"/>
-          </a:fillRef>
-          <a:effectRef idx="2">
-            <a:schemeClr val="accent1"/>
-          </a:effectRef>
-          <a:fontRef idx="minor">
-            <a:schemeClr val="lt1"/>
-          </a:fontRef>
-        </p:style>
-        <p:txBody>
-          <a:bodyPr rtlCol="0" anchor="ctr"/>
-          <a:lstStyle/>
-          <a:p>
-            <a:pPr algn="ctr"/>
-          </a:p>
-        </p:txBody>
-      </p:sp>
-      <p:sp>
-        <p:nvSpPr>
-          <p:cNvPr id="5" name="TextBox 4"/>
-          <p:cNvSpPr txBox="1"/>
-          <p:nvPr/>
-        </p:nvSpPr>
-        <p:spPr>
-          <a:xfrm>
-            <a:off x="731520" y="6309360"/>
-            <a:ext cx="10698480" cy="365760"/>
-          </a:xfrm>
-          <a:prstGeom prst="rect">
-            <a:avLst/>
-          </a:prstGeom>
-          <a:noFill/>
-        </p:spPr>
-        <p:txBody>
-          <a:bodyPr wrap="none">
-            <a:spAutoFit/>
-          </a:bodyPr>
-          <a:lstStyle/>
-          <a:p>
-            <a:pPr>
-              <a:defRPr sz="900">
-                <a:solidFill>
-                  <a:srgbClr val="475569"/>
-                </a:solidFill>
-              </a:defRPr>
-            </a:pPr>
-            <a:r>
-              <a:t>Réseaux de Neurones &amp; LeNet-5 | Slide 9/11 | Sources : LeCun et al. (1998), Mezghani (2024)</a:t>
-            </a:r>
-          </a:p>
-        </p:txBody>
-      </p:sp>
-      <p:sp>
-        <p:nvSpPr>
-          <p:cNvPr id="6" name="TextBox 5"/>
-          <p:cNvSpPr txBox="1"/>
-          <p:nvPr/>
-        </p:nvSpPr>
-        <p:spPr>
-          <a:xfrm>
-            <a:off x="731520" y="1645920"/>
-            <a:ext cx="5486400" cy="4389120"/>
-          </a:xfrm>
-          <a:prstGeom prst="rect">
-            <a:avLst/>
-          </a:prstGeom>
-          <a:noFill/>
-        </p:spPr>
-        <p:txBody>
           <a:bodyPr wrap="square">
             <a:spAutoFit/>
           </a:bodyPr>
           <a:lstStyle/>
           <a:p>
             <a:pPr>
-              <a:defRPr sz="1600" b="1">
+              <a:defRPr sz="1800" b="1">
                 <a:solidFill>
                   <a:srgbClr val="0F172A"/>
                 </a:solidFill>
               </a:defRPr>
             </a:pPr>
             <a:r>
-              <a:t>Impact Économique et Performances Mesurées :</a:t>
+              <a:t>Ce qu'il faut retenir en 3 points essentiels :</a:t>
             </a:r>
           </a:p>
           <a:p>
             <a:pPr>
               <a:spcAft>
-                <a:spcPts val="1000"/>
+                <a:spcPts val="1200"/>
               </a:spcAft>
-              <a:defRPr sz="1300">
+              <a:defRPr sz="1400">
                 <a:solidFill>
                   <a:srgbClr val="475569"/>
                 </a:solidFill>
               </a:defRPr>
             </a:pPr>
             <a:r>
-              <a:t>• Taux d'Erreur Record sur MNIST (0,8 %) : Sur les 10 000 images de test standard, LeNet-5 stabilise son erreur à 0,95% sans distorsion et 0,8% avec distorsions [LeCun 1998, Table 2].</a:t>
+              <a:t>✔ 1. Une architecture Convolutive (CNN) : Spécialisée dans le traitement spatial 2D des images via des filtres partagés.</a:t>
             </a:r>
           </a:p>
           <a:p>
             <a:pPr>
               <a:spcAft>
-                <a:spcPts val="1000"/>
+                <a:spcPts val="1200"/>
               </a:spcAft>
-              <a:defRPr sz="1300">
+              <a:defRPr sz="1400">
                 <a:solidFill>
                   <a:srgbClr val="475569"/>
                 </a:solidFill>
               </a:defRPr>
             </a:pPr>
             <a:r>
-              <a:t>• Déploiement Commercial NCR : Intégré dans les trieuses bancaires automatiques de la société NCR dès la fin des années 1990.</a:t>
+              <a:t>✔ 2. Une efficacité prouvée sur le terrain : 0,8% d'erreur sur MNIST et des millions de chèques traités chaque mois chez NCR.</a:t>
             </a:r>
           </a:p>
           <a:p>
             <a:pPr>
               <a:spcAft>
-                <a:spcPts val="1000"/>
+                <a:spcPts val="1200"/>
               </a:spcAft>
-              <a:defRPr sz="1300">
+              <a:defRPr sz="1400">
                 <a:solidFill>
                   <a:srgbClr val="475569"/>
                 </a:solidFill>
               </a:defRPr>
             </a:pPr>
             <a:r>
-              <a:t>• Millions de Chèques par Mois : La machine traitait des millions de chèques/mois, représentant selon les estimations ~10% du volume des chèques aux USA [LeCun 1998, Sec. I].</a:t>
+              <a:t>✔ 3. Le point de départ du Deep Learning : Le socle architectural qui alimente la quasi-totalité des technologies de vision d'aujourd'hui.</a:t>
             </a:r>
           </a:p>
           <a:p>
             <a:pPr>
-              <a:spcAft>
-                <a:spcPts val="1000"/>
-              </a:spcAft>
-              <a:defRPr sz="1300">
-                <a:solidFill>
-                  <a:srgbClr val="475569"/>
-                </a:solidFill>
-              </a:defRPr>
-            </a:pPr>
-            <a:r>
-              <a:t>• Compacité Impressionnante : Avec seulement 60 000 poids (~300 Ko), le modèle tournait en temps réel sur les processeurs DSP de 1998.</a:t>
-            </a:r>
-          </a:p>
-        </p:txBody>
-      </p:sp>
-      <p:pic>
-        <p:nvPicPr>
-          <p:cNvPr id="7" name="Picture 6" descr="fig08_cheque.svg.png"/>
-          <p:cNvPicPr>
-            <a:picLocks noChangeAspect="1"/>
-          </p:cNvPicPr>
-          <p:nvPr/>
-        </p:nvPicPr>
-        <p:blipFill>
-          <a:blip r:embed="rId2"/>
-          <a:stretch>
-            <a:fillRect/>
-          </a:stretch>
-        </p:blipFill>
-        <p:spPr>
-          <a:xfrm>
-            <a:off x="6492240" y="1645920"/>
-            <a:ext cx="4937760" cy="4937760"/>
-          </a:xfrm>
-          <a:prstGeom prst="rect">
-            <a:avLst/>
-          </a:prstGeom>
-        </p:spPr>
-      </p:pic>
+              <a:spcBef>
+                <a:spcPts val="1600"/>
+              </a:spcBef>
+              <a:defRPr sz="1800" b="1">
+                <a:solidFill>
+                  <a:srgbClr val="0969DA"/>
+                </a:solidFill>
+              </a:defRPr>
+            </a:pPr>
+            <a:r>
+              <a:t>💬 Merci pour votre attention. Place aux questions !</a:t>
+            </a:r>
+          </a:p>
+        </p:txBody>
+      </p:sp>
     </p:spTree>
   </p:cSld>
   <p:clrMapOvr>
@@ -7154,4 +7165,324 @@
   </a:objectDefaults>
   <a:extraClrSchemeLst/>
 </a:theme>
+</file>
+
+<file path=ppt/theme/theme2.xml><?xml version="1.0" encoding="utf-8"?>
+<a:theme xmlns:a="http://schemas.openxmlformats.org/drawingml/2006/main" name="Office Theme">
+  <a:themeElements>
+    <a:clrScheme name="Office">
+      <a:dk1>
+        <a:sysClr val="windowText" lastClr="000000"/>
+      </a:dk1>
+      <a:lt1>
+        <a:sysClr val="window" lastClr="FFFFFF"/>
+      </a:lt1>
+      <a:dk2>
+        <a:srgbClr val="1F497D"/>
+      </a:dk2>
+      <a:lt2>
+        <a:srgbClr val="EEECE1"/>
+      </a:lt2>
+      <a:accent1>
+        <a:srgbClr val="4F81BD"/>
+      </a:accent1>
+      <a:accent2>
+        <a:srgbClr val="C0504D"/>
+      </a:accent2>
+      <a:accent3>
+        <a:srgbClr val="9BBB59"/>
+      </a:accent3>
+      <a:accent4>
+        <a:srgbClr val="8064A2"/>
+      </a:accent4>
+      <a:accent5>
+        <a:srgbClr val="4BACC6"/>
+      </a:accent5>
+      <a:accent6>
+        <a:srgbClr val="F79646"/>
+      </a:accent6>
+      <a:hlink>
+        <a:srgbClr val="0000FF"/>
+      </a:hlink>
+      <a:folHlink>
+        <a:srgbClr val="800080"/>
+      </a:folHlink>
+    </a:clrScheme>
+    <a:fontScheme name="Office">
+      <a:majorFont>
+        <a:latin typeface="Calibri"/>
+        <a:ea typeface=""/>
+        <a:cs typeface=""/>
+        <a:font script="Jpan" typeface="ＭＳ Ｐゴシック"/>
+        <a:font script="Hang" typeface="맑은 고딕"/>
+        <a:font script="Hans" typeface="宋体"/>
+        <a:font script="Hant" typeface="新細明體"/>
+        <a:font script="Arab" typeface="Times New Roman"/>
+        <a:font script="Hebr" typeface="Times New Roman"/>
+        <a:font script="Thai" typeface="Angsana New"/>
+        <a:font script="Ethi" typeface="Nyala"/>
+        <a:font script="Beng" typeface="Vrinda"/>
+        <a:font script="Gujr" typeface="Shruti"/>
+        <a:font script="Khmr" typeface="MoolBoran"/>
+        <a:font script="Knda" typeface="Tunga"/>
+        <a:font script="Guru" typeface="Raavi"/>
+        <a:font script="Cans" typeface="Euphemia"/>
+        <a:font script="Cher" typeface="Plantagenet Cherokee"/>
+        <a:font script="Yiii" typeface="Microsoft Yi Baiti"/>
+        <a:font script="Tibt" typeface="Microsoft Himalaya"/>
+        <a:font script="Thaa" typeface="MV Boli"/>
+        <a:font script="Deva" typeface="Mangal"/>
+        <a:font script="Telu" typeface="Gautami"/>
+        <a:font script="Taml" typeface="Latha"/>
+        <a:font script="Syrc" typeface="Estrangelo Edessa"/>
+        <a:font script="Orya" typeface="Kalinga"/>
+        <a:font script="Mlym" typeface="Kartika"/>
+        <a:font script="Laoo" typeface="DokChampa"/>
+        <a:font script="Sinh" typeface="Iskoola Pota"/>
+        <a:font script="Mong" typeface="Mongolian Baiti"/>
+        <a:font script="Viet" typeface="Times New Roman"/>
+        <a:font script="Uigh" typeface="Microsoft Uighur"/>
+        <a:font script="Geor" typeface="Sylfaen"/>
+      </a:majorFont>
+      <a:minorFont>
+        <a:latin typeface="Calibri"/>
+        <a:ea typeface=""/>
+        <a:cs typeface=""/>
+        <a:font script="Jpan" typeface="ＭＳ Ｐゴシック"/>
+        <a:font script="Hang" typeface="맑은 고딕"/>
+        <a:font script="Hans" typeface="宋体"/>
+        <a:font script="Hant" typeface="新細明體"/>
+        <a:font script="Arab" typeface="Arial"/>
+        <a:font script="Hebr" typeface="Arial"/>
+        <a:font script="Thai" typeface="Cordia New"/>
+        <a:font script="Ethi" typeface="Nyala"/>
+        <a:font script="Beng" typeface="Vrinda"/>
+        <a:font script="Gujr" typeface="Shruti"/>
+        <a:font script="Khmr" typeface="DaunPenh"/>
+        <a:font script="Knda" typeface="Tunga"/>
+        <a:font script="Guru" typeface="Raavi"/>
+        <a:font script="Cans" typeface="Euphemia"/>
+        <a:font script="Cher" typeface="Plantagenet Cherokee"/>
+        <a:font script="Yiii" typeface="Microsoft Yi Baiti"/>
+        <a:font script="Tibt" typeface="Microsoft Himalaya"/>
+        <a:font script="Thaa" typeface="MV Boli"/>
+        <a:font script="Deva" typeface="Mangal"/>
+        <a:font script="Telu" typeface="Gautami"/>
+        <a:font script="Taml" typeface="Latha"/>
+        <a:font script="Syrc" typeface="Estrangelo Edessa"/>
+        <a:font script="Orya" typeface="Kalinga"/>
+        <a:font script="Mlym" typeface="Kartika"/>
+        <a:font script="Laoo" typeface="DokChampa"/>
+        <a:font script="Sinh" typeface="Iskoola Pota"/>
+        <a:font script="Mong" typeface="Mongolian Baiti"/>
+        <a:font script="Viet" typeface="Arial"/>
+        <a:font script="Uigh" typeface="Microsoft Uighur"/>
+        <a:font script="Geor" typeface="Sylfaen"/>
+      </a:minorFont>
+    </a:fontScheme>
+    <a:fmtScheme name="Office">
+      <a:fillStyleLst>
+        <a:solidFill>
+          <a:schemeClr val="phClr"/>
+        </a:solidFill>
+        <a:gradFill rotWithShape="1">
+          <a:gsLst>
+            <a:gs pos="0">
+              <a:schemeClr val="phClr">
+                <a:tint val="50000"/>
+                <a:satMod val="300000"/>
+              </a:schemeClr>
+            </a:gs>
+            <a:gs pos="35000">
+              <a:schemeClr val="phClr">
+                <a:tint val="37000"/>
+                <a:satMod val="300000"/>
+              </a:schemeClr>
+            </a:gs>
+            <a:gs pos="100000">
+              <a:schemeClr val="phClr">
+                <a:tint val="15000"/>
+                <a:satMod val="350000"/>
+              </a:schemeClr>
+            </a:gs>
+          </a:gsLst>
+          <a:lin ang="16200000" scaled="1"/>
+        </a:gradFill>
+        <a:gradFill rotWithShape="1">
+          <a:gsLst>
+            <a:gs pos="0">
+              <a:schemeClr val="phClr">
+                <a:tint val="100000"/>
+                <a:shade val="100000"/>
+                <a:satMod val="130000"/>
+              </a:schemeClr>
+            </a:gs>
+            <a:gs pos="100000">
+              <a:schemeClr val="phClr">
+                <a:tint val="50000"/>
+                <a:shade val="100000"/>
+                <a:satMod val="350000"/>
+              </a:schemeClr>
+            </a:gs>
+          </a:gsLst>
+          <a:lin ang="16200000" scaled="0"/>
+        </a:gradFill>
+      </a:fillStyleLst>
+      <a:lnStyleLst>
+        <a:ln w="9525" cap="flat" cmpd="sng" algn="ctr">
+          <a:solidFill>
+            <a:schemeClr val="phClr">
+              <a:shade val="95000"/>
+              <a:satMod val="105000"/>
+            </a:schemeClr>
+          </a:solidFill>
+          <a:prstDash val="solid"/>
+        </a:ln>
+        <a:ln w="25400" cap="flat" cmpd="sng" algn="ctr">
+          <a:solidFill>
+            <a:schemeClr val="phClr"/>
+          </a:solidFill>
+          <a:prstDash val="solid"/>
+        </a:ln>
+        <a:ln w="38100" cap="flat" cmpd="sng" algn="ctr">
+          <a:solidFill>
+            <a:schemeClr val="phClr"/>
+          </a:solidFill>
+          <a:prstDash val="solid"/>
+        </a:ln>
+      </a:lnStyleLst>
+      <a:effectStyleLst>
+        <a:effectStyle>
+          <a:effectLst>
+            <a:outerShdw blurRad="40000" dist="20000" dir="5400000" rotWithShape="0">
+              <a:srgbClr val="000000">
+                <a:alpha val="38000"/>
+              </a:srgbClr>
+            </a:outerShdw>
+          </a:effectLst>
+        </a:effectStyle>
+        <a:effectStyle>
+          <a:effectLst>
+            <a:outerShdw blurRad="40000" dist="23000" dir="5400000" rotWithShape="0">
+              <a:srgbClr val="000000">
+                <a:alpha val="35000"/>
+              </a:srgbClr>
+            </a:outerShdw>
+          </a:effectLst>
+        </a:effectStyle>
+        <a:effectStyle>
+          <a:effectLst>
+            <a:outerShdw blurRad="40000" dist="23000" dir="5400000" rotWithShape="0">
+              <a:srgbClr val="000000">
+                <a:alpha val="35000"/>
+              </a:srgbClr>
+            </a:outerShdw>
+          </a:effectLst>
+          <a:scene3d>
+            <a:camera prst="orthographicFront">
+              <a:rot lat="0" lon="0" rev="0"/>
+            </a:camera>
+            <a:lightRig rig="threePt" dir="t">
+              <a:rot lat="0" lon="0" rev="1200000"/>
+            </a:lightRig>
+          </a:scene3d>
+          <a:sp3d>
+            <a:bevelT w="63500" h="25400"/>
+          </a:sp3d>
+        </a:effectStyle>
+      </a:effectStyleLst>
+      <a:bgFillStyleLst>
+        <a:solidFill>
+          <a:schemeClr val="phClr"/>
+        </a:solidFill>
+        <a:gradFill rotWithShape="1">
+          <a:gsLst>
+            <a:gs pos="0">
+              <a:schemeClr val="phClr">
+                <a:tint val="40000"/>
+                <a:satMod val="350000"/>
+              </a:schemeClr>
+            </a:gs>
+            <a:gs pos="40000">
+              <a:schemeClr val="phClr">
+                <a:tint val="45000"/>
+                <a:shade val="99000"/>
+                <a:satMod val="350000"/>
+              </a:schemeClr>
+            </a:gs>
+            <a:gs pos="100000">
+              <a:schemeClr val="phClr">
+                <a:shade val="20000"/>
+                <a:satMod val="255000"/>
+              </a:schemeClr>
+            </a:gs>
+          </a:gsLst>
+          <a:path path="circle">
+            <a:fillToRect l="50000" t="-80000" r="50000" b="180000"/>
+          </a:path>
+        </a:gradFill>
+        <a:gradFill rotWithShape="1">
+          <a:gsLst>
+            <a:gs pos="0">
+              <a:schemeClr val="phClr">
+                <a:tint val="80000"/>
+                <a:satMod val="300000"/>
+              </a:schemeClr>
+            </a:gs>
+            <a:gs pos="100000">
+              <a:schemeClr val="phClr">
+                <a:shade val="30000"/>
+                <a:satMod val="200000"/>
+              </a:schemeClr>
+            </a:gs>
+          </a:gsLst>
+          <a:path path="circle">
+            <a:fillToRect l="50000" t="50000" r="50000" b="50000"/>
+          </a:path>
+        </a:gradFill>
+      </a:bgFillStyleLst>
+    </a:fmtScheme>
+  </a:themeElements>
+  <a:objectDefaults>
+    <a:spDef>
+      <a:spPr/>
+      <a:bodyPr/>
+      <a:lstStyle/>
+      <a:style>
+        <a:lnRef idx="1">
+          <a:schemeClr val="accent1"/>
+        </a:lnRef>
+        <a:fillRef idx="3">
+          <a:schemeClr val="accent1"/>
+        </a:fillRef>
+        <a:effectRef idx="2">
+          <a:schemeClr val="accent1"/>
+        </a:effectRef>
+        <a:fontRef idx="minor">
+          <a:schemeClr val="lt1"/>
+        </a:fontRef>
+      </a:style>
+    </a:spDef>
+    <a:lnDef>
+      <a:spPr/>
+      <a:bodyPr/>
+      <a:lstStyle/>
+      <a:style>
+        <a:lnRef idx="2">
+          <a:schemeClr val="accent1"/>
+        </a:lnRef>
+        <a:fillRef idx="0">
+          <a:schemeClr val="accent1"/>
+        </a:fillRef>
+        <a:effectRef idx="1">
+          <a:schemeClr val="accent1"/>
+        </a:effectRef>
+        <a:fontRef idx="minor">
+          <a:schemeClr val="tx1"/>
+        </a:fontRef>
+      </a:style>
+    </a:lnDef>
+  </a:objectDefaults>
+  <a:extraClrSchemeLst/>
+</a:theme>
 </file>
--- a/presentation_rxneurones_lenet5.pptx
+++ b/presentation_rxneurones_lenet5.pptx
@@ -509,7 +509,7 @@
           <a:lstStyle/>
           <a:p>
             <a:r>
-              <a:t>Bonjour à tous. Je vous présente aujourd'hui LeNet-5, conçue en 1998 par Yann LeCun et son équipe. C'est une architecture strictement CONVOLUTIVE (CNN), pionnière du deep learning.</a:t>
+              <a:t>Bonjour à tous. Je m'appelle Bernard Feugang Noussi (matricule 6189470). Je vous présente aujourd'hui l'architecture LeNet-5, conçue en 1998 par Yann LeCun. C'est une architecture strictement CONVOLUTIVE (CNN).</a:t>
             </a:r>
           </a:p>
         </p:txBody>
@@ -4013,8 +4013,8 @@
         </p:nvSpPr>
         <p:spPr>
           <a:xfrm>
-            <a:off x="914400" y="822960"/>
-            <a:ext cx="10362895" cy="5212080"/>
+            <a:off x="914400" y="777240"/>
+            <a:ext cx="10362895" cy="5303520"/>
           </a:xfrm>
           <a:prstGeom prst="roundRect">
             <a:avLst/>
@@ -4058,8 +4058,8 @@
         </p:nvSpPr>
         <p:spPr>
           <a:xfrm>
-            <a:off x="1371600" y="1234440"/>
-            <a:ext cx="4389120" cy="384048"/>
+            <a:off x="1371600" y="1143000"/>
+            <a:ext cx="4754880" cy="384048"/>
           </a:xfrm>
           <a:prstGeom prst="roundRect">
             <a:avLst/>
@@ -4092,14 +4092,14 @@
           <a:lstStyle/>
           <a:p>
             <a:pPr algn="ctr">
-              <a:defRPr sz="1000" b="1">
+              <a:defRPr sz="1050" b="1">
                 <a:solidFill>
                   <a:srgbClr val="0969DA"/>
                 </a:solidFill>
               </a:defRPr>
             </a:pPr>
             <a:r>
-              <a:t>ARCHITECTURE ASSIGNÉE : RÉSEAU CONVOLUTIF (CNN)</a:t>
+              <a:t>ARCHITECTURE N°6 : RÉSEAU CONVOLUTIF (CNN)</a:t>
             </a:r>
           </a:p>
         </p:txBody>
@@ -4112,7 +4112,7 @@
         </p:nvSpPr>
         <p:spPr>
           <a:xfrm>
-            <a:off x="1371600" y="1737360"/>
+            <a:off x="1371600" y="1645920"/>
             <a:ext cx="9418320" cy="2011680"/>
           </a:xfrm>
           <a:prstGeom prst="rect">
@@ -4127,7 +4127,7 @@
           <a:lstStyle/>
           <a:p>
             <a:pPr>
-              <a:defRPr sz="3000" b="1">
+              <a:defRPr sz="2900" b="1">
                 <a:solidFill>
                   <a:srgbClr val="0F172A"/>
                 </a:solidFill>
@@ -4144,9 +4144,9 @@
           <a:p>
             <a:pPr>
               <a:spcBef>
-                <a:spcPts val="1000"/>
+                <a:spcPts val="800"/>
               </a:spcBef>
-              <a:defRPr sz="1500">
+              <a:defRPr sz="1400">
                 <a:solidFill>
                   <a:srgbClr val="475569"/>
                 </a:solidFill>
@@ -4166,8 +4166,8 @@
         </p:nvSpPr>
         <p:spPr>
           <a:xfrm>
-            <a:off x="1371600" y="4114800"/>
-            <a:ext cx="9418320" cy="1463040"/>
+            <a:off x="1371600" y="3931920"/>
+            <a:ext cx="9418320" cy="1828800"/>
           </a:xfrm>
           <a:prstGeom prst="roundRect">
             <a:avLst/>
@@ -4175,9 +4175,9 @@
           <a:solidFill>
             <a:srgbClr val="F8FAFC"/>
           </a:solidFill>
-          <a:ln>
+          <a:ln w="19050">
             <a:solidFill>
-              <a:srgbClr val="E2E8F0"/>
+              <a:srgbClr val="0969DA"/>
             </a:solidFill>
           </a:ln>
         </p:spPr>
@@ -4200,14 +4200,29 @@
           <a:lstStyle/>
           <a:p>
             <a:pPr algn="ctr">
-              <a:defRPr sz="1300" b="1">
+              <a:defRPr sz="1400" b="1">
+                <a:solidFill>
+                  <a:srgbClr val="0969DA"/>
+                </a:solidFill>
+              </a:defRPr>
+            </a:pPr>
+            <a:r>
+              <a:t>👨‍🎓 Étudiant : Feugang Noussi, Bernard        |        Matricule / N° Étudiant : 6189470</a:t>
+            </a:r>
+          </a:p>
+          <a:p>
+            <a:pPr>
+              <a:spcBef>
+                <a:spcPts val="400"/>
+              </a:spcBef>
+              <a:defRPr sz="1200" b="1">
                 <a:solidFill>
                   <a:srgbClr val="0F172A"/>
                 </a:solidFill>
               </a:defRPr>
             </a:pPr>
             <a:r>
-              <a:t>👨‍🎓 Étudiant : Bernard Feugang Noussi     |     📚 Cours : 420-A60-BB (Apprentissage Profond - Été 2026)</a:t>
+              <a:t>📚 Cours : 420-A60-BB — Algorithmes d'Apprentissage Profond (Session Été 2026)</a:t>
             </a:r>
           </a:p>
           <a:p>
@@ -4217,7 +4232,7 @@
               </a:spcBef>
               <a:defRPr sz="1100">
                 <a:solidFill>
-                  <a:srgbClr val="0969DA"/>
+                  <a:srgbClr val="475569"/>
                 </a:solidFill>
               </a:defRPr>
             </a:pPr>
@@ -4232,12 +4247,12 @@
               </a:spcBef>
               <a:defRPr sz="1100">
                 <a:solidFill>
-                  <a:srgbClr val="475569"/>
-                </a:solidFill>
-              </a:defRPr>
-            </a:pPr>
-            <a:r>
-              <a:t>⏱️ Format de présentation : 7 minutes (+ 3 minutes de questions)  |  Livrable HTML interactif inclus</a:t>
+                  <a:srgbClr val="16A34A"/>
+                </a:solidFill>
+              </a:defRPr>
+            </a:pPr>
+            <a:r>
+              <a:t>⏱️ Format officiel : 7 minutes (+ 3 minutes de questions)  |  Dossier Web interactif inclus</a:t>
             </a:r>
           </a:p>
         </p:txBody>
@@ -4398,14 +4413,14 @@
           <a:lstStyle/>
           <a:p>
             <a:pPr>
-              <a:defRPr sz="900">
+              <a:defRPr sz="950">
                 <a:solidFill>
                   <a:srgbClr val="475569"/>
                 </a:solidFill>
               </a:defRPr>
             </a:pPr>
             <a:r>
-              <a:t>LeNet-5 (1998) | Bernard Feugang Noussi | Slide 2/8  (0:45 - 1:45) | Réf: LeCun et al. (1998)</a:t>
+              <a:t>LeNet-5 (1998) | Feugang Noussi, Bernard (Matricule: 6189470) | Slide 2/8  (0:45 - 1:45) | Réf: LeCun et al. (1998)</a:t>
             </a:r>
           </a:p>
         </p:txBody>
@@ -4685,14 +4700,14 @@
           <a:lstStyle/>
           <a:p>
             <a:pPr>
-              <a:defRPr sz="900">
+              <a:defRPr sz="950">
                 <a:solidFill>
                   <a:srgbClr val="475569"/>
                 </a:solidFill>
               </a:defRPr>
             </a:pPr>
             <a:r>
-              <a:t>LeNet-5 (1998) | Bernard Feugang Noussi | Slide 3/8  (1:45 - 3:00) | Réf: LeCun et al. (1998)</a:t>
+              <a:t>LeNet-5 (1998) | Feugang Noussi, Bernard (Matricule: 6189470) | Slide 3/8  (1:45 - 3:00) | Réf: LeCun et al. (1998)</a:t>
             </a:r>
           </a:p>
         </p:txBody>
@@ -5433,14 +5448,14 @@
           <a:lstStyle/>
           <a:p>
             <a:pPr>
-              <a:defRPr sz="900">
+              <a:defRPr sz="950">
                 <a:solidFill>
                   <a:srgbClr val="475569"/>
                 </a:solidFill>
               </a:defRPr>
             </a:pPr>
             <a:r>
-              <a:t>LeNet-5 (1998) | Bernard Feugang Noussi | Slide 4/8  (3:00 - 4:00) | Réf: LeCun et al. (1998)</a:t>
+              <a:t>LeNet-5 (1998) | Feugang Noussi, Bernard (Matricule: 6189470) | Slide 4/8  (3:00 - 4:00) | Réf: LeCun et al. (1998)</a:t>
             </a:r>
           </a:p>
         </p:txBody>
@@ -5720,14 +5735,14 @@
           <a:lstStyle/>
           <a:p>
             <a:pPr>
-              <a:defRPr sz="900">
+              <a:defRPr sz="950">
                 <a:solidFill>
                   <a:srgbClr val="475569"/>
                 </a:solidFill>
               </a:defRPr>
             </a:pPr>
             <a:r>
-              <a:t>LeNet-5 (1998) | Bernard Feugang Noussi | Slide 5/8  (4:00 - 4:50) | Réf: LeCun et al. (1998)</a:t>
+              <a:t>LeNet-5 (1998) | Feugang Noussi, Bernard (Matricule: 6189470) | Slide 5/8  (4:00 - 4:50) | Réf: LeCun et al. (1998)</a:t>
             </a:r>
           </a:p>
         </p:txBody>
@@ -6007,14 +6022,14 @@
           <a:lstStyle/>
           <a:p>
             <a:pPr>
-              <a:defRPr sz="900">
+              <a:defRPr sz="950">
                 <a:solidFill>
                   <a:srgbClr val="475569"/>
                 </a:solidFill>
               </a:defRPr>
             </a:pPr>
             <a:r>
-              <a:t>LeNet-5 (1998) | Bernard Feugang Noussi | Slide 6/8  (4:50 - 5:40) | Réf: LeCun et al. (1998)</a:t>
+              <a:t>LeNet-5 (1998) | Feugang Noussi, Bernard (Matricule: 6189470) | Slide 6/8  (4:50 - 5:40) | Réf: LeCun et al. (1998)</a:t>
             </a:r>
           </a:p>
         </p:txBody>
@@ -6403,14 +6418,14 @@
           <a:lstStyle/>
           <a:p>
             <a:pPr>
-              <a:defRPr sz="900">
+              <a:defRPr sz="950">
                 <a:solidFill>
                   <a:srgbClr val="475569"/>
                 </a:solidFill>
               </a:defRPr>
             </a:pPr>
             <a:r>
-              <a:t>LeNet-5 (1998) | Bernard Feugang Noussi | Slide 7/8  (5:40 - 6:25) | Réf: LeCun et al. (1998)</a:t>
+              <a:t>LeNet-5 (1998) | Feugang Noussi, Bernard (Matricule: 6189470) | Slide 7/8  (5:40 - 6:25) | Réf: LeCun et al. (1998)</a:t>
             </a:r>
           </a:p>
         </p:txBody>
@@ -6571,7 +6586,7 @@
               </a:defRPr>
             </a:pPr>
             <a:r>
-              <a:t>Comprend 3 animations interactives pas à pas (Convolution, Neurone, Descente d'erreur) et un quiz de 10 questions d'auto-évaluation.</a:t>
+              <a:t>Auteur : Feugang Noussi, Bernard (6189470) — Comprend 3 animations interactives et un quiz de 10 questions.</a:t>
             </a:r>
           </a:p>
         </p:txBody>
@@ -6732,14 +6747,14 @@
           <a:lstStyle/>
           <a:p>
             <a:pPr>
-              <a:defRPr sz="900">
+              <a:defRPr sz="950">
                 <a:solidFill>
                   <a:srgbClr val="475569"/>
                 </a:solidFill>
               </a:defRPr>
             </a:pPr>
             <a:r>
-              <a:t>LeNet-5 (1998) | Bernard Feugang Noussi | Slide 8/8  (6:25 - 7:00) | Réf: LeCun et al. (1998)</a:t>
+              <a:t>LeNet-5 (1998) | Feugang Noussi, Bernard (Matricule: 6189470) | Slide 8/8  (6:25 - 7:00) | Réf: LeCun et al. (1998)</a:t>
             </a:r>
           </a:p>
         </p:txBody>
@@ -6827,14 +6842,14 @@
               <a:spcBef>
                 <a:spcPts val="1600"/>
               </a:spcBef>
-              <a:defRPr sz="1800" b="1">
+              <a:defRPr sz="1700" b="1">
                 <a:solidFill>
                   <a:srgbClr val="0969DA"/>
                 </a:solidFill>
               </a:defRPr>
             </a:pPr>
             <a:r>
-              <a:t>💬 Merci pour votre attention. Place aux questions !</a:t>
+              <a:t>💬 Merci pour votre attention ! (Feugang Noussi Bernard — 6189470)</a:t>
             </a:r>
           </a:p>
         </p:txBody>

--- a/presentation_rxneurones_lenet5.pptx
+++ b/presentation_rxneurones_lenet5.pptx
@@ -509,7 +509,7 @@
           <a:lstStyle/>
           <a:p>
             <a:r>
-              <a:t>Bonjour à tous. Je m'appelle Bernard Feugang Noussi (matricule 6189470). Je vous présente aujourd'hui l'architecture LeNet-5, conçue en 1998 par Yann LeCun. C'est une architecture strictement CONVOLUTIVE (CNN).</a:t>
+              <a:t>Bonjour à tous. Je m'appelle Bernard Feugang Noussi (matricule 6189470). Je vous présente l'architecture LeNet-5 (1998), pionnière des réseaux convolutifs (CNN).</a:t>
             </a:r>
           </a:p>
         </p:txBody>
@@ -579,7 +579,7 @@
           <a:lstStyle/>
           <a:p>
             <a:r>
-              <a:t>Avant LeNet-5, les réseaux fully-connected détruisaient la 2D et explosaient en nombre de poids. LeNet-5 résout ce problème fondamental par la convolution locale.</a:t>
+              <a:t>Regardez l'animation à droite : le filtre 3x3 glisse pixel par pixel sur le chiffre 7 pour remplir en direct la carte de caractéristiques.</a:t>
             </a:r>
           </a:p>
         </p:txBody>
@@ -649,7 +649,7 @@
           <a:lstStyle/>
           <a:p>
             <a:r>
-              <a:t>Voici le pipeline historique en 7 couches : 2 blocs Convolution-Subsampling (C1-S2 puis C3-S4) qui réduisent la taille tout en enrichissant les filtres, suivis de couches denses de classification (C5, F6, Sortie).</a:t>
+              <a:t>L'animation illustre la propagation du signal à travers les 7 couches de LeNet-5 : des deux blocs Convolution-Subsampling (C1-S2, C3-S4) jusqu'aux couches de classification denses.</a:t>
             </a:r>
           </a:p>
         </p:txBody>
@@ -719,7 +719,7 @@
           <a:lstStyle/>
           <a:p>
             <a:r>
-              <a:t>Dans l'article de 1998, LeCun rapporte un taux d'erreur de 0,8% sur MNIST avec 60 000 paramètres, surpassant tous les SVM et arbres de l'époque.</a:t>
+              <a:t>Le graphique animé à droite montre comment le neurone active sa sortie dès que la somme pondérée dépasse le seuil requis de 2.0.</a:t>
             </a:r>
           </a:p>
         </p:txBody>
@@ -859,7 +859,7 @@
           <a:lstStyle/>
           <a:p>
             <a:r>
-              <a:t>En résumé des forces et faiblesses : une robustesse et compacité exceptionnelles, mais limité aux petites images 32x32 et freiné par les sigmoïdes et la puissance de calcul de 1998.</a:t>
+              <a:t>Le Max-Pooling animé à droite montre comment la compression 2x2 retient la valeur 88 pour assurer l'invariance aux déformations.</a:t>
             </a:r>
           </a:p>
         </p:txBody>
@@ -929,7 +929,7 @@
           <a:lstStyle/>
           <a:p>
             <a:r>
-              <a:t>LeNet-5 est l'ancêtre direct d'AlexNet et de tous les modèles de vision modernes. Sans lui, la vision par ordinateur n'aurait pas connu cette explosion.</a:t>
+              <a:t>LeNet-5 est l'ancêtre direct d'AlexNet et de tous les modèles de vision modernes. Des outils de démonstration interactifs (Colab &amp; Web) accompagnent ce travail.</a:t>
             </a:r>
           </a:p>
         </p:txBody>
@@ -4153,7 +4153,7 @@
               </a:defRPr>
             </a:pPr>
             <a:r>
-              <a:t>Analyse complète, fonctionnement interne, déploiement industriel et impact historique.</a:t>
+              <a:t>Analyse complète, fonctionnement interne, animations Remotion et impact historique.</a:t>
             </a:r>
           </a:p>
         </p:txBody>
@@ -4252,7 +4252,7 @@
               </a:defRPr>
             </a:pPr>
             <a:r>
-              <a:t>⏱️ Format officiel : 7 minutes (+ 3 minutes de questions)  |  Dossier Web interactif inclus</a:t>
+              <a:t>⏱️ Format officiel : 7 minutes (+ 3 minutes de questions)  |  Animations Motion Design intégrées</a:t>
             </a:r>
           </a:p>
         </p:txBody>
@@ -4340,7 +4340,7 @@
               </a:defRPr>
             </a:pPr>
             <a:r>
-              <a:t>1. Le Problème : Qu'est-ce qui n'allait pas avant LeNet-5 ?</a:t>
+              <a:t>1. Le Problème &amp; La Solution : La Convolution Glissante</a:t>
             </a:r>
           </a:p>
         </p:txBody>
@@ -4434,7 +4434,7 @@
         <p:spPr>
           <a:xfrm>
             <a:off x="731520" y="1554480"/>
-            <a:ext cx="5486400" cy="4480560"/>
+            <a:ext cx="5120640" cy="4480560"/>
           </a:xfrm>
           <a:prstGeom prst="rect">
             <a:avLst/>
@@ -4455,7 +4455,7 @@
               </a:defRPr>
             </a:pPr>
             <a:r>
-              <a:t>Les 3 Impasses des Réseaux Classiques (MLP) :</a:t>
+              <a:t>Pourquoi les réseaux denses (MLP) échouaient :</a:t>
             </a:r>
           </a:p>
           <a:p>
@@ -4470,7 +4470,7 @@
               </a:defRPr>
             </a:pPr>
             <a:r>
-              <a:t>• 1. Perte de la topologie 2D : Les réseaux denses forçaient l'aplatissement de l'image en 1D, détruisant la proximité spatiale entre pixels voisins.</a:t>
+              <a:t>• 1. Perte de la topologie 2D : Aplatir l'image en vecteur 1D détruisait la proximité spatiale entre pixels voisins.</a:t>
             </a:r>
           </a:p>
           <a:p>
@@ -4485,7 +4485,7 @@
               </a:defRPr>
             </a:pPr>
             <a:r>
-              <a:t>• 2. Explosion des paramètres : Connecter chaque pixel à chaque neurone exigeait des millions de poids, rendant l'entraînement impossible avec le matériel de 1998.</a:t>
+              <a:t>• 2. Explosion des paramètres : Des millions de poids nécessaires, rendant le calcul irréalisable en 1998.</a:t>
             </a:r>
           </a:p>
           <a:p>
@@ -4500,7 +4500,7 @@
               </a:defRPr>
             </a:pPr>
             <a:r>
-              <a:t>• 3. Aucune invariance spatiale : Si le chiffre « 7 » était décalé de 2 pixels ou incliné, le réseau échouait totalement à le reconnaître.</a:t>
+              <a:t>• 3. Aucune invariance spatiale : Un simple décalage de 2 pixels du chiffre « 7 » provoquait une erreur totale.</a:t>
             </a:r>
           </a:p>
           <a:p>
@@ -4515,14 +4515,14 @@
               </a:defRPr>
             </a:pPr>
             <a:r>
-              <a:t>• La rupture LeNet-5 : Imposer le partage des poids et des champs récepteurs locaux (convolution) pour extraire des motifs partout sur l'image.</a:t>
+              <a:t>• La Révolution Convolution (Animée) : Un filtre glissant extrait les motifs locaux partout sur l'image avec un partage des poids optimal.</a:t>
             </a:r>
           </a:p>
         </p:txBody>
       </p:sp>
       <p:pic>
         <p:nvPicPr>
-          <p:cNvPr id="7" name="Picture 6" descr="fig03_image_pixels.svg.png"/>
+          <p:cNvPr id="7" name="Picture 6" descr="01_convolution.gif"/>
           <p:cNvPicPr>
             <a:picLocks noChangeAspect="1"/>
           </p:cNvPicPr>
@@ -4536,8 +4536,8 @@
         </p:blipFill>
         <p:spPr>
           <a:xfrm>
-            <a:off x="6492240" y="1554480"/>
-            <a:ext cx="4937760" cy="4937760"/>
+            <a:off x="6126480" y="1645920"/>
+            <a:ext cx="5303520" cy="2981757"/>
           </a:xfrm>
           <a:prstGeom prst="rect">
             <a:avLst/>
@@ -4627,7 +4627,7 @@
               </a:defRPr>
             </a:pPr>
             <a:r>
-              <a:t>2. Fonctionnement Interne : L'Architecture LeNet-5</a:t>
+              <a:t>2. Fonctionnement Interne : Le Pipeline LeNet-5 en Mouvement</a:t>
             </a:r>
           </a:p>
         </p:txBody>
@@ -4714,7 +4714,7 @@
       </p:sp>
       <p:pic>
         <p:nvPicPr>
-          <p:cNvPr id="6" name="Picture 5" descr="fig06_lenet5_pipeline.svg.png"/>
+          <p:cNvPr id="6" name="Picture 5" descr="04_lenet5_pipeline.gif"/>
           <p:cNvPicPr>
             <a:picLocks noChangeAspect="1"/>
           </p:cNvPicPr>
@@ -4729,7 +4729,7 @@
         <p:spPr>
           <a:xfrm>
             <a:off x="914400" y="1463040"/>
-            <a:ext cx="10362895" cy="10362895"/>
+            <a:ext cx="10362895" cy="5826250"/>
           </a:xfrm>
           <a:prstGeom prst="rect">
             <a:avLst/>
@@ -5375,7 +5375,7 @@
               </a:defRPr>
             </a:pPr>
             <a:r>
-              <a:t>3. Données Chiffrées de l'Article d'Origine (LeCun 1998)</a:t>
+              <a:t>3. Données Chiffrées &amp; Activation (LeCun 1998)</a:t>
             </a:r>
           </a:p>
         </p:txBody>
@@ -5469,7 +5469,7 @@
         <p:spPr>
           <a:xfrm>
             <a:off x="731520" y="1554480"/>
-            <a:ext cx="5486400" cy="4480560"/>
+            <a:ext cx="5120640" cy="4480560"/>
           </a:xfrm>
           <a:prstGeom prst="rect">
             <a:avLst/>
@@ -5490,7 +5490,7 @@
               </a:defRPr>
             </a:pPr>
             <a:r>
-              <a:t>Résultats Mesurés sur la Base MNIST :</a:t>
+              <a:t>Résultats Mesurés sur MNIST (70 000 images) :</a:t>
             </a:r>
           </a:p>
           <a:p>
@@ -5505,7 +5505,7 @@
               </a:defRPr>
             </a:pPr>
             <a:r>
-              <a:t>• Jeu de Données MNIST : Base de référence de 70 000 chiffres manuscrits (60 000 entraînement, 10 000 test) [Section VII].</a:t>
+              <a:t>• Taux d'erreur record : 0,8 % : Sur les 10 000 images de test, l'erreur chute à 0,95% (sans distorsion) et 0,8% (avec distorsions) [Table 2].</a:t>
             </a:r>
           </a:p>
           <a:p>
@@ -5520,7 +5520,7 @@
               </a:defRPr>
             </a:pPr>
             <a:r>
-              <a:t>• Taux d'erreur record (0,8 %) : Erreur test stabilisée à 0,95 % sans distorsions, et 0,8 % avec distorsions d'entraînement [Table 2].</a:t>
+              <a:t>• Nombre de paramètres : ~60 000 : Exactement 60 000 paramètres libres entraînables pour 340 915 connexions [Table 1].</a:t>
             </a:r>
           </a:p>
           <a:p>
@@ -5535,7 +5535,7 @@
               </a:defRPr>
             </a:pPr>
             <a:r>
-              <a:t>• Nombre de paramètres : ~60 000 : Exactement 60 000 paramètres libres entraînables et 340 915 connexions [Section II-B, Table 1].</a:t>
+              <a:t>• Mécanisme d'Activation (Animé) : Chaque neurone calcule la somme pondérée ∑(x·w) et émet une impulsion d'activation dès que le seuil est franchi.</a:t>
             </a:r>
           </a:p>
           <a:p>
@@ -5550,14 +5550,14 @@
               </a:defRPr>
             </a:pPr>
             <a:r>
-              <a:t>• Temps de calcul &amp; Puces DSP : Moins de 10 ms par chiffre sur microprocesseur DSP dédié, permettant le traitement en temps réel.</a:t>
+              <a:t>• Temps de calcul : &lt; 10 ms par chiffre sur puce DSP, permettant le temps réel en production.</a:t>
             </a:r>
           </a:p>
         </p:txBody>
       </p:sp>
       <p:pic>
         <p:nvPicPr>
-          <p:cNvPr id="7" name="Picture 6" descr="fig07_apprentissage.svg.png"/>
+          <p:cNvPr id="7" name="Picture 6" descr="02_neurone.gif"/>
           <p:cNvPicPr>
             <a:picLocks noChangeAspect="1"/>
           </p:cNvPicPr>
@@ -5571,8 +5571,8 @@
         </p:blipFill>
         <p:spPr>
           <a:xfrm>
-            <a:off x="6492240" y="1554480"/>
-            <a:ext cx="4937760" cy="4937760"/>
+            <a:off x="6126480" y="1645920"/>
+            <a:ext cx="5303520" cy="2981757"/>
           </a:xfrm>
           <a:prstGeom prst="rect">
             <a:avLst/>
@@ -5949,7 +5949,7 @@
               </a:defRPr>
             </a:pPr>
             <a:r>
-              <a:t>5. Analyse Critique : Avantages et Inconvénients</a:t>
+              <a:t>5. Analyse Critique : Avantages &amp; Inconvénients</a:t>
             </a:r>
           </a:p>
         </p:txBody>
@@ -6043,7 +6043,7 @@
         <p:spPr>
           <a:xfrm>
             <a:off x="731520" y="1554480"/>
-            <a:ext cx="5212080" cy="4480560"/>
+            <a:ext cx="5120640" cy="4480560"/>
           </a:xfrm>
           <a:prstGeom prst="roundRect">
             <a:avLst/>
@@ -6076,7 +6076,7 @@
           <a:lstStyle/>
           <a:p>
             <a:pPr algn="ctr">
-              <a:defRPr sz="1600" b="1">
+              <a:defRPr sz="1500" b="1">
                 <a:solidFill>
                   <a:srgbClr val="16A34A"/>
                 </a:solidFill>
@@ -6089,179 +6089,89 @@
           <a:p>
             <a:pPr>
               <a:spcBef>
-                <a:spcPts val="600"/>
+                <a:spcPts val="400"/>
               </a:spcBef>
-              <a:defRPr sz="1150">
+              <a:defRPr sz="1100">
                 <a:solidFill>
                   <a:srgbClr val="475569"/>
                 </a:solidFill>
               </a:defRPr>
             </a:pPr>
             <a:r>
-              <a:t>✔ Invariance spatiale : Reconnaît les motifs même déformés ou translatés grâce à l'association Convolution + Pooling.</a:t>
+              <a:t>✔ Invariance spatiale : Reconnaît les formes même translatées grâce au Pooling animé ci-contre.</a:t>
             </a:r>
           </a:p>
           <a:p>
             <a:pPr>
               <a:spcBef>
-                <a:spcPts val="600"/>
+                <a:spcPts val="400"/>
               </a:spcBef>
-              <a:defRPr sz="1150">
+              <a:defRPr sz="1100">
                 <a:solidFill>
                   <a:srgbClr val="475569"/>
                 </a:solidFill>
               </a:defRPr>
             </a:pPr>
             <a:r>
-              <a:t>✔ Forte compacité : Seulement 60 000 poids grâce au partage des filtres (contre des millions pour un réseau dense).</a:t>
+              <a:t>✔ Forte compacité : Seulement 60 000 poids grâce au partage des filtres.</a:t>
             </a:r>
           </a:p>
           <a:p>
             <a:pPr>
               <a:spcBef>
-                <a:spcPts val="600"/>
+                <a:spcPts val="400"/>
               </a:spcBef>
-              <a:defRPr sz="1150">
+              <a:defRPr sz="1100">
                 <a:solidFill>
                   <a:srgbClr val="475569"/>
                 </a:solidFill>
               </a:defRPr>
             </a:pPr>
             <a:r>
-              <a:t>✔ Apprentissage de bout en bout : Extraction de caractéristiques et classification entraînées conjointement par rétropropagation.</a:t>
+              <a:t>✔ Apprentissage bout-en-bout : Filtres et décision entraînés ensemble par rétropropagation.</a:t>
             </a:r>
           </a:p>
           <a:p>
             <a:pPr>
               <a:spcBef>
-                <a:spcPts val="600"/>
+                <a:spcPts val="400"/>
               </a:spcBef>
-              <a:defRPr sz="1150">
+              <a:defRPr sz="1100">
                 <a:solidFill>
                   <a:srgbClr val="475569"/>
                 </a:solidFill>
               </a:defRPr>
             </a:pPr>
             <a:r>
-              <a:t>✔ Haute fiabilité opérationnelle : Taux d'erreur &lt; 1 % en conditions industrielles réelles.</a:t>
-            </a:r>
-          </a:p>
-        </p:txBody>
-      </p:sp>
-      <p:sp>
-        <p:nvSpPr>
-          <p:cNvPr id="7" name="Rounded Rectangle 6"/>
-          <p:cNvSpPr/>
+              <a:t>✔ Fiabilité industrielle : Taux d'erreur &lt; 1 % en conditions opérationnelles réelles.</a:t>
+            </a:r>
+          </a:p>
+        </p:txBody>
+      </p:sp>
+      <p:pic>
+        <p:nvPicPr>
+          <p:cNvPr id="7" name="Picture 6" descr="03_pooling.gif"/>
+          <p:cNvPicPr>
+            <a:picLocks noChangeAspect="1"/>
+          </p:cNvPicPr>
           <p:nvPr/>
-        </p:nvSpPr>
-        <p:spPr>
-          <a:xfrm>
-            <a:off x="6217920" y="1554480"/>
-            <a:ext cx="5212080" cy="4480560"/>
-          </a:xfrm>
-          <a:prstGeom prst="roundRect">
+        </p:nvPicPr>
+        <p:blipFill>
+          <a:blip r:embed="rId2"/>
+          <a:stretch>
+            <a:fillRect/>
+          </a:stretch>
+        </p:blipFill>
+        <p:spPr>
+          <a:xfrm>
+            <a:off x="6126480" y="1554480"/>
+            <a:ext cx="5303520" cy="2981757"/>
+          </a:xfrm>
+          <a:prstGeom prst="rect">
             <a:avLst/>
           </a:prstGeom>
-          <a:solidFill>
-            <a:srgbClr val="FFFFFF"/>
-          </a:solidFill>
-          <a:ln w="25400">
-            <a:solidFill>
-              <a:srgbClr val="DC2626"/>
-            </a:solidFill>
-          </a:ln>
-        </p:spPr>
-        <p:style>
-          <a:lnRef idx="1">
-            <a:schemeClr val="accent1"/>
-          </a:lnRef>
-          <a:fillRef idx="3">
-            <a:schemeClr val="accent1"/>
-          </a:fillRef>
-          <a:effectRef idx="2">
-            <a:schemeClr val="accent1"/>
-          </a:effectRef>
-          <a:fontRef idx="minor">
-            <a:schemeClr val="lt1"/>
-          </a:fontRef>
-        </p:style>
-        <p:txBody>
-          <a:bodyPr rtlCol="0" anchor="ctr" wrap="square"/>
-          <a:lstStyle/>
-          <a:p>
-            <a:pPr algn="ctr">
-              <a:defRPr sz="1600" b="1">
-                <a:solidFill>
-                  <a:srgbClr val="DC2626"/>
-                </a:solidFill>
-              </a:defRPr>
-            </a:pPr>
-            <a:r>
-              <a:t>❌ LIMITES &amp; INCONVÉNIENTS</a:t>
-            </a:r>
-          </a:p>
-          <a:p>
-            <a:pPr>
-              <a:spcBef>
-                <a:spcPts val="600"/>
-              </a:spcBef>
-              <a:defRPr sz="1150">
-                <a:solidFill>
-                  <a:srgbClr val="475569"/>
-                </a:solidFill>
-              </a:defRPr>
-            </a:pPr>
-            <a:r>
-              <a:t>✖ Limité aux petites images : Conçu pour des images monochromes de 32×32 pixels (insuffisant pour la photo couleur haute résolution).</a:t>
-            </a:r>
-          </a:p>
-          <a:p>
-            <a:pPr>
-              <a:spcBef>
-                <a:spcPts val="600"/>
-              </a:spcBef>
-              <a:defRPr sz="1150">
-                <a:solidFill>
-                  <a:srgbClr val="475569"/>
-                </a:solidFill>
-              </a:defRPr>
-            </a:pPr>
-            <a:r>
-              <a:t>✖ Fonctions d'activation saturantes : Utilisation de sigmoïdes / tanh provoquant l'évanouissement du gradient sur des réseaux plus profonds.</a:t>
-            </a:r>
-          </a:p>
-          <a:p>
-            <a:pPr>
-              <a:spcBef>
-                <a:spcPts val="600"/>
-              </a:spcBef>
-              <a:defRPr sz="1150">
-                <a:solidFill>
-                  <a:srgbClr val="475569"/>
-                </a:solidFill>
-              </a:defRPr>
-            </a:pPr>
-            <a:r>
-              <a:t>✖ Coût computationnel pour 1998 : Exigeait des processeurs DSP spécialisés (les GPU modernes n'existaient pas encore pour l'IA).</a:t>
-            </a:r>
-          </a:p>
-          <a:p>
-            <a:pPr>
-              <a:spcBef>
-                <a:spcPts val="600"/>
-              </a:spcBef>
-              <a:defRPr sz="1150">
-                <a:solidFill>
-                  <a:srgbClr val="475569"/>
-                </a:solidFill>
-              </a:defRPr>
-            </a:pPr>
-            <a:r>
-              <a:t>✖ Sous-échantillonnage moyenné : Le pooling moyenné (S2, S4) est moins efficace que le Max-Pooling moderne.</a:t>
-            </a:r>
-          </a:p>
-        </p:txBody>
-      </p:sp>
+        </p:spPr>
+      </p:pic>
     </p:spTree>
   </p:cSld>
   <p:clrMapOvr>
@@ -6345,7 +6255,7 @@
               </a:defRPr>
             </a:pPr>
             <a:r>
-              <a:t>6. Contribution à l'Évolution des Réseaux de Neurones</a:t>
+              <a:t>6. Contribution à l'Évolution de l'IA Moderne</a:t>
             </a:r>
           </a:p>
         </p:txBody>
@@ -6466,7 +6376,7 @@
           <a:p>
             <a:pPr>
               <a:spcAft>
-                <a:spcPts val="1000"/>
+                <a:spcPts val="800"/>
               </a:spcAft>
               <a:defRPr sz="1250">
                 <a:solidFill>
@@ -6475,13 +6385,13 @@
               </a:defRPr>
             </a:pPr>
             <a:r>
-              <a:t>🚀 Fondation du paradigme CNN : LeNet-5 a formalisé le triplet fondamental moderne : Convolution ➔ Non-linéarité ➔ Sous-échantillonnage (Pooling).</a:t>
+              <a:t>🚀 Fondation du paradigme CNN : LeNet-5 a formalisé le triplet moderne : Convolution ➔ Activation non linéaire ➔ Sous-échantillonnage (Pooling).</a:t>
             </a:r>
           </a:p>
           <a:p>
             <a:pPr>
               <a:spcAft>
-                <a:spcPts val="1000"/>
+                <a:spcPts val="800"/>
               </a:spcAft>
               <a:defRPr sz="1250">
                 <a:solidFill>
@@ -6490,13 +6400,13 @@
               </a:defRPr>
             </a:pPr>
             <a:r>
-              <a:t>🚀 Fil conducteur direct vers AlexNet (2012) : AlexNet (vainqueur d'ImageNet 2012) est une extension directe de LeNet-5, transposée sur GPU avec ReLU et Dropout.</a:t>
+              <a:t>🚀 Filiation directe vers AlexNet (2012) : AlexNet (vainqueur d'ImageNet 2012) est une extension directe de LeNet-5 adaptée sur GPU avec ReLU et Dropout.</a:t>
             </a:r>
           </a:p>
           <a:p>
             <a:pPr>
               <a:spcAft>
-                <a:spcPts val="1000"/>
+                <a:spcPts val="800"/>
               </a:spcAft>
               <a:defRPr sz="1250">
                 <a:solidFill>
@@ -6511,7 +6421,7 @@
           <a:p>
             <a:pPr>
               <a:spcAft>
-                <a:spcPts val="1000"/>
+                <a:spcPts val="800"/>
               </a:spcAft>
               <a:defRPr sz="1250">
                 <a:solidFill>
@@ -6574,19 +6484,23 @@
               </a:defRPr>
             </a:pPr>
             <a:r>
-              <a:t>🌐 BONUS INTERACTIF FOURNI : Dossier Web HTML autonome (dossier_rxneurones_lenet5.html)</a:t>
+              <a:t>🌐 OUTILS DE DÉMONSTRATION COMPLETS FOURNIS (Feugang Noussi, Bernard - 6189470) :</a:t>
             </a:r>
           </a:p>
           <a:p>
             <a:pPr>
-              <a:defRPr sz="1050">
+              <a:defRPr sz="1000">
                 <a:solidFill>
                   <a:srgbClr val="0F172A"/>
                 </a:solidFill>
               </a:defRPr>
             </a:pPr>
             <a:r>
-              <a:t>Auteur : Feugang Noussi, Bernard (6189470) — Comprend 3 animations interactives et un quiz de 10 questions.</a:t>
+              <a:t>• Notebook Google Colab (demonstration_lenet5_colab.ipynb) avec entraînement en direct sur GPU et matrice de confusion.</a:t>
+            </a:r>
+            <a:br/>
+            <a:r>
+              <a:t>• Page Web interactive (dossier_rxneurones_lenet5.html) avec animations Remotion intégrées et quiz 10 questions.</a:t>
             </a:r>
           </a:p>
         </p:txBody>

--- a/presentation_rxneurones_lenet5.pptx
+++ b/presentation_rxneurones_lenet5.pptx
@@ -649,7 +649,7 @@
           <a:lstStyle/>
           <a:p>
             <a:r>
-              <a:t>L'animation illustre la propagation du signal à travers les 7 couches de LeNet-5 : des deux blocs Convolution-Subsampling (C1-S2, C3-S4) jusqu'aux couches de classification denses.</a:t>
+              <a:t>L'animation en haut montre la propagation du signal dans les 7 couches de LeNet-5, résumées en bas : des deux blocs Convolution-Subsampling (C1-S2, C3-S4) jusqu'aux couches denses.</a:t>
             </a:r>
           </a:p>
         </p:txBody>
@@ -4013,8 +4013,8 @@
         </p:nvSpPr>
         <p:spPr>
           <a:xfrm>
-            <a:off x="914400" y="777240"/>
-            <a:ext cx="10362895" cy="5303520"/>
+            <a:off x="731520" y="731520"/>
+            <a:ext cx="10728655" cy="5394960"/>
           </a:xfrm>
           <a:prstGeom prst="roundRect">
             <a:avLst/>
@@ -4058,8 +4058,8 @@
         </p:nvSpPr>
         <p:spPr>
           <a:xfrm>
-            <a:off x="1371600" y="1143000"/>
-            <a:ext cx="4754880" cy="384048"/>
+            <a:off x="1371600" y="1188720"/>
+            <a:ext cx="4937760" cy="384048"/>
           </a:xfrm>
           <a:prstGeom prst="roundRect">
             <a:avLst/>
@@ -4112,7 +4112,7 @@
         </p:nvSpPr>
         <p:spPr>
           <a:xfrm>
-            <a:off x="1371600" y="1645920"/>
+            <a:off x="1371600" y="1691640"/>
             <a:ext cx="9418320" cy="2011680"/>
           </a:xfrm>
           <a:prstGeom prst="rect">
@@ -4166,7 +4166,7 @@
         </p:nvSpPr>
         <p:spPr>
           <a:xfrm>
-            <a:off x="1371600" y="3931920"/>
+            <a:off x="1371600" y="3977639"/>
             <a:ext cx="9418320" cy="1828800"/>
           </a:xfrm>
           <a:prstGeom prst="roundRect">
@@ -4319,7 +4319,7 @@
         <p:spPr>
           <a:xfrm>
             <a:off x="731520" y="594360"/>
-            <a:ext cx="10698480" cy="731520"/>
+            <a:ext cx="10698480" cy="685800"/>
           </a:xfrm>
           <a:prstGeom prst="rect">
             <a:avLst/>
@@ -4333,7 +4333,7 @@
           <a:lstStyle/>
           <a:p>
             <a:pPr>
-              <a:defRPr sz="2300" b="1">
+              <a:defRPr sz="2200" b="1">
                 <a:solidFill>
                   <a:srgbClr val="0F172A"/>
                 </a:solidFill>
@@ -4353,8 +4353,8 @@
         </p:nvSpPr>
         <p:spPr>
           <a:xfrm>
-            <a:off x="731520" y="1353312"/>
-            <a:ext cx="10725912" cy="32004"/>
+            <a:off x="731520" y="1298448"/>
+            <a:ext cx="10725912" cy="27432"/>
           </a:xfrm>
           <a:prstGeom prst="rect">
             <a:avLst/>
@@ -4398,8 +4398,8 @@
         </p:nvSpPr>
         <p:spPr>
           <a:xfrm>
-            <a:off x="731520" y="6309360"/>
-            <a:ext cx="10698480" cy="320040"/>
+            <a:off x="731520" y="6327648"/>
+            <a:ext cx="10725912" cy="320040"/>
           </a:xfrm>
           <a:prstGeom prst="rect">
             <a:avLst/>
@@ -4413,7 +4413,7 @@
           <a:lstStyle/>
           <a:p>
             <a:pPr>
-              <a:defRPr sz="950">
+              <a:defRPr sz="900">
                 <a:solidFill>
                   <a:srgbClr val="475569"/>
                 </a:solidFill>
@@ -4427,28 +4427,50 @@
       </p:sp>
       <p:sp>
         <p:nvSpPr>
-          <p:cNvPr id="6" name="TextBox 5"/>
-          <p:cNvSpPr txBox="1"/>
+          <p:cNvPr id="6" name="Rounded Rectangle 5"/>
+          <p:cNvSpPr/>
           <p:nvPr/>
         </p:nvSpPr>
         <p:spPr>
           <a:xfrm>
-            <a:off x="731520" y="1554480"/>
-            <a:ext cx="5120640" cy="4480560"/>
-          </a:xfrm>
-          <a:prstGeom prst="rect">
+            <a:off x="731520" y="1463040"/>
+            <a:ext cx="5212080" cy="4663440"/>
+          </a:xfrm>
+          <a:prstGeom prst="roundRect">
             <a:avLst/>
           </a:prstGeom>
-          <a:noFill/>
-        </p:spPr>
-        <p:txBody>
-          <a:bodyPr wrap="square">
-            <a:spAutoFit/>
-          </a:bodyPr>
-          <a:lstStyle/>
-          <a:p>
-            <a:pPr>
-              <a:defRPr sz="1500" b="1">
+          <a:solidFill>
+            <a:srgbClr val="FFFFFF"/>
+          </a:solidFill>
+          <a:ln w="12700">
+            <a:solidFill>
+              <a:srgbClr val="E2E8F0"/>
+            </a:solidFill>
+          </a:ln>
+        </p:spPr>
+        <p:style>
+          <a:lnRef idx="1">
+            <a:schemeClr val="accent1"/>
+          </a:lnRef>
+          <a:fillRef idx="3">
+            <a:schemeClr val="accent1"/>
+          </a:fillRef>
+          <a:effectRef idx="2">
+            <a:schemeClr val="accent1"/>
+          </a:effectRef>
+          <a:fontRef idx="minor">
+            <a:schemeClr val="lt1"/>
+          </a:fontRef>
+        </p:style>
+        <p:txBody>
+          <a:bodyPr rtlCol="0" anchor="ctr" wrap="square"/>
+          <a:lstStyle/>
+          <a:p>
+            <a:pPr algn="ctr">
+              <a:spcAft>
+                <a:spcPts val="800"/>
+              </a:spcAft>
+              <a:defRPr sz="1400" b="1">
                 <a:solidFill>
                   <a:srgbClr val="0F172A"/>
                 </a:solidFill>
@@ -4463,14 +4485,14 @@
               <a:spcAft>
                 <a:spcPts val="800"/>
               </a:spcAft>
-              <a:defRPr sz="1200">
+              <a:defRPr sz="1150">
                 <a:solidFill>
                   <a:srgbClr val="475569"/>
                 </a:solidFill>
               </a:defRPr>
             </a:pPr>
             <a:r>
-              <a:t>• 1. Perte de la topologie 2D : Aplatir l'image en vecteur 1D détruisait la proximité spatiale entre pixels voisins.</a:t>
+              <a:t>• 1. Perte de la topologie 2D : Aplatir l'image en 1D détruisait la proximité entre pixels voisins.</a:t>
             </a:r>
           </a:p>
           <a:p>
@@ -4478,14 +4500,14 @@
               <a:spcAft>
                 <a:spcPts val="800"/>
               </a:spcAft>
-              <a:defRPr sz="1200">
+              <a:defRPr sz="1150">
                 <a:solidFill>
                   <a:srgbClr val="475569"/>
                 </a:solidFill>
               </a:defRPr>
             </a:pPr>
             <a:r>
-              <a:t>• 2. Explosion des paramètres : Des millions de poids nécessaires, rendant le calcul irréalisable en 1998.</a:t>
+              <a:t>• 2. Explosion des paramètres : Des millions de poids rendant le calcul impossible sur le matériel de 1998.</a:t>
             </a:r>
           </a:p>
           <a:p>
@@ -4493,14 +4515,14 @@
               <a:spcAft>
                 <a:spcPts val="800"/>
               </a:spcAft>
-              <a:defRPr sz="1200">
+              <a:defRPr sz="1150">
                 <a:solidFill>
                   <a:srgbClr val="475569"/>
                 </a:solidFill>
               </a:defRPr>
             </a:pPr>
             <a:r>
-              <a:t>• 3. Aucune invariance spatiale : Un simple décalage de 2 pixels du chiffre « 7 » provoquait une erreur totale.</a:t>
+              <a:t>• 3. Aucune invariance spatiale : Un décalage de 2 pixels du « 7 » provoquait une erreur totale.</a:t>
             </a:r>
           </a:p>
           <a:p>
@@ -4508,21 +4530,66 @@
               <a:spcAft>
                 <a:spcPts val="800"/>
               </a:spcAft>
-              <a:defRPr sz="1200">
+              <a:defRPr sz="1150">
                 <a:solidFill>
                   <a:srgbClr val="475569"/>
                 </a:solidFill>
               </a:defRPr>
             </a:pPr>
             <a:r>
-              <a:t>• La Révolution Convolution (Animée) : Un filtre glissant extrait les motifs locaux partout sur l'image avec un partage des poids optimal.</a:t>
-            </a:r>
+              <a:t>• La Révolution Convolution (Animée) : Le filtre glissant balaye l'image en partageant ses poids pour extraire les contours partout.</a:t>
+            </a:r>
+          </a:p>
+        </p:txBody>
+      </p:sp>
+      <p:sp>
+        <p:nvSpPr>
+          <p:cNvPr id="7" name="Rounded Rectangle 6"/>
+          <p:cNvSpPr/>
+          <p:nvPr/>
+        </p:nvSpPr>
+        <p:spPr>
+          <a:xfrm>
+            <a:off x="6217920" y="1463040"/>
+            <a:ext cx="5239512" cy="4663440"/>
+          </a:xfrm>
+          <a:prstGeom prst="roundRect">
+            <a:avLst/>
+          </a:prstGeom>
+          <a:solidFill>
+            <a:srgbClr val="0F172A"/>
+          </a:solidFill>
+          <a:ln w="19050">
+            <a:solidFill>
+              <a:srgbClr val="0969DA"/>
+            </a:solidFill>
+          </a:ln>
+        </p:spPr>
+        <p:style>
+          <a:lnRef idx="1">
+            <a:schemeClr val="accent1"/>
+          </a:lnRef>
+          <a:fillRef idx="3">
+            <a:schemeClr val="accent1"/>
+          </a:fillRef>
+          <a:effectRef idx="2">
+            <a:schemeClr val="accent1"/>
+          </a:effectRef>
+          <a:fontRef idx="minor">
+            <a:schemeClr val="lt1"/>
+          </a:fontRef>
+        </p:style>
+        <p:txBody>
+          <a:bodyPr rtlCol="0" anchor="ctr"/>
+          <a:lstStyle/>
+          <a:p>
+            <a:pPr algn="ctr"/>
           </a:p>
         </p:txBody>
       </p:sp>
       <p:pic>
         <p:nvPicPr>
-          <p:cNvPr id="7" name="Picture 6" descr="01_convolution.gif"/>
+          <p:cNvPr id="8" name="Picture 7" descr="01_convolution.gif"/>
           <p:cNvPicPr>
             <a:picLocks noChangeAspect="1"/>
           </p:cNvPicPr>
@@ -4536,8 +4603,8 @@
         </p:blipFill>
         <p:spPr>
           <a:xfrm>
-            <a:off x="6126480" y="1645920"/>
-            <a:ext cx="5303520" cy="2981757"/>
+            <a:off x="6309360" y="1600200"/>
+            <a:ext cx="5056632" cy="2842951"/>
           </a:xfrm>
           <a:prstGeom prst="rect">
             <a:avLst/>
@@ -4606,7 +4673,7 @@
         <p:spPr>
           <a:xfrm>
             <a:off x="731520" y="594360"/>
-            <a:ext cx="10698480" cy="731520"/>
+            <a:ext cx="10698480" cy="685800"/>
           </a:xfrm>
           <a:prstGeom prst="rect">
             <a:avLst/>
@@ -4620,7 +4687,7 @@
           <a:lstStyle/>
           <a:p>
             <a:pPr>
-              <a:defRPr sz="2300" b="1">
+              <a:defRPr sz="2200" b="1">
                 <a:solidFill>
                   <a:srgbClr val="0F172A"/>
                 </a:solidFill>
@@ -4640,8 +4707,8 @@
         </p:nvSpPr>
         <p:spPr>
           <a:xfrm>
-            <a:off x="731520" y="1353312"/>
-            <a:ext cx="10725912" cy="32004"/>
+            <a:off x="731520" y="1298448"/>
+            <a:ext cx="10725912" cy="27432"/>
           </a:xfrm>
           <a:prstGeom prst="rect">
             <a:avLst/>
@@ -4685,8 +4752,8 @@
         </p:nvSpPr>
         <p:spPr>
           <a:xfrm>
-            <a:off x="731520" y="6309360"/>
-            <a:ext cx="10698480" cy="320040"/>
+            <a:off x="731520" y="6327648"/>
+            <a:ext cx="10725912" cy="320040"/>
           </a:xfrm>
           <a:prstGeom prst="rect">
             <a:avLst/>
@@ -4700,7 +4767,7 @@
           <a:lstStyle/>
           <a:p>
             <a:pPr>
-              <a:defRPr sz="950">
+              <a:defRPr sz="900">
                 <a:solidFill>
                   <a:srgbClr val="475569"/>
                 </a:solidFill>
@@ -4709,12 +4776,57 @@
             <a:r>
               <a:t>LeNet-5 (1998) | Feugang Noussi, Bernard (Matricule: 6189470) | Slide 3/8  (1:45 - 3:00) | Réf: LeCun et al. (1998)</a:t>
             </a:r>
+          </a:p>
+        </p:txBody>
+      </p:sp>
+      <p:sp>
+        <p:nvSpPr>
+          <p:cNvPr id="6" name="Rounded Rectangle 5"/>
+          <p:cNvSpPr/>
+          <p:nvPr/>
+        </p:nvSpPr>
+        <p:spPr>
+          <a:xfrm>
+            <a:off x="731520" y="1417320"/>
+            <a:ext cx="10725912" cy="2926080"/>
+          </a:xfrm>
+          <a:prstGeom prst="roundRect">
+            <a:avLst/>
+          </a:prstGeom>
+          <a:solidFill>
+            <a:srgbClr val="0F172A"/>
+          </a:solidFill>
+          <a:ln w="19050">
+            <a:solidFill>
+              <a:srgbClr val="0969DA"/>
+            </a:solidFill>
+          </a:ln>
+        </p:spPr>
+        <p:style>
+          <a:lnRef idx="1">
+            <a:schemeClr val="accent1"/>
+          </a:lnRef>
+          <a:fillRef idx="3">
+            <a:schemeClr val="accent1"/>
+          </a:fillRef>
+          <a:effectRef idx="2">
+            <a:schemeClr val="accent1"/>
+          </a:effectRef>
+          <a:fontRef idx="minor">
+            <a:schemeClr val="lt1"/>
+          </a:fontRef>
+        </p:style>
+        <p:txBody>
+          <a:bodyPr rtlCol="0" anchor="ctr"/>
+          <a:lstStyle/>
+          <a:p>
+            <a:pPr algn="ctr"/>
           </a:p>
         </p:txBody>
       </p:sp>
       <p:pic>
         <p:nvPicPr>
-          <p:cNvPr id="6" name="Picture 5" descr="04_lenet5_pipeline.gif"/>
+          <p:cNvPr id="7" name="Picture 6" descr="04_lenet5_pipeline.gif"/>
           <p:cNvPicPr>
             <a:picLocks noChangeAspect="1"/>
           </p:cNvPicPr>
@@ -4728,8 +4840,8 @@
         </p:blipFill>
         <p:spPr>
           <a:xfrm>
-            <a:off x="914400" y="1463040"/>
-            <a:ext cx="10362895" cy="5826250"/>
+            <a:off x="822960" y="1463040"/>
+            <a:ext cx="10543032" cy="2834640"/>
           </a:xfrm>
           <a:prstGeom prst="rect">
             <a:avLst/>
@@ -4738,14 +4850,14 @@
       </p:pic>
       <p:sp>
         <p:nvSpPr>
-          <p:cNvPr id="7" name="Rounded Rectangle 6"/>
+          <p:cNvPr id="8" name="Rounded Rectangle 7"/>
           <p:cNvSpPr/>
           <p:nvPr/>
         </p:nvSpPr>
         <p:spPr>
           <a:xfrm>
-            <a:off x="731520" y="4297680"/>
-            <a:ext cx="1261872" cy="1645920"/>
+            <a:off x="731520" y="4480560"/>
+            <a:ext cx="1261872" cy="1691640"/>
           </a:xfrm>
           <a:prstGeom prst="roundRect">
             <a:avLst/>
@@ -4778,19 +4890,19 @@
           <a:lstStyle/>
           <a:p>
             <a:pPr algn="ctr">
-              <a:defRPr sz="1000" b="1">
+              <a:defRPr sz="950" b="1">
                 <a:solidFill>
                   <a:srgbClr val="0F172A"/>
                 </a:solidFill>
               </a:defRPr>
             </a:pPr>
             <a:r>
-              <a:t>Entrée 32×32</a:t>
+              <a:t>Entrée (32×32)</a:t>
             </a:r>
           </a:p>
           <a:p>
             <a:pPr>
-              <a:defRPr sz="900">
+              <a:defRPr sz="850">
                 <a:solidFill>
                   <a:srgbClr val="475569"/>
                 </a:solidFill>
@@ -4804,14 +4916,14 @@
       </p:sp>
       <p:sp>
         <p:nvSpPr>
-          <p:cNvPr id="8" name="Rounded Rectangle 7"/>
+          <p:cNvPr id="9" name="Rounded Rectangle 8"/>
           <p:cNvSpPr/>
           <p:nvPr/>
         </p:nvSpPr>
         <p:spPr>
           <a:xfrm>
-            <a:off x="2084832" y="4297680"/>
-            <a:ext cx="1261872" cy="1645920"/>
+            <a:off x="2084832" y="4480560"/>
+            <a:ext cx="1261872" cy="1691640"/>
           </a:xfrm>
           <a:prstGeom prst="roundRect">
             <a:avLst/>
@@ -4844,7 +4956,7 @@
           <a:lstStyle/>
           <a:p>
             <a:pPr algn="ctr">
-              <a:defRPr sz="1000" b="1">
+              <a:defRPr sz="950" b="1">
                 <a:solidFill>
                   <a:srgbClr val="0F172A"/>
                 </a:solidFill>
@@ -4856,7 +4968,7 @@
           </a:p>
           <a:p>
             <a:pPr>
-              <a:defRPr sz="900">
+              <a:defRPr sz="850">
                 <a:solidFill>
                   <a:srgbClr val="475569"/>
                 </a:solidFill>
@@ -4874,14 +4986,14 @@
       </p:sp>
       <p:sp>
         <p:nvSpPr>
-          <p:cNvPr id="9" name="Rounded Rectangle 8"/>
+          <p:cNvPr id="10" name="Rounded Rectangle 9"/>
           <p:cNvSpPr/>
           <p:nvPr/>
         </p:nvSpPr>
         <p:spPr>
           <a:xfrm>
-            <a:off x="3438144" y="4297680"/>
-            <a:ext cx="1261872" cy="1645920"/>
+            <a:off x="3438144" y="4480560"/>
+            <a:ext cx="1261872" cy="1691640"/>
           </a:xfrm>
           <a:prstGeom prst="roundRect">
             <a:avLst/>
@@ -4914,7 +5026,7 @@
           <a:lstStyle/>
           <a:p>
             <a:pPr algn="ctr">
-              <a:defRPr sz="1000" b="1">
+              <a:defRPr sz="950" b="1">
                 <a:solidFill>
                   <a:srgbClr val="0F172A"/>
                 </a:solidFill>
@@ -4926,14 +5038,14 @@
           </a:p>
           <a:p>
             <a:pPr>
-              <a:defRPr sz="900">
+              <a:defRPr sz="850">
                 <a:solidFill>
                   <a:srgbClr val="475569"/>
                 </a:solidFill>
               </a:defRPr>
             </a:pPr>
             <a:r>
-              <a:t>Subsampling 2×2</a:t>
+              <a:t>Pool 2×2</a:t>
             </a:r>
             <a:br/>
             <a:r>
@@ -4944,14 +5056,14 @@
       </p:sp>
       <p:sp>
         <p:nvSpPr>
-          <p:cNvPr id="10" name="Rounded Rectangle 9"/>
+          <p:cNvPr id="11" name="Rounded Rectangle 10"/>
           <p:cNvSpPr/>
           <p:nvPr/>
         </p:nvSpPr>
         <p:spPr>
           <a:xfrm>
-            <a:off x="4791455" y="4297680"/>
-            <a:ext cx="1261872" cy="1645920"/>
+            <a:off x="4791455" y="4480560"/>
+            <a:ext cx="1261872" cy="1691640"/>
           </a:xfrm>
           <a:prstGeom prst="roundRect">
             <a:avLst/>
@@ -4984,7 +5096,7 @@
           <a:lstStyle/>
           <a:p>
             <a:pPr algn="ctr">
-              <a:defRPr sz="1000" b="1">
+              <a:defRPr sz="950" b="1">
                 <a:solidFill>
                   <a:srgbClr val="0F172A"/>
                 </a:solidFill>
@@ -4996,7 +5108,7 @@
           </a:p>
           <a:p>
             <a:pPr>
-              <a:defRPr sz="900">
+              <a:defRPr sz="850">
                 <a:solidFill>
                   <a:srgbClr val="475569"/>
                 </a:solidFill>
@@ -5014,14 +5126,14 @@
       </p:sp>
       <p:sp>
         <p:nvSpPr>
-          <p:cNvPr id="11" name="Rounded Rectangle 10"/>
+          <p:cNvPr id="12" name="Rounded Rectangle 11"/>
           <p:cNvSpPr/>
           <p:nvPr/>
         </p:nvSpPr>
         <p:spPr>
           <a:xfrm>
-            <a:off x="6144768" y="4297680"/>
-            <a:ext cx="1261872" cy="1645920"/>
+            <a:off x="6144768" y="4480560"/>
+            <a:ext cx="1261872" cy="1691640"/>
           </a:xfrm>
           <a:prstGeom prst="roundRect">
             <a:avLst/>
@@ -5054,7 +5166,7 @@
           <a:lstStyle/>
           <a:p>
             <a:pPr algn="ctr">
-              <a:defRPr sz="1000" b="1">
+              <a:defRPr sz="950" b="1">
                 <a:solidFill>
                   <a:srgbClr val="0F172A"/>
                 </a:solidFill>
@@ -5066,14 +5178,14 @@
           </a:p>
           <a:p>
             <a:pPr>
-              <a:defRPr sz="900">
+              <a:defRPr sz="850">
                 <a:solidFill>
                   <a:srgbClr val="475569"/>
                 </a:solidFill>
               </a:defRPr>
             </a:pPr>
             <a:r>
-              <a:t>Subsampling 2×2</a:t>
+              <a:t>Pool 2×2</a:t>
             </a:r>
             <a:br/>
             <a:r>
@@ -5084,14 +5196,14 @@
       </p:sp>
       <p:sp>
         <p:nvSpPr>
-          <p:cNvPr id="12" name="Rounded Rectangle 11"/>
+          <p:cNvPr id="13" name="Rounded Rectangle 12"/>
           <p:cNvSpPr/>
           <p:nvPr/>
         </p:nvSpPr>
         <p:spPr>
           <a:xfrm>
-            <a:off x="7498080" y="4297680"/>
-            <a:ext cx="1261872" cy="1645920"/>
+            <a:off x="7498080" y="4480560"/>
+            <a:ext cx="1261872" cy="1691640"/>
           </a:xfrm>
           <a:prstGeom prst="roundRect">
             <a:avLst/>
@@ -5124,7 +5236,7 @@
           <a:lstStyle/>
           <a:p>
             <a:pPr algn="ctr">
-              <a:defRPr sz="1000" b="1">
+              <a:defRPr sz="950" b="1">
                 <a:solidFill>
                   <a:srgbClr val="0F172A"/>
                 </a:solidFill>
@@ -5136,7 +5248,7 @@
           </a:p>
           <a:p>
             <a:pPr>
-              <a:defRPr sz="900">
+              <a:defRPr sz="850">
                 <a:solidFill>
                   <a:srgbClr val="475569"/>
                 </a:solidFill>
@@ -5154,14 +5266,14 @@
       </p:sp>
       <p:sp>
         <p:nvSpPr>
-          <p:cNvPr id="13" name="Rounded Rectangle 12"/>
+          <p:cNvPr id="14" name="Rounded Rectangle 13"/>
           <p:cNvSpPr/>
           <p:nvPr/>
         </p:nvSpPr>
         <p:spPr>
           <a:xfrm>
-            <a:off x="8851392" y="4297680"/>
-            <a:ext cx="1261872" cy="1645920"/>
+            <a:off x="8851392" y="4480560"/>
+            <a:ext cx="1261872" cy="1691640"/>
           </a:xfrm>
           <a:prstGeom prst="roundRect">
             <a:avLst/>
@@ -5194,7 +5306,7 @@
           <a:lstStyle/>
           <a:p>
             <a:pPr algn="ctr">
-              <a:defRPr sz="1000" b="1">
+              <a:defRPr sz="950" b="1">
                 <a:solidFill>
                   <a:srgbClr val="0F172A"/>
                 </a:solidFill>
@@ -5206,7 +5318,7 @@
           </a:p>
           <a:p>
             <a:pPr>
-              <a:defRPr sz="900">
+              <a:defRPr sz="850">
                 <a:solidFill>
                   <a:srgbClr val="475569"/>
                 </a:solidFill>
@@ -5224,14 +5336,14 @@
       </p:sp>
       <p:sp>
         <p:nvSpPr>
-          <p:cNvPr id="14" name="Rounded Rectangle 13"/>
+          <p:cNvPr id="15" name="Rounded Rectangle 14"/>
           <p:cNvSpPr/>
           <p:nvPr/>
         </p:nvSpPr>
         <p:spPr>
           <a:xfrm>
-            <a:off x="10204704" y="4297680"/>
-            <a:ext cx="1261872" cy="1645920"/>
+            <a:off x="10204704" y="4480560"/>
+            <a:ext cx="1261872" cy="1691640"/>
           </a:xfrm>
           <a:prstGeom prst="roundRect">
             <a:avLst/>
@@ -5264,7 +5376,7 @@
           <a:lstStyle/>
           <a:p>
             <a:pPr algn="ctr">
-              <a:defRPr sz="1000" b="1">
+              <a:defRPr sz="950" b="1">
                 <a:solidFill>
                   <a:srgbClr val="0F172A"/>
                 </a:solidFill>
@@ -5276,7 +5388,7 @@
           </a:p>
           <a:p>
             <a:pPr>
-              <a:defRPr sz="900">
+              <a:defRPr sz="850">
                 <a:solidFill>
                   <a:srgbClr val="475569"/>
                 </a:solidFill>
@@ -5287,7 +5399,7 @@
             </a:r>
             <a:br/>
             <a:r>
-              <a:t>0 à 9</a:t>
+              <a:t>Pic sur « 7 »</a:t>
             </a:r>
           </a:p>
         </p:txBody>
@@ -5354,7 +5466,7 @@
         <p:spPr>
           <a:xfrm>
             <a:off x="731520" y="594360"/>
-            <a:ext cx="10698480" cy="731520"/>
+            <a:ext cx="10698480" cy="685800"/>
           </a:xfrm>
           <a:prstGeom prst="rect">
             <a:avLst/>
@@ -5368,7 +5480,7 @@
           <a:lstStyle/>
           <a:p>
             <a:pPr>
-              <a:defRPr sz="2300" b="1">
+              <a:defRPr sz="2200" b="1">
                 <a:solidFill>
                   <a:srgbClr val="0F172A"/>
                 </a:solidFill>
@@ -5388,8 +5500,8 @@
         </p:nvSpPr>
         <p:spPr>
           <a:xfrm>
-            <a:off x="731520" y="1353312"/>
-            <a:ext cx="10725912" cy="32004"/>
+            <a:off x="731520" y="1298448"/>
+            <a:ext cx="10725912" cy="27432"/>
           </a:xfrm>
           <a:prstGeom prst="rect">
             <a:avLst/>
@@ -5433,8 +5545,8 @@
         </p:nvSpPr>
         <p:spPr>
           <a:xfrm>
-            <a:off x="731520" y="6309360"/>
-            <a:ext cx="10698480" cy="320040"/>
+            <a:off x="731520" y="6327648"/>
+            <a:ext cx="10725912" cy="320040"/>
           </a:xfrm>
           <a:prstGeom prst="rect">
             <a:avLst/>
@@ -5448,7 +5560,7 @@
           <a:lstStyle/>
           <a:p>
             <a:pPr>
-              <a:defRPr sz="950">
+              <a:defRPr sz="900">
                 <a:solidFill>
                   <a:srgbClr val="475569"/>
                 </a:solidFill>
@@ -5462,28 +5574,50 @@
       </p:sp>
       <p:sp>
         <p:nvSpPr>
-          <p:cNvPr id="6" name="TextBox 5"/>
-          <p:cNvSpPr txBox="1"/>
+          <p:cNvPr id="6" name="Rounded Rectangle 5"/>
+          <p:cNvSpPr/>
           <p:nvPr/>
         </p:nvSpPr>
         <p:spPr>
           <a:xfrm>
-            <a:off x="731520" y="1554480"/>
-            <a:ext cx="5120640" cy="4480560"/>
-          </a:xfrm>
-          <a:prstGeom prst="rect">
+            <a:off x="731520" y="1463040"/>
+            <a:ext cx="5212080" cy="4663440"/>
+          </a:xfrm>
+          <a:prstGeom prst="roundRect">
             <a:avLst/>
           </a:prstGeom>
-          <a:noFill/>
-        </p:spPr>
-        <p:txBody>
-          <a:bodyPr wrap="square">
-            <a:spAutoFit/>
-          </a:bodyPr>
-          <a:lstStyle/>
-          <a:p>
-            <a:pPr>
-              <a:defRPr sz="1500" b="1">
+          <a:solidFill>
+            <a:srgbClr val="FFFFFF"/>
+          </a:solidFill>
+          <a:ln w="12700">
+            <a:solidFill>
+              <a:srgbClr val="E2E8F0"/>
+            </a:solidFill>
+          </a:ln>
+        </p:spPr>
+        <p:style>
+          <a:lnRef idx="1">
+            <a:schemeClr val="accent1"/>
+          </a:lnRef>
+          <a:fillRef idx="3">
+            <a:schemeClr val="accent1"/>
+          </a:fillRef>
+          <a:effectRef idx="2">
+            <a:schemeClr val="accent1"/>
+          </a:effectRef>
+          <a:fontRef idx="minor">
+            <a:schemeClr val="lt1"/>
+          </a:fontRef>
+        </p:style>
+        <p:txBody>
+          <a:bodyPr rtlCol="0" anchor="ctr" wrap="square"/>
+          <a:lstStyle/>
+          <a:p>
+            <a:pPr algn="ctr">
+              <a:spcAft>
+                <a:spcPts val="800"/>
+              </a:spcAft>
+              <a:defRPr sz="1400" b="1">
                 <a:solidFill>
                   <a:srgbClr val="0F172A"/>
                 </a:solidFill>
@@ -5498,7 +5632,7 @@
               <a:spcAft>
                 <a:spcPts val="800"/>
               </a:spcAft>
-              <a:defRPr sz="1200">
+              <a:defRPr sz="1150">
                 <a:solidFill>
                   <a:srgbClr val="475569"/>
                 </a:solidFill>
@@ -5513,7 +5647,7 @@
               <a:spcAft>
                 <a:spcPts val="800"/>
               </a:spcAft>
-              <a:defRPr sz="1200">
+              <a:defRPr sz="1150">
                 <a:solidFill>
                   <a:srgbClr val="475569"/>
                 </a:solidFill>
@@ -5528,7 +5662,7 @@
               <a:spcAft>
                 <a:spcPts val="800"/>
               </a:spcAft>
-              <a:defRPr sz="1200">
+              <a:defRPr sz="1150">
                 <a:solidFill>
                   <a:srgbClr val="475569"/>
                 </a:solidFill>
@@ -5543,7 +5677,7 @@
               <a:spcAft>
                 <a:spcPts val="800"/>
               </a:spcAft>
-              <a:defRPr sz="1200">
+              <a:defRPr sz="1150">
                 <a:solidFill>
                   <a:srgbClr val="475569"/>
                 </a:solidFill>
@@ -5552,12 +5686,57 @@
             <a:r>
               <a:t>• Temps de calcul : &lt; 10 ms par chiffre sur puce DSP, permettant le temps réel en production.</a:t>
             </a:r>
+          </a:p>
+        </p:txBody>
+      </p:sp>
+      <p:sp>
+        <p:nvSpPr>
+          <p:cNvPr id="7" name="Rounded Rectangle 6"/>
+          <p:cNvSpPr/>
+          <p:nvPr/>
+        </p:nvSpPr>
+        <p:spPr>
+          <a:xfrm>
+            <a:off x="6217920" y="1463040"/>
+            <a:ext cx="5239512" cy="4663440"/>
+          </a:xfrm>
+          <a:prstGeom prst="roundRect">
+            <a:avLst/>
+          </a:prstGeom>
+          <a:solidFill>
+            <a:srgbClr val="0F172A"/>
+          </a:solidFill>
+          <a:ln w="19050">
+            <a:solidFill>
+              <a:srgbClr val="0969DA"/>
+            </a:solidFill>
+          </a:ln>
+        </p:spPr>
+        <p:style>
+          <a:lnRef idx="1">
+            <a:schemeClr val="accent1"/>
+          </a:lnRef>
+          <a:fillRef idx="3">
+            <a:schemeClr val="accent1"/>
+          </a:fillRef>
+          <a:effectRef idx="2">
+            <a:schemeClr val="accent1"/>
+          </a:effectRef>
+          <a:fontRef idx="minor">
+            <a:schemeClr val="lt1"/>
+          </a:fontRef>
+        </p:style>
+        <p:txBody>
+          <a:bodyPr rtlCol="0" anchor="ctr"/>
+          <a:lstStyle/>
+          <a:p>
+            <a:pPr algn="ctr"/>
           </a:p>
         </p:txBody>
       </p:sp>
       <p:pic>
         <p:nvPicPr>
-          <p:cNvPr id="7" name="Picture 6" descr="02_neurone.gif"/>
+          <p:cNvPr id="8" name="Picture 7" descr="02_neurone.gif"/>
           <p:cNvPicPr>
             <a:picLocks noChangeAspect="1"/>
           </p:cNvPicPr>
@@ -5571,8 +5750,8 @@
         </p:blipFill>
         <p:spPr>
           <a:xfrm>
-            <a:off x="6126480" y="1645920"/>
-            <a:ext cx="5303520" cy="2981757"/>
+            <a:off x="6309360" y="1600200"/>
+            <a:ext cx="5056632" cy="2842951"/>
           </a:xfrm>
           <a:prstGeom prst="rect">
             <a:avLst/>
@@ -5641,7 +5820,7 @@
         <p:spPr>
           <a:xfrm>
             <a:off x="731520" y="594360"/>
-            <a:ext cx="10698480" cy="731520"/>
+            <a:ext cx="10698480" cy="685800"/>
           </a:xfrm>
           <a:prstGeom prst="rect">
             <a:avLst/>
@@ -5655,7 +5834,7 @@
           <a:lstStyle/>
           <a:p>
             <a:pPr>
-              <a:defRPr sz="2300" b="1">
+              <a:defRPr sz="2200" b="1">
                 <a:solidFill>
                   <a:srgbClr val="0F172A"/>
                 </a:solidFill>
@@ -5675,8 +5854,8 @@
         </p:nvSpPr>
         <p:spPr>
           <a:xfrm>
-            <a:off x="731520" y="1353312"/>
-            <a:ext cx="10725912" cy="32004"/>
+            <a:off x="731520" y="1298448"/>
+            <a:ext cx="10725912" cy="27432"/>
           </a:xfrm>
           <a:prstGeom prst="rect">
             <a:avLst/>
@@ -5720,8 +5899,8 @@
         </p:nvSpPr>
         <p:spPr>
           <a:xfrm>
-            <a:off x="731520" y="6309360"/>
-            <a:ext cx="10698480" cy="320040"/>
+            <a:off x="731520" y="6327648"/>
+            <a:ext cx="10725912" cy="320040"/>
           </a:xfrm>
           <a:prstGeom prst="rect">
             <a:avLst/>
@@ -5735,7 +5914,7 @@
           <a:lstStyle/>
           <a:p>
             <a:pPr>
-              <a:defRPr sz="950">
+              <a:defRPr sz="900">
                 <a:solidFill>
                   <a:srgbClr val="475569"/>
                 </a:solidFill>
@@ -5749,28 +5928,50 @@
       </p:sp>
       <p:sp>
         <p:nvSpPr>
-          <p:cNvPr id="6" name="TextBox 5"/>
-          <p:cNvSpPr txBox="1"/>
+          <p:cNvPr id="6" name="Rounded Rectangle 5"/>
+          <p:cNvSpPr/>
           <p:nvPr/>
         </p:nvSpPr>
         <p:spPr>
           <a:xfrm>
-            <a:off x="731520" y="1554480"/>
-            <a:ext cx="5486400" cy="4480560"/>
-          </a:xfrm>
-          <a:prstGeom prst="rect">
+            <a:off x="731520" y="1463040"/>
+            <a:ext cx="5212080" cy="4663440"/>
+          </a:xfrm>
+          <a:prstGeom prst="roundRect">
             <a:avLst/>
           </a:prstGeom>
-          <a:noFill/>
-        </p:spPr>
-        <p:txBody>
-          <a:bodyPr wrap="square">
-            <a:spAutoFit/>
-          </a:bodyPr>
-          <a:lstStyle/>
-          <a:p>
-            <a:pPr>
-              <a:defRPr sz="1500" b="1">
+          <a:solidFill>
+            <a:srgbClr val="FFFFFF"/>
+          </a:solidFill>
+          <a:ln w="12700">
+            <a:solidFill>
+              <a:srgbClr val="E2E8F0"/>
+            </a:solidFill>
+          </a:ln>
+        </p:spPr>
+        <p:style>
+          <a:lnRef idx="1">
+            <a:schemeClr val="accent1"/>
+          </a:lnRef>
+          <a:fillRef idx="3">
+            <a:schemeClr val="accent1"/>
+          </a:fillRef>
+          <a:effectRef idx="2">
+            <a:schemeClr val="accent1"/>
+          </a:effectRef>
+          <a:fontRef idx="minor">
+            <a:schemeClr val="lt1"/>
+          </a:fontRef>
+        </p:style>
+        <p:txBody>
+          <a:bodyPr rtlCol="0" anchor="ctr" wrap="square"/>
+          <a:lstStyle/>
+          <a:p>
+            <a:pPr algn="ctr">
+              <a:spcAft>
+                <a:spcPts val="800"/>
+              </a:spcAft>
+              <a:defRPr sz="1400" b="1">
                 <a:solidFill>
                   <a:srgbClr val="0F172A"/>
                 </a:solidFill>
@@ -5785,7 +5986,7 @@
               <a:spcAft>
                 <a:spcPts val="800"/>
               </a:spcAft>
-              <a:defRPr sz="1200">
+              <a:defRPr sz="1150">
                 <a:solidFill>
                   <a:srgbClr val="475569"/>
                 </a:solidFill>
@@ -5800,7 +6001,7 @@
               <a:spcAft>
                 <a:spcPts val="800"/>
               </a:spcAft>
-              <a:defRPr sz="1200">
+              <a:defRPr sz="1150">
                 <a:solidFill>
                   <a:srgbClr val="475569"/>
                 </a:solidFill>
@@ -5815,7 +6016,7 @@
               <a:spcAft>
                 <a:spcPts val="800"/>
               </a:spcAft>
-              <a:defRPr sz="1200">
+              <a:defRPr sz="1150">
                 <a:solidFill>
                   <a:srgbClr val="475569"/>
                 </a:solidFill>
@@ -5830,7 +6031,7 @@
               <a:spcAft>
                 <a:spcPts val="800"/>
               </a:spcAft>
-              <a:defRPr sz="1200">
+              <a:defRPr sz="1150">
                 <a:solidFill>
                   <a:srgbClr val="475569"/>
                 </a:solidFill>
@@ -5839,12 +6040,57 @@
             <a:r>
               <a:t>• Lecture des Codes Postaux (USPS) : Utilisé également pour le tri postal automatique des enveloppes manuscrites.</a:t>
             </a:r>
+          </a:p>
+        </p:txBody>
+      </p:sp>
+      <p:sp>
+        <p:nvSpPr>
+          <p:cNvPr id="7" name="Rounded Rectangle 6"/>
+          <p:cNvSpPr/>
+          <p:nvPr/>
+        </p:nvSpPr>
+        <p:spPr>
+          <a:xfrm>
+            <a:off x="6217920" y="1463040"/>
+            <a:ext cx="5239512" cy="4663440"/>
+          </a:xfrm>
+          <a:prstGeom prst="roundRect">
+            <a:avLst/>
+          </a:prstGeom>
+          <a:solidFill>
+            <a:srgbClr val="FFFFFF"/>
+          </a:solidFill>
+          <a:ln w="12700">
+            <a:solidFill>
+              <a:srgbClr val="E2E8F0"/>
+            </a:solidFill>
+          </a:ln>
+        </p:spPr>
+        <p:style>
+          <a:lnRef idx="1">
+            <a:schemeClr val="accent1"/>
+          </a:lnRef>
+          <a:fillRef idx="3">
+            <a:schemeClr val="accent1"/>
+          </a:fillRef>
+          <a:effectRef idx="2">
+            <a:schemeClr val="accent1"/>
+          </a:effectRef>
+          <a:fontRef idx="minor">
+            <a:schemeClr val="lt1"/>
+          </a:fontRef>
+        </p:style>
+        <p:txBody>
+          <a:bodyPr rtlCol="0" anchor="ctr"/>
+          <a:lstStyle/>
+          <a:p>
+            <a:pPr algn="ctr"/>
           </a:p>
         </p:txBody>
       </p:sp>
       <p:pic>
         <p:nvPicPr>
-          <p:cNvPr id="7" name="Picture 6" descr="fig08_cheque.svg.png"/>
+          <p:cNvPr id="8" name="Picture 7" descr="fig08_cheque.svg.png"/>
           <p:cNvPicPr>
             <a:picLocks noChangeAspect="1"/>
           </p:cNvPicPr>
@@ -5858,8 +6104,8 @@
         </p:blipFill>
         <p:spPr>
           <a:xfrm>
-            <a:off x="6492240" y="1554480"/>
-            <a:ext cx="4937760" cy="4937760"/>
+            <a:off x="6400800" y="1828800"/>
+            <a:ext cx="4873752" cy="4873752"/>
           </a:xfrm>
           <a:prstGeom prst="rect">
             <a:avLst/>
@@ -5928,7 +6174,7 @@
         <p:spPr>
           <a:xfrm>
             <a:off x="731520" y="594360"/>
-            <a:ext cx="10698480" cy="731520"/>
+            <a:ext cx="10698480" cy="685800"/>
           </a:xfrm>
           <a:prstGeom prst="rect">
             <a:avLst/>
@@ -5942,7 +6188,7 @@
           <a:lstStyle/>
           <a:p>
             <a:pPr>
-              <a:defRPr sz="2300" b="1">
+              <a:defRPr sz="2200" b="1">
                 <a:solidFill>
                   <a:srgbClr val="0F172A"/>
                 </a:solidFill>
@@ -5962,8 +6208,8 @@
         </p:nvSpPr>
         <p:spPr>
           <a:xfrm>
-            <a:off x="731520" y="1353312"/>
-            <a:ext cx="10725912" cy="32004"/>
+            <a:off x="731520" y="1298448"/>
+            <a:ext cx="10725912" cy="27432"/>
           </a:xfrm>
           <a:prstGeom prst="rect">
             <a:avLst/>
@@ -6007,8 +6253,8 @@
         </p:nvSpPr>
         <p:spPr>
           <a:xfrm>
-            <a:off x="731520" y="6309360"/>
-            <a:ext cx="10698480" cy="320040"/>
+            <a:off x="731520" y="6327648"/>
+            <a:ext cx="10725912" cy="320040"/>
           </a:xfrm>
           <a:prstGeom prst="rect">
             <a:avLst/>
@@ -6022,7 +6268,7 @@
           <a:lstStyle/>
           <a:p>
             <a:pPr>
-              <a:defRPr sz="950">
+              <a:defRPr sz="900">
                 <a:solidFill>
                   <a:srgbClr val="475569"/>
                 </a:solidFill>
@@ -6042,16 +6288,16 @@
         </p:nvSpPr>
         <p:spPr>
           <a:xfrm>
-            <a:off x="731520" y="1554480"/>
-            <a:ext cx="5120640" cy="4480560"/>
+            <a:off x="731520" y="1463040"/>
+            <a:ext cx="5212080" cy="2240280"/>
           </a:xfrm>
           <a:prstGeom prst="roundRect">
             <a:avLst/>
           </a:prstGeom>
           <a:solidFill>
-            <a:srgbClr val="FFFFFF"/>
+            <a:srgbClr val="F0FDF4"/>
           </a:solidFill>
-          <a:ln w="25400">
+          <a:ln w="19050">
             <a:solidFill>
               <a:srgbClr val="16A34A"/>
             </a:solidFill>
@@ -6076,81 +6322,192 @@
           <a:lstStyle/>
           <a:p>
             <a:pPr algn="ctr">
-              <a:defRPr sz="1500" b="1">
+              <a:defRPr sz="1200" b="1">
                 <a:solidFill>
                   <a:srgbClr val="16A34A"/>
                 </a:solidFill>
               </a:defRPr>
             </a:pPr>
             <a:r>
-              <a:t>✅ AVANTAGES MAJEURS</a:t>
+              <a:t>✅ FORCES &amp; AVANTAGES MAJEURS</a:t>
             </a:r>
           </a:p>
           <a:p>
             <a:pPr>
-              <a:spcBef>
-                <a:spcPts val="400"/>
-              </a:spcBef>
-              <a:defRPr sz="1100">
-                <a:solidFill>
-                  <a:srgbClr val="475569"/>
-                </a:solidFill>
-              </a:defRPr>
-            </a:pPr>
-            <a:r>
-              <a:t>✔ Invariance spatiale : Reconnaît les formes même translatées grâce au Pooling animé ci-contre.</a:t>
+              <a:defRPr sz="950">
+                <a:solidFill>
+                  <a:srgbClr val="0F172A"/>
+                </a:solidFill>
+              </a:defRPr>
+            </a:pPr>
+            <a:r>
+              <a:t>• Invariance spatiale : Reconnaît les formes même translatées grâce au Pooling.</a:t>
             </a:r>
           </a:p>
           <a:p>
             <a:pPr>
-              <a:spcBef>
-                <a:spcPts val="400"/>
-              </a:spcBef>
-              <a:defRPr sz="1100">
-                <a:solidFill>
-                  <a:srgbClr val="475569"/>
-                </a:solidFill>
-              </a:defRPr>
-            </a:pPr>
-            <a:r>
-              <a:t>✔ Forte compacité : Seulement 60 000 poids grâce au partage des filtres.</a:t>
+              <a:defRPr sz="950">
+                <a:solidFill>
+                  <a:srgbClr val="0F172A"/>
+                </a:solidFill>
+              </a:defRPr>
+            </a:pPr>
+            <a:r>
+              <a:t>• Forte compacité : Seulement 60 000 poids grâce au partage des filtres.</a:t>
             </a:r>
           </a:p>
           <a:p>
             <a:pPr>
-              <a:spcBef>
-                <a:spcPts val="400"/>
-              </a:spcBef>
-              <a:defRPr sz="1100">
-                <a:solidFill>
-                  <a:srgbClr val="475569"/>
-                </a:solidFill>
-              </a:defRPr>
-            </a:pPr>
-            <a:r>
-              <a:t>✔ Apprentissage bout-en-bout : Filtres et décision entraînés ensemble par rétropropagation.</a:t>
+              <a:defRPr sz="950">
+                <a:solidFill>
+                  <a:srgbClr val="0F172A"/>
+                </a:solidFill>
+              </a:defRPr>
+            </a:pPr>
+            <a:r>
+              <a:t>• Fiabilité industrielle : Taux d'erreur &lt; 1 % en conditions opérationnelles réelles.</a:t>
+            </a:r>
+          </a:p>
+        </p:txBody>
+      </p:sp>
+      <p:sp>
+        <p:nvSpPr>
+          <p:cNvPr id="7" name="Rounded Rectangle 6"/>
+          <p:cNvSpPr/>
+          <p:nvPr/>
+        </p:nvSpPr>
+        <p:spPr>
+          <a:xfrm>
+            <a:off x="731520" y="3840480"/>
+            <a:ext cx="5212080" cy="2286000"/>
+          </a:xfrm>
+          <a:prstGeom prst="roundRect">
+            <a:avLst/>
+          </a:prstGeom>
+          <a:solidFill>
+            <a:srgbClr val="FEF2F2"/>
+          </a:solidFill>
+          <a:ln w="19050">
+            <a:solidFill>
+              <a:srgbClr val="DC2626"/>
+            </a:solidFill>
+          </a:ln>
+        </p:spPr>
+        <p:style>
+          <a:lnRef idx="1">
+            <a:schemeClr val="accent1"/>
+          </a:lnRef>
+          <a:fillRef idx="3">
+            <a:schemeClr val="accent1"/>
+          </a:fillRef>
+          <a:effectRef idx="2">
+            <a:schemeClr val="accent1"/>
+          </a:effectRef>
+          <a:fontRef idx="minor">
+            <a:schemeClr val="lt1"/>
+          </a:fontRef>
+        </p:style>
+        <p:txBody>
+          <a:bodyPr rtlCol="0" anchor="ctr" wrap="square"/>
+          <a:lstStyle/>
+          <a:p>
+            <a:pPr algn="ctr">
+              <a:defRPr sz="1200" b="1">
+                <a:solidFill>
+                  <a:srgbClr val="DC2626"/>
+                </a:solidFill>
+              </a:defRPr>
+            </a:pPr>
+            <a:r>
+              <a:t>❌ LIMITES &amp; INCONVÉNIENTS</a:t>
             </a:r>
           </a:p>
           <a:p>
             <a:pPr>
-              <a:spcBef>
-                <a:spcPts val="400"/>
-              </a:spcBef>
-              <a:defRPr sz="1100">
-                <a:solidFill>
-                  <a:srgbClr val="475569"/>
-                </a:solidFill>
-              </a:defRPr>
-            </a:pPr>
-            <a:r>
-              <a:t>✔ Fiabilité industrielle : Taux d'erreur &lt; 1 % en conditions opérationnelles réelles.</a:t>
-            </a:r>
+              <a:defRPr sz="950">
+                <a:solidFill>
+                  <a:srgbClr val="0F172A"/>
+                </a:solidFill>
+              </a:defRPr>
+            </a:pPr>
+            <a:r>
+              <a:t>• Limité aux petites images : Conçu pour des images monochromes 32×32 pixels.</a:t>
+            </a:r>
+          </a:p>
+          <a:p>
+            <a:pPr>
+              <a:defRPr sz="950">
+                <a:solidFill>
+                  <a:srgbClr val="0F172A"/>
+                </a:solidFill>
+              </a:defRPr>
+            </a:pPr>
+            <a:r>
+              <a:t>• Fonctions saturantes : Sigmoïdes/tanh provoquant l'évanouissement du gradient.</a:t>
+            </a:r>
+          </a:p>
+          <a:p>
+            <a:pPr>
+              <a:defRPr sz="950">
+                <a:solidFill>
+                  <a:srgbClr val="0F172A"/>
+                </a:solidFill>
+              </a:defRPr>
+            </a:pPr>
+            <a:r>
+              <a:t>• Sous-échantillonnage moyenné : Moins sélectif que le Max-Pooling moderne.</a:t>
+            </a:r>
+          </a:p>
+        </p:txBody>
+      </p:sp>
+      <p:sp>
+        <p:nvSpPr>
+          <p:cNvPr id="8" name="Rounded Rectangle 7"/>
+          <p:cNvSpPr/>
+          <p:nvPr/>
+        </p:nvSpPr>
+        <p:spPr>
+          <a:xfrm>
+            <a:off x="6217920" y="1463040"/>
+            <a:ext cx="5239512" cy="4663440"/>
+          </a:xfrm>
+          <a:prstGeom prst="roundRect">
+            <a:avLst/>
+          </a:prstGeom>
+          <a:solidFill>
+            <a:srgbClr val="0F172A"/>
+          </a:solidFill>
+          <a:ln w="19050">
+            <a:solidFill>
+              <a:srgbClr val="0969DA"/>
+            </a:solidFill>
+          </a:ln>
+        </p:spPr>
+        <p:style>
+          <a:lnRef idx="1">
+            <a:schemeClr val="accent1"/>
+          </a:lnRef>
+          <a:fillRef idx="3">
+            <a:schemeClr val="accent1"/>
+          </a:fillRef>
+          <a:effectRef idx="2">
+            <a:schemeClr val="accent1"/>
+          </a:effectRef>
+          <a:fontRef idx="minor">
+            <a:schemeClr val="lt1"/>
+          </a:fontRef>
+        </p:style>
+        <p:txBody>
+          <a:bodyPr rtlCol="0" anchor="ctr"/>
+          <a:lstStyle/>
+          <a:p>
+            <a:pPr algn="ctr"/>
           </a:p>
         </p:txBody>
       </p:sp>
       <p:pic>
         <p:nvPicPr>
-          <p:cNvPr id="7" name="Picture 6" descr="03_pooling.gif"/>
+          <p:cNvPr id="9" name="Picture 8" descr="03_pooling.gif"/>
           <p:cNvPicPr>
             <a:picLocks noChangeAspect="1"/>
           </p:cNvPicPr>
@@ -6164,8 +6521,8 @@
         </p:blipFill>
         <p:spPr>
           <a:xfrm>
-            <a:off x="6126480" y="1554480"/>
-            <a:ext cx="5303520" cy="2981757"/>
+            <a:off x="6309360" y="1600200"/>
+            <a:ext cx="5056632" cy="2842951"/>
           </a:xfrm>
           <a:prstGeom prst="rect">
             <a:avLst/>
@@ -6234,7 +6591,7 @@
         <p:spPr>
           <a:xfrm>
             <a:off x="731520" y="594360"/>
-            <a:ext cx="10698480" cy="731520"/>
+            <a:ext cx="10698480" cy="685800"/>
           </a:xfrm>
           <a:prstGeom prst="rect">
             <a:avLst/>
@@ -6248,7 +6605,7 @@
           <a:lstStyle/>
           <a:p>
             <a:pPr>
-              <a:defRPr sz="2300" b="1">
+              <a:defRPr sz="2200" b="1">
                 <a:solidFill>
                   <a:srgbClr val="0F172A"/>
                 </a:solidFill>
@@ -6268,8 +6625,8 @@
         </p:nvSpPr>
         <p:spPr>
           <a:xfrm>
-            <a:off x="731520" y="1353312"/>
-            <a:ext cx="10725912" cy="32004"/>
+            <a:off x="731520" y="1298448"/>
+            <a:ext cx="10725912" cy="27432"/>
           </a:xfrm>
           <a:prstGeom prst="rect">
             <a:avLst/>
@@ -6313,8 +6670,8 @@
         </p:nvSpPr>
         <p:spPr>
           <a:xfrm>
-            <a:off x="731520" y="6309360"/>
-            <a:ext cx="10698480" cy="320040"/>
+            <a:off x="731520" y="6327648"/>
+            <a:ext cx="10725912" cy="320040"/>
           </a:xfrm>
           <a:prstGeom prst="rect">
             <a:avLst/>
@@ -6328,7 +6685,7 @@
           <a:lstStyle/>
           <a:p>
             <a:pPr>
-              <a:defRPr sz="950">
+              <a:defRPr sz="900">
                 <a:solidFill>
                   <a:srgbClr val="475569"/>
                 </a:solidFill>
@@ -6342,95 +6699,69 @@
       </p:sp>
       <p:sp>
         <p:nvSpPr>
-          <p:cNvPr id="6" name="TextBox 5"/>
-          <p:cNvSpPr txBox="1"/>
+          <p:cNvPr id="6" name="Rounded Rectangle 5"/>
+          <p:cNvSpPr/>
           <p:nvPr/>
         </p:nvSpPr>
         <p:spPr>
           <a:xfrm>
-            <a:off x="731520" y="1554480"/>
-            <a:ext cx="10725912" cy="4480560"/>
-          </a:xfrm>
-          <a:prstGeom prst="rect">
+            <a:off x="731520" y="1463040"/>
+            <a:ext cx="5257800" cy="1417320"/>
+          </a:xfrm>
+          <a:prstGeom prst="roundRect">
             <a:avLst/>
           </a:prstGeom>
-          <a:noFill/>
-        </p:spPr>
-        <p:txBody>
-          <a:bodyPr wrap="square">
-            <a:spAutoFit/>
-          </a:bodyPr>
-          <a:lstStyle/>
+          <a:solidFill>
+            <a:srgbClr val="FFFFFF"/>
+          </a:solidFill>
+          <a:ln w="12700">
+            <a:solidFill>
+              <a:srgbClr val="E2E8F0"/>
+            </a:solidFill>
+          </a:ln>
+        </p:spPr>
+        <p:style>
+          <a:lnRef idx="1">
+            <a:schemeClr val="accent1"/>
+          </a:lnRef>
+          <a:fillRef idx="3">
+            <a:schemeClr val="accent1"/>
+          </a:fillRef>
+          <a:effectRef idx="2">
+            <a:schemeClr val="accent1"/>
+          </a:effectRef>
+          <a:fontRef idx="minor">
+            <a:schemeClr val="lt1"/>
+          </a:fontRef>
+        </p:style>
+        <p:txBody>
+          <a:bodyPr rtlCol="0" anchor="ctr" wrap="square"/>
+          <a:lstStyle/>
+          <a:p>
+            <a:pPr algn="ctr">
+              <a:spcAft>
+                <a:spcPts val="300"/>
+              </a:spcAft>
+              <a:defRPr sz="1150" b="1">
+                <a:solidFill>
+                  <a:srgbClr val="0969DA"/>
+                </a:solidFill>
+              </a:defRPr>
+            </a:pPr>
+            <a:r>
+              <a:t>🚀 1. Le Triplet Fondamental CNN</a:t>
+            </a:r>
+          </a:p>
           <a:p>
             <a:pPr>
-              <a:defRPr sz="1600" b="1">
-                <a:solidFill>
-                  <a:srgbClr val="0F172A"/>
-                </a:solidFill>
-              </a:defRPr>
-            </a:pPr>
-            <a:r>
-              <a:t>L'Arbre Généalogique de la Vision par Ordinateur :</a:t>
-            </a:r>
-          </a:p>
-          <a:p>
-            <a:pPr>
-              <a:spcAft>
-                <a:spcPts val="800"/>
-              </a:spcAft>
-              <a:defRPr sz="1250">
+              <a:defRPr sz="950">
                 <a:solidFill>
                   <a:srgbClr val="475569"/>
                 </a:solidFill>
               </a:defRPr>
             </a:pPr>
             <a:r>
-              <a:t>🚀 Fondation du paradigme CNN : LeNet-5 a formalisé le triplet moderne : Convolution ➔ Activation non linéaire ➔ Sous-échantillonnage (Pooling).</a:t>
-            </a:r>
-          </a:p>
-          <a:p>
-            <a:pPr>
-              <a:spcAft>
-                <a:spcPts val="800"/>
-              </a:spcAft>
-              <a:defRPr sz="1250">
-                <a:solidFill>
-                  <a:srgbClr val="475569"/>
-                </a:solidFill>
-              </a:defRPr>
-            </a:pPr>
-            <a:r>
-              <a:t>🚀 Filiation directe vers AlexNet (2012) : AlexNet (vainqueur d'ImageNet 2012) est une extension directe de LeNet-5 adaptée sur GPU avec ReLU et Dropout.</a:t>
-            </a:r>
-          </a:p>
-          <a:p>
-            <a:pPr>
-              <a:spcAft>
-                <a:spcPts val="800"/>
-              </a:spcAft>
-              <a:defRPr sz="1250">
-                <a:solidFill>
-                  <a:srgbClr val="475569"/>
-                </a:solidFill>
-              </a:defRPr>
-            </a:pPr>
-            <a:r>
-              <a:t>🚀 L'ère des architectures profondes : A ouvert la voie à VGG (2014), ResNet (2015) et aux modèles de vision actuels (Vision Transformers, YOLO).</a:t>
-            </a:r>
-          </a:p>
-          <a:p>
-            <a:pPr>
-              <a:spcAft>
-                <a:spcPts val="800"/>
-              </a:spcAft>
-              <a:defRPr sz="1250">
-                <a:solidFill>
-                  <a:srgbClr val="475569"/>
-                </a:solidFill>
-              </a:defRPr>
-            </a:pPr>
-            <a:r>
-              <a:t>🚀 Applications contemporaines omniprésentes : Du déverrouillage Face ID à l'imagerie médicale et aux véhicules autonomes, les principes de LeNet-5 restent au cœur de la vision IA.</a:t>
+              <a:t>LeNet-5 a formalisé l'enchaînement universel : Convolution ➔ Activation ➔ Pooling, standard de toute la vision actuelle.</a:t>
             </a:r>
           </a:p>
         </p:txBody>
@@ -6443,8 +6774,215 @@
         </p:nvSpPr>
         <p:spPr>
           <a:xfrm>
-            <a:off x="731520" y="4846320"/>
-            <a:ext cx="10725912" cy="1188720"/>
+            <a:off x="6172200" y="1463040"/>
+            <a:ext cx="5257800" cy="1417320"/>
+          </a:xfrm>
+          <a:prstGeom prst="roundRect">
+            <a:avLst/>
+          </a:prstGeom>
+          <a:solidFill>
+            <a:srgbClr val="FFFFFF"/>
+          </a:solidFill>
+          <a:ln w="12700">
+            <a:solidFill>
+              <a:srgbClr val="E2E8F0"/>
+            </a:solidFill>
+          </a:ln>
+        </p:spPr>
+        <p:style>
+          <a:lnRef idx="1">
+            <a:schemeClr val="accent1"/>
+          </a:lnRef>
+          <a:fillRef idx="3">
+            <a:schemeClr val="accent1"/>
+          </a:fillRef>
+          <a:effectRef idx="2">
+            <a:schemeClr val="accent1"/>
+          </a:effectRef>
+          <a:fontRef idx="minor">
+            <a:schemeClr val="lt1"/>
+          </a:fontRef>
+        </p:style>
+        <p:txBody>
+          <a:bodyPr rtlCol="0" anchor="ctr" wrap="square"/>
+          <a:lstStyle/>
+          <a:p>
+            <a:pPr algn="ctr">
+              <a:spcAft>
+                <a:spcPts val="300"/>
+              </a:spcAft>
+              <a:defRPr sz="1150" b="1">
+                <a:solidFill>
+                  <a:srgbClr val="0969DA"/>
+                </a:solidFill>
+              </a:defRPr>
+            </a:pPr>
+            <a:r>
+              <a:t>🏆 2. Filiation Directe vers AlexNet (2012)</a:t>
+            </a:r>
+          </a:p>
+          <a:p>
+            <a:pPr>
+              <a:defRPr sz="950">
+                <a:solidFill>
+                  <a:srgbClr val="475569"/>
+                </a:solidFill>
+              </a:defRPr>
+            </a:pPr>
+            <a:r>
+              <a:t>AlexNet (vainqueur d'ImageNet 2012) est une extension directe de LeNet-5, transposée sur GPU avec ReLU et Dropout.</a:t>
+            </a:r>
+          </a:p>
+        </p:txBody>
+      </p:sp>
+      <p:sp>
+        <p:nvSpPr>
+          <p:cNvPr id="8" name="Rounded Rectangle 7"/>
+          <p:cNvSpPr/>
+          <p:nvPr/>
+        </p:nvSpPr>
+        <p:spPr>
+          <a:xfrm>
+            <a:off x="731520" y="3017520"/>
+            <a:ext cx="5257800" cy="1417320"/>
+          </a:xfrm>
+          <a:prstGeom prst="roundRect">
+            <a:avLst/>
+          </a:prstGeom>
+          <a:solidFill>
+            <a:srgbClr val="FFFFFF"/>
+          </a:solidFill>
+          <a:ln w="12700">
+            <a:solidFill>
+              <a:srgbClr val="E2E8F0"/>
+            </a:solidFill>
+          </a:ln>
+        </p:spPr>
+        <p:style>
+          <a:lnRef idx="1">
+            <a:schemeClr val="accent1"/>
+          </a:lnRef>
+          <a:fillRef idx="3">
+            <a:schemeClr val="accent1"/>
+          </a:fillRef>
+          <a:effectRef idx="2">
+            <a:schemeClr val="accent1"/>
+          </a:effectRef>
+          <a:fontRef idx="minor">
+            <a:schemeClr val="lt1"/>
+          </a:fontRef>
+        </p:style>
+        <p:txBody>
+          <a:bodyPr rtlCol="0" anchor="ctr" wrap="square"/>
+          <a:lstStyle/>
+          <a:p>
+            <a:pPr algn="ctr">
+              <a:spcAft>
+                <a:spcPts val="300"/>
+              </a:spcAft>
+              <a:defRPr sz="1150" b="1">
+                <a:solidFill>
+                  <a:srgbClr val="0969DA"/>
+                </a:solidFill>
+              </a:defRPr>
+            </a:pPr>
+            <a:r>
+              <a:t>🏗️ 3. L'Ère des Architectures Profondes</a:t>
+            </a:r>
+          </a:p>
+          <a:p>
+            <a:pPr>
+              <a:defRPr sz="950">
+                <a:solidFill>
+                  <a:srgbClr val="475569"/>
+                </a:solidFill>
+              </a:defRPr>
+            </a:pPr>
+            <a:r>
+              <a:t>A ouvert la voie à VGG (2014), ResNet (2015), YOLO et aux modèles Vision Transformers d'aujourd'hui.</a:t>
+            </a:r>
+          </a:p>
+        </p:txBody>
+      </p:sp>
+      <p:sp>
+        <p:nvSpPr>
+          <p:cNvPr id="9" name="Rounded Rectangle 8"/>
+          <p:cNvSpPr/>
+          <p:nvPr/>
+        </p:nvSpPr>
+        <p:spPr>
+          <a:xfrm>
+            <a:off x="6172200" y="3017520"/>
+            <a:ext cx="5257800" cy="1417320"/>
+          </a:xfrm>
+          <a:prstGeom prst="roundRect">
+            <a:avLst/>
+          </a:prstGeom>
+          <a:solidFill>
+            <a:srgbClr val="FFFFFF"/>
+          </a:solidFill>
+          <a:ln w="12700">
+            <a:solidFill>
+              <a:srgbClr val="E2E8F0"/>
+            </a:solidFill>
+          </a:ln>
+        </p:spPr>
+        <p:style>
+          <a:lnRef idx="1">
+            <a:schemeClr val="accent1"/>
+          </a:lnRef>
+          <a:fillRef idx="3">
+            <a:schemeClr val="accent1"/>
+          </a:fillRef>
+          <a:effectRef idx="2">
+            <a:schemeClr val="accent1"/>
+          </a:effectRef>
+          <a:fontRef idx="minor">
+            <a:schemeClr val="lt1"/>
+          </a:fontRef>
+        </p:style>
+        <p:txBody>
+          <a:bodyPr rtlCol="0" anchor="ctr" wrap="square"/>
+          <a:lstStyle/>
+          <a:p>
+            <a:pPr algn="ctr">
+              <a:spcAft>
+                <a:spcPts val="300"/>
+              </a:spcAft>
+              <a:defRPr sz="1150" b="1">
+                <a:solidFill>
+                  <a:srgbClr val="0969DA"/>
+                </a:solidFill>
+              </a:defRPr>
+            </a:pPr>
+            <a:r>
+              <a:t>📱 4. Applications Omniprésentes</a:t>
+            </a:r>
+          </a:p>
+          <a:p>
+            <a:pPr>
+              <a:defRPr sz="950">
+                <a:solidFill>
+                  <a:srgbClr val="475569"/>
+                </a:solidFill>
+              </a:defRPr>
+            </a:pPr>
+            <a:r>
+              <a:t>Du déverrouillage Face ID à l'imagerie médicale et aux véhicules autonomes, les principes de LeNet-5 sont au cœur de l'IA.</a:t>
+            </a:r>
+          </a:p>
+        </p:txBody>
+      </p:sp>
+      <p:sp>
+        <p:nvSpPr>
+          <p:cNvPr id="10" name="Rounded Rectangle 9"/>
+          <p:cNvSpPr/>
+          <p:nvPr/>
+        </p:nvSpPr>
+        <p:spPr>
+          <a:xfrm>
+            <a:off x="731520" y="4709160"/>
+            <a:ext cx="10725912" cy="1417320"/>
           </a:xfrm>
           <a:prstGeom prst="roundRect">
             <a:avLst/>
@@ -6452,7 +6990,7 @@
           <a:solidFill>
             <a:srgbClr val="EFF6FF"/>
           </a:solidFill>
-          <a:ln>
+          <a:ln w="19050">
             <a:solidFill>
               <a:srgbClr val="0969DA"/>
             </a:solidFill>
@@ -6477,7 +7015,7 @@
           <a:lstStyle/>
           <a:p>
             <a:pPr algn="ctr">
-              <a:defRPr sz="1100" b="1">
+              <a:defRPr sz="1150" b="1">
                 <a:solidFill>
                   <a:srgbClr val="0969DA"/>
                 </a:solidFill>
@@ -6489,6 +7027,9 @@
           </a:p>
           <a:p>
             <a:pPr>
+              <a:spcBef>
+                <a:spcPts val="400"/>
+              </a:spcBef>
               <a:defRPr sz="1000">
                 <a:solidFill>
                   <a:srgbClr val="0F172A"/>
@@ -6567,7 +7108,7 @@
         <p:spPr>
           <a:xfrm>
             <a:off x="731520" y="594360"/>
-            <a:ext cx="10698480" cy="731520"/>
+            <a:ext cx="10698480" cy="685800"/>
           </a:xfrm>
           <a:prstGeom prst="rect">
             <a:avLst/>
@@ -6581,7 +7122,7 @@
           <a:lstStyle/>
           <a:p>
             <a:pPr>
-              <a:defRPr sz="2300" b="1">
+              <a:defRPr sz="2200" b="1">
                 <a:solidFill>
                   <a:srgbClr val="0F172A"/>
                 </a:solidFill>
@@ -6601,8 +7142,8 @@
         </p:nvSpPr>
         <p:spPr>
           <a:xfrm>
-            <a:off x="731520" y="1353312"/>
-            <a:ext cx="10725912" cy="32004"/>
+            <a:off x="731520" y="1298448"/>
+            <a:ext cx="10725912" cy="27432"/>
           </a:xfrm>
           <a:prstGeom prst="rect">
             <a:avLst/>
@@ -6646,8 +7187,8 @@
         </p:nvSpPr>
         <p:spPr>
           <a:xfrm>
-            <a:off x="731520" y="6309360"/>
-            <a:ext cx="10698480" cy="320040"/>
+            <a:off x="731520" y="6327648"/>
+            <a:ext cx="10725912" cy="320040"/>
           </a:xfrm>
           <a:prstGeom prst="rect">
             <a:avLst/>
@@ -6661,7 +7202,7 @@
           <a:lstStyle/>
           <a:p>
             <a:pPr>
-              <a:defRPr sz="950">
+              <a:defRPr sz="900">
                 <a:solidFill>
                   <a:srgbClr val="475569"/>
                 </a:solidFill>
@@ -6675,95 +7216,276 @@
       </p:sp>
       <p:sp>
         <p:nvSpPr>
-          <p:cNvPr id="6" name="TextBox 5"/>
-          <p:cNvSpPr txBox="1"/>
+          <p:cNvPr id="6" name="Rounded Rectangle 5"/>
+          <p:cNvSpPr/>
           <p:nvPr/>
         </p:nvSpPr>
         <p:spPr>
           <a:xfrm>
             <a:off x="731520" y="1554480"/>
-            <a:ext cx="10725912" cy="4389120"/>
-          </a:xfrm>
-          <a:prstGeom prst="rect">
+            <a:ext cx="3456432" cy="2926080"/>
+          </a:xfrm>
+          <a:prstGeom prst="roundRect">
             <a:avLst/>
           </a:prstGeom>
-          <a:noFill/>
-        </p:spPr>
-        <p:txBody>
-          <a:bodyPr wrap="square">
-            <a:spAutoFit/>
-          </a:bodyPr>
-          <a:lstStyle/>
+          <a:solidFill>
+            <a:srgbClr val="FFFFFF"/>
+          </a:solidFill>
+          <a:ln w="19050">
+            <a:solidFill>
+              <a:srgbClr val="E2E8F0"/>
+            </a:solidFill>
+          </a:ln>
+        </p:spPr>
+        <p:style>
+          <a:lnRef idx="1">
+            <a:schemeClr val="accent1"/>
+          </a:lnRef>
+          <a:fillRef idx="3">
+            <a:schemeClr val="accent1"/>
+          </a:fillRef>
+          <a:effectRef idx="2">
+            <a:schemeClr val="accent1"/>
+          </a:effectRef>
+          <a:fontRef idx="minor">
+            <a:schemeClr val="lt1"/>
+          </a:fontRef>
+        </p:style>
+        <p:txBody>
+          <a:bodyPr rtlCol="0" anchor="ctr" wrap="square"/>
+          <a:lstStyle/>
+          <a:p>
+            <a:pPr algn="ctr">
+              <a:spcAft>
+                <a:spcPts val="1000"/>
+              </a:spcAft>
+              <a:defRPr sz="1300" b="1">
+                <a:solidFill>
+                  <a:srgbClr val="0F172A"/>
+                </a:solidFill>
+              </a:defRPr>
+            </a:pPr>
+            <a:r>
+              <a:t>🧠 1. Architecture Convolutive (CNN)</a:t>
+            </a:r>
+          </a:p>
           <a:p>
             <a:pPr>
-              <a:defRPr sz="1800" b="1">
+              <a:defRPr sz="1100">
+                <a:solidFill>
+                  <a:srgbClr val="475569"/>
+                </a:solidFill>
+              </a:defRPr>
+            </a:pPr>
+            <a:r>
+              <a:t>Spécialisée dans le traitement spatial 2D des images via des filtres partagés.</a:t>
+            </a:r>
+          </a:p>
+        </p:txBody>
+      </p:sp>
+      <p:sp>
+        <p:nvSpPr>
+          <p:cNvPr id="7" name="Rounded Rectangle 6"/>
+          <p:cNvSpPr/>
+          <p:nvPr/>
+        </p:nvSpPr>
+        <p:spPr>
+          <a:xfrm>
+            <a:off x="4370832" y="1554480"/>
+            <a:ext cx="3456432" cy="2926080"/>
+          </a:xfrm>
+          <a:prstGeom prst="roundRect">
+            <a:avLst/>
+          </a:prstGeom>
+          <a:solidFill>
+            <a:srgbClr val="FFFFFF"/>
+          </a:solidFill>
+          <a:ln w="19050">
+            <a:solidFill>
+              <a:srgbClr val="0969DA"/>
+            </a:solidFill>
+          </a:ln>
+        </p:spPr>
+        <p:style>
+          <a:lnRef idx="1">
+            <a:schemeClr val="accent1"/>
+          </a:lnRef>
+          <a:fillRef idx="3">
+            <a:schemeClr val="accent1"/>
+          </a:fillRef>
+          <a:effectRef idx="2">
+            <a:schemeClr val="accent1"/>
+          </a:effectRef>
+          <a:fontRef idx="minor">
+            <a:schemeClr val="lt1"/>
+          </a:fontRef>
+        </p:style>
+        <p:txBody>
+          <a:bodyPr rtlCol="0" anchor="ctr" wrap="square"/>
+          <a:lstStyle/>
+          <a:p>
+            <a:pPr algn="ctr">
+              <a:spcAft>
+                <a:spcPts val="1000"/>
+              </a:spcAft>
+              <a:defRPr sz="1300" b="1">
                 <a:solidFill>
                   <a:srgbClr val="0F172A"/>
                 </a:solidFill>
               </a:defRPr>
             </a:pPr>
             <a:r>
-              <a:t>Ce qu'il faut retenir en 3 points essentiels :</a:t>
+              <a:t>📈 2. Efficacité Prouvée sur le Terrain</a:t>
             </a:r>
           </a:p>
           <a:p>
             <a:pPr>
+              <a:defRPr sz="1100">
+                <a:solidFill>
+                  <a:srgbClr val="475569"/>
+                </a:solidFill>
+              </a:defRPr>
+            </a:pPr>
+            <a:r>
+              <a:t>0,8% d'erreur sur MNIST et des millions de chèques traités chaque mois chez NCR.</a:t>
+            </a:r>
+          </a:p>
+        </p:txBody>
+      </p:sp>
+      <p:sp>
+        <p:nvSpPr>
+          <p:cNvPr id="8" name="Rounded Rectangle 7"/>
+          <p:cNvSpPr/>
+          <p:nvPr/>
+        </p:nvSpPr>
+        <p:spPr>
+          <a:xfrm>
+            <a:off x="8010144" y="1554480"/>
+            <a:ext cx="3456432" cy="2926080"/>
+          </a:xfrm>
+          <a:prstGeom prst="roundRect">
+            <a:avLst/>
+          </a:prstGeom>
+          <a:solidFill>
+            <a:srgbClr val="FFFFFF"/>
+          </a:solidFill>
+          <a:ln w="19050">
+            <a:solidFill>
+              <a:srgbClr val="E2E8F0"/>
+            </a:solidFill>
+          </a:ln>
+        </p:spPr>
+        <p:style>
+          <a:lnRef idx="1">
+            <a:schemeClr val="accent1"/>
+          </a:lnRef>
+          <a:fillRef idx="3">
+            <a:schemeClr val="accent1"/>
+          </a:fillRef>
+          <a:effectRef idx="2">
+            <a:schemeClr val="accent1"/>
+          </a:effectRef>
+          <a:fontRef idx="minor">
+            <a:schemeClr val="lt1"/>
+          </a:fontRef>
+        </p:style>
+        <p:txBody>
+          <a:bodyPr rtlCol="0" anchor="ctr" wrap="square"/>
+          <a:lstStyle/>
+          <a:p>
+            <a:pPr algn="ctr">
               <a:spcAft>
-                <a:spcPts val="1200"/>
+                <a:spcPts val="1000"/>
               </a:spcAft>
-              <a:defRPr sz="1400">
+              <a:defRPr sz="1300" b="1">
+                <a:solidFill>
+                  <a:srgbClr val="0F172A"/>
+                </a:solidFill>
+              </a:defRPr>
+            </a:pPr>
+            <a:r>
+              <a:t>🚀 3. Point de Départ du Deep Learning</a:t>
+            </a:r>
+          </a:p>
+          <a:p>
+            <a:pPr>
+              <a:defRPr sz="1100">
                 <a:solidFill>
                   <a:srgbClr val="475569"/>
                 </a:solidFill>
               </a:defRPr>
             </a:pPr>
             <a:r>
-              <a:t>✔ 1. Une architecture Convolutive (CNN) : Spécialisée dans le traitement spatial 2D des images via des filtres partagés.</a:t>
-            </a:r>
-          </a:p>
-          <a:p>
-            <a:pPr>
-              <a:spcAft>
-                <a:spcPts val="1200"/>
-              </a:spcAft>
-              <a:defRPr sz="1400">
+              <a:t>Le socle architectural qui alimente la quasi-totalité des technologies de vision d'aujourd'hui.</a:t>
+            </a:r>
+          </a:p>
+        </p:txBody>
+      </p:sp>
+      <p:sp>
+        <p:nvSpPr>
+          <p:cNvPr id="9" name="Rounded Rectangle 8"/>
+          <p:cNvSpPr/>
+          <p:nvPr/>
+        </p:nvSpPr>
+        <p:spPr>
+          <a:xfrm>
+            <a:off x="731520" y="4663440"/>
+            <a:ext cx="10725912" cy="1371600"/>
+          </a:xfrm>
+          <a:prstGeom prst="roundRect">
+            <a:avLst/>
+          </a:prstGeom>
+          <a:solidFill>
+            <a:srgbClr val="F0FDF4"/>
+          </a:solidFill>
+          <a:ln w="19050">
+            <a:solidFill>
+              <a:srgbClr val="16A34A"/>
+            </a:solidFill>
+          </a:ln>
+        </p:spPr>
+        <p:style>
+          <a:lnRef idx="1">
+            <a:schemeClr val="accent1"/>
+          </a:lnRef>
+          <a:fillRef idx="3">
+            <a:schemeClr val="accent1"/>
+          </a:fillRef>
+          <a:effectRef idx="2">
+            <a:schemeClr val="accent1"/>
+          </a:effectRef>
+          <a:fontRef idx="minor">
+            <a:schemeClr val="lt1"/>
+          </a:fontRef>
+        </p:style>
+        <p:txBody>
+          <a:bodyPr rtlCol="0" anchor="ctr"/>
+          <a:lstStyle/>
+          <a:p>
+            <a:pPr algn="ctr">
+              <a:defRPr sz="1600" b="1">
+                <a:solidFill>
+                  <a:srgbClr val="16A34A"/>
+                </a:solidFill>
+              </a:defRPr>
+            </a:pPr>
+            <a:r>
+              <a:t>💬 Merci pour votre attention ! Place à vos questions.</a:t>
+            </a:r>
+          </a:p>
+          <a:p>
+            <a:pPr algn="ctr">
+              <a:spcBef>
+                <a:spcPts val="400"/>
+              </a:spcBef>
+              <a:defRPr sz="1100">
                 <a:solidFill>
                   <a:srgbClr val="475569"/>
                 </a:solidFill>
               </a:defRPr>
             </a:pPr>
             <a:r>
-              <a:t>✔ 2. Une efficacité prouvée sur le terrain : 0,8% d'erreur sur MNIST et des millions de chèques traités chaque mois chez NCR.</a:t>
-            </a:r>
-          </a:p>
-          <a:p>
-            <a:pPr>
-              <a:spcAft>
-                <a:spcPts val="1200"/>
-              </a:spcAft>
-              <a:defRPr sz="1400">
-                <a:solidFill>
-                  <a:srgbClr val="475569"/>
-                </a:solidFill>
-              </a:defRPr>
-            </a:pPr>
-            <a:r>
-              <a:t>✔ 3. Le point de départ du Deep Learning : Le socle architectural qui alimente la quasi-totalité des technologies de vision d'aujourd'hui.</a:t>
-            </a:r>
-          </a:p>
-          <a:p>
-            <a:pPr>
-              <a:spcBef>
-                <a:spcPts val="1600"/>
-              </a:spcBef>
-              <a:defRPr sz="1700" b="1">
-                <a:solidFill>
-                  <a:srgbClr val="0969DA"/>
-                </a:solidFill>
-              </a:defRPr>
-            </a:pPr>
-            <a:r>
-              <a:t>💬 Merci pour votre attention ! (Feugang Noussi Bernard — 6189470)</a:t>
+              <a:t>Feugang Noussi, Bernard (Matricule: 6189470) — Cours 420-A60-BB (Été 2026)</a:t>
             </a:r>
           </a:p>
         </p:txBody>

--- a/presentation_rxneurones_lenet5.pptx
+++ b/presentation_rxneurones_lenet5.pptx
@@ -649,7 +649,7 @@
           <a:lstStyle/>
           <a:p>
             <a:r>
-              <a:t>L'animation en haut montre la propagation du signal dans les 7 couches de LeNet-5, résumées en bas : des deux blocs Convolution-Subsampling (C1-S2, C3-S4) jusqu'aux couches denses.</a:t>
+              <a:t>L'animation en haut montre la propagation du signal dans les 7 couches de LeNet-5 : des deux blocs Convolution-Subsampling (C1-S2, C3-S4) jusqu'aux couches denses.</a:t>
             </a:r>
           </a:p>
         </p:txBody>
@@ -789,7 +789,7 @@
           <a:lstStyle/>
           <a:p>
             <a:r>
-              <a:t>Ce n'était pas un modèle purement académique : NCR l'a déployé pour traiter des millions de chèques par mois, soit près de 10% du volume bancaire américain.</a:t>
+              <a:t>NCR a déployé LeNet-5 dès juin 1996 pour traiter ~20 millions de chèques par jour, soit environ 10% du volume bancaire américain [Sect. III-B].</a:t>
             </a:r>
           </a:p>
         </p:txBody>
@@ -4059,7 +4059,7 @@
         <p:spPr>
           <a:xfrm>
             <a:off x="1371600" y="1188720"/>
-            <a:ext cx="4937760" cy="384048"/>
+            <a:ext cx="5303520" cy="384048"/>
           </a:xfrm>
           <a:prstGeom prst="roundRect">
             <a:avLst/>
@@ -4092,14 +4092,14 @@
           <a:lstStyle/>
           <a:p>
             <a:pPr algn="ctr">
-              <a:defRPr sz="1050" b="1">
+              <a:defRPr sz="1000" b="1">
                 <a:solidFill>
                   <a:srgbClr val="0969DA"/>
                 </a:solidFill>
               </a:defRPr>
             </a:pPr>
             <a:r>
-              <a:t>ARCHITECTURE N°6 : RÉSEAU CONVOLUTIF (CNN)</a:t>
+              <a:t>ARCHITECTURE N°6 : RÉSEAU DE NEURONES CONVOLUTIF (CNN)</a:t>
             </a:r>
           </a:p>
         </p:txBody>
@@ -4237,7 +4237,7 @@
               </a:defRPr>
             </a:pPr>
             <a:r>
-              <a:t>📄 Article source : Yann LeCun, Léon Bottou, Yoshua Bengio, Patrick Haffner (IEEE 1998)</a:t>
+              <a:t>📄 Article source : Yann LeCun, Léon Bottou, Yoshua Bengio, Patrick Haffner (AT&amp;T Labs-Research, IEEE 1998)</a:t>
             </a:r>
           </a:p>
           <a:p>
@@ -4252,7 +4252,7 @@
               </a:defRPr>
             </a:pPr>
             <a:r>
-              <a:t>⏱️ Format officiel : 7 minutes (+ 3 minutes de questions)  |  Animations Motion Design intégrées</a:t>
+              <a:t>⏱️ Format officiel : 7 minutes (+ 3 minutes de questions)  |  Explications claires TSA-Friendly</a:t>
             </a:r>
           </a:p>
         </p:txBody>
@@ -4470,14 +4470,14 @@
               <a:spcAft>
                 <a:spcPts val="800"/>
               </a:spcAft>
-              <a:defRPr sz="1400" b="1">
+              <a:defRPr sz="1350" b="1">
                 <a:solidFill>
                   <a:srgbClr val="0F172A"/>
                 </a:solidFill>
               </a:defRPr>
             </a:pPr>
             <a:r>
-              <a:t>Pourquoi les réseaux denses (MLP) échouaient :</a:t>
+              <a:t>Pourquoi les réseaux denses (MLP = Perceptron Multi-Couches) échouaient :</a:t>
             </a:r>
           </a:p>
           <a:p>
@@ -4902,7 +4902,7 @@
           </a:p>
           <a:p>
             <a:pPr>
-              <a:defRPr sz="850">
+              <a:defRPr sz="819">
                 <a:solidFill>
                   <a:srgbClr val="475569"/>
                 </a:solidFill>
@@ -4968,7 +4968,7 @@
           </a:p>
           <a:p>
             <a:pPr>
-              <a:defRPr sz="850">
+              <a:defRPr sz="819">
                 <a:solidFill>
                   <a:srgbClr val="475569"/>
                 </a:solidFill>
@@ -4979,7 +4979,7 @@
             </a:r>
             <a:br/>
             <a:r>
-              <a:t>156 poids</a:t>
+              <a:t>156 poids [Sect. II-B]</a:t>
             </a:r>
           </a:p>
         </p:txBody>
@@ -5038,7 +5038,7 @@
           </a:p>
           <a:p>
             <a:pPr>
-              <a:defRPr sz="850">
+              <a:defRPr sz="819">
                 <a:solidFill>
                   <a:srgbClr val="475569"/>
                 </a:solidFill>
@@ -5049,7 +5049,7 @@
             </a:r>
             <a:br/>
             <a:r>
-              <a:t>12 poids</a:t>
+              <a:t>12 poids [Sect. II-B]</a:t>
             </a:r>
           </a:p>
         </p:txBody>
@@ -5108,7 +5108,7 @@
           </a:p>
           <a:p>
             <a:pPr>
-              <a:defRPr sz="850">
+              <a:defRPr sz="819">
                 <a:solidFill>
                   <a:srgbClr val="475569"/>
                 </a:solidFill>
@@ -5119,7 +5119,7 @@
             </a:r>
             <a:br/>
             <a:r>
-              <a:t>1 516 poids</a:t>
+              <a:t>1 516 poids [Sect. II-B]</a:t>
             </a:r>
           </a:p>
         </p:txBody>
@@ -5178,7 +5178,7 @@
           </a:p>
           <a:p>
             <a:pPr>
-              <a:defRPr sz="850">
+              <a:defRPr sz="819">
                 <a:solidFill>
                   <a:srgbClr val="475569"/>
                 </a:solidFill>
@@ -5189,7 +5189,7 @@
             </a:r>
             <a:br/>
             <a:r>
-              <a:t>32 poids</a:t>
+              <a:t>32 poids [Sect. II-B]</a:t>
             </a:r>
           </a:p>
         </p:txBody>
@@ -5248,7 +5248,7 @@
           </a:p>
           <a:p>
             <a:pPr>
-              <a:defRPr sz="850">
+              <a:defRPr sz="819">
                 <a:solidFill>
                   <a:srgbClr val="475569"/>
                 </a:solidFill>
@@ -5259,7 +5259,7 @@
             </a:r>
             <a:br/>
             <a:r>
-              <a:t>48 120 poids</a:t>
+              <a:t>48 120 poids [Sect. II-B]</a:t>
             </a:r>
           </a:p>
         </p:txBody>
@@ -5318,7 +5318,7 @@
           </a:p>
           <a:p>
             <a:pPr>
-              <a:defRPr sz="850">
+              <a:defRPr sz="819">
                 <a:solidFill>
                   <a:srgbClr val="475569"/>
                 </a:solidFill>
@@ -5329,7 +5329,7 @@
             </a:r>
             <a:br/>
             <a:r>
-              <a:t>10 164 poids</a:t>
+              <a:t>10 164 poids [Sect. II-B]</a:t>
             </a:r>
           </a:p>
         </p:txBody>
@@ -5388,7 +5388,7 @@
           </a:p>
           <a:p>
             <a:pPr>
-              <a:defRPr sz="850">
+              <a:defRPr sz="819">
                 <a:solidFill>
                   <a:srgbClr val="475569"/>
                 </a:solidFill>
@@ -5639,7 +5639,7 @@
               </a:defRPr>
             </a:pPr>
             <a:r>
-              <a:t>• Taux d'erreur record : 0,8 % : Sur les 10 000 images de test, l'erreur chute à 0,95% (sans distorsion) et 0,8% (avec distorsions) [Table 2].</a:t>
+              <a:t>• Taux d'erreur record : 0,8 % : Sur les 10 000 images de test, l'erreur s'établit à 0,95% (sans distorsion) et 0,8% (avec distorsions) [Sect. III-B].</a:t>
             </a:r>
           </a:p>
           <a:p>
@@ -5654,7 +5654,7 @@
               </a:defRPr>
             </a:pPr>
             <a:r>
-              <a:t>• Nombre de paramètres : ~60 000 : Exactement 60 000 paramètres libres entraînables pour 340 915 connexions [Table 1].</a:t>
+              <a:t>• Nombre de paramètres : ~60 000 : Exactement 60 000 paramètres libres entraînables pour 340 915 connexions [Sect. II-A].</a:t>
             </a:r>
           </a:p>
           <a:p>
@@ -5684,7 +5684,7 @@
               </a:defRPr>
             </a:pPr>
             <a:r>
-              <a:t>• Temps de calcul : &lt; 10 ms par chiffre sur puce DSP, permettant le temps réel en production.</a:t>
+              <a:t>• Temps de calcul : &lt; 10 ms par chiffre sur puce DSP (Digital Signal Processor), permettant le temps réel.</a:t>
             </a:r>
           </a:p>
         </p:txBody>
@@ -5978,7 +5978,7 @@
               </a:defRPr>
             </a:pPr>
             <a:r>
-              <a:t>Un Succès Commercial Massif dès 1998 :</a:t>
+              <a:t>Un Succès Commercial Massif (depuis juin 1996) :</a:t>
             </a:r>
           </a:p>
           <a:p>
@@ -5993,7 +5993,7 @@
               </a:defRPr>
             </a:pPr>
             <a:r>
-              <a:t>• Déploiement Bancaire NCR : Intégré dans les machines de tri automatique de chèques bancaires par le constructeur NCR [Section I].</a:t>
+              <a:t>• Déploiement Bancaire NCR : Intégré dans les trieuses automatiques de chèques par le constructeur NCR (National Cash Register) dès juin 1996 [Sect. III-B].</a:t>
             </a:r>
           </a:p>
           <a:p>
@@ -6008,7 +6008,7 @@
               </a:defRPr>
             </a:pPr>
             <a:r>
-              <a:t>• Des Millions de Chèques par Mois : LeNet-5 lisait en production plusieurs millions de chèques/mois aux USA [Section I].</a:t>
+              <a:t>• Volume Industriel Massif : Traitement d'environ ~20 millions de chèques par jour en production aux USA [Sect. III-B].</a:t>
             </a:r>
           </a:p>
           <a:p>
@@ -6023,7 +6023,7 @@
               </a:defRPr>
             </a:pPr>
             <a:r>
-              <a:t>• ~10 % du Volume Américain : Estimé à 10% de tous les chèques en circulation aux USA à la fin des années 1990 [Wikipédia, LeNet].</a:t>
+              <a:t>• ~10 % du Volume Américain : Représentait environ 10% de la totalité des chèques en circulation aux USA [Sect. III-B].</a:t>
             </a:r>
           </a:p>
           <a:p>
@@ -6038,7 +6038,7 @@
               </a:defRPr>
             </a:pPr>
             <a:r>
-              <a:t>• Lecture des Codes Postaux (USPS) : Utilisé également pour le tri postal automatique des enveloppes manuscrites.</a:t>
+              <a:t>• Lecture des Codes Postaux (USPS) : Utilisé également par les services postaux pour le tri automatique des enveloppes manuscrites.</a:t>
             </a:r>
           </a:p>
         </p:txBody>
@@ -6353,7 +6353,7 @@
               </a:defRPr>
             </a:pPr>
             <a:r>
-              <a:t>• Forte compacité : Seulement 60 000 poids grâce au partage des filtres.</a:t>
+              <a:t>• Forte compacité : Seulement 60 000 poids grâce au partage des filtres [Sect. II-A].</a:t>
             </a:r>
           </a:p>
           <a:p>
@@ -6365,7 +6365,7 @@
               </a:defRPr>
             </a:pPr>
             <a:r>
-              <a:t>• Fiabilité industrielle : Taux d'erreur &lt; 1 % en conditions opérationnelles réelles.</a:t>
+              <a:t>• Fiabilité industrielle : Taux d'erreur &lt; 1 % en conditions opérationnelles réelles [Sect. III-B].</a:t>
             </a:r>
           </a:p>
         </p:txBody>
@@ -7347,7 +7347,7 @@
               </a:defRPr>
             </a:pPr>
             <a:r>
-              <a:t>0,8% d'erreur sur MNIST et des millions de chèques traités chaque mois chez NCR.</a:t>
+              <a:t>0,8% d'erreur sur MNIST et ~20 millions de chèques traités/jour chez NCR [Sect. III-B].</a:t>
             </a:r>
           </a:p>
         </p:txBody>
